--- a/assets/lessons/lectures/digital-signal-processing/fourier-series-2018.pptx
+++ b/assets/lessons/lectures/digital-signal-processing/fourier-series-2018.pptx
@@ -16,7 +16,7 @@
     <p:sldId id="262" r:id="rId7"/>
     <p:sldId id="263" r:id="rId8"/>
   </p:sldIdLst>
-  <p:sldSz cx="12192000" cy="6858000"/>
+  <p:sldSz cx="12192000" cy="7543800"/>
   <p:notesSz cx="6858000" cy="9144000"/>
   <p:defaultTextStyle>
     <a:defPPr>
@@ -119,6 +119,185 @@
     </p:ext>
   </p:extLst>
 </p:presentation>
+</file>
+
+<file path=ppt/customXml/item1.xml><?xml version="1.0" encoding="utf-8"?>
+<ct:contentTypeSchema xmlns:ct="http://schemas.microsoft.com/office/2006/metadata/contentType" xmlns:ma="http://schemas.microsoft.com/office/2006/metadata/properties/metaAttributes" ct:_="" ma:_="" ma:contentTypeName="Document" ma:contentTypeID="0x01010016C36F108F9F92488C988DDF36346911" ma:contentTypeVersion="5" ma:contentTypeDescription="Create a new document." ma:contentTypeScope="" ma:versionID="c417924321fef32731141cd966ef6f94">
+  <xsd:schema xmlns:xsd="http://www.w3.org/2001/XMLSchema" xmlns:xs="http://www.w3.org/2001/XMLSchema" xmlns:p="http://schemas.microsoft.com/office/2006/metadata/properties" xmlns:ns2="1bb24863-89de-455f-aabf-4424925aa312" targetNamespace="http://schemas.microsoft.com/office/2006/metadata/properties" ma:root="true" ma:fieldsID="a7d3b2212d350eb904df17fc79fef4f4" ns2:_="">
+    <xsd:import namespace="1bb24863-89de-455f-aabf-4424925aa312"/>
+    <xsd:element name="properties">
+      <xsd:complexType>
+        <xsd:sequence>
+          <xsd:element name="documentManagement">
+            <xsd:complexType>
+              <xsd:all>
+                <xsd:element ref="ns2:MediaServiceMetadata" minOccurs="0"/>
+                <xsd:element ref="ns2:MediaServiceFastMetadata" minOccurs="0"/>
+                <xsd:element ref="ns2:MediaServiceAutoTags" minOccurs="0"/>
+                <xsd:element ref="ns2:MediaServiceOCR" minOccurs="0"/>
+                <xsd:element ref="ns2:MediaServiceDateTaken" minOccurs="0"/>
+              </xsd:all>
+            </xsd:complexType>
+          </xsd:element>
+        </xsd:sequence>
+      </xsd:complexType>
+    </xsd:element>
+  </xsd:schema>
+  <xsd:schema xmlns:xsd="http://www.w3.org/2001/XMLSchema" xmlns:xs="http://www.w3.org/2001/XMLSchema" xmlns:dms="http://schemas.microsoft.com/office/2006/documentManagement/types" xmlns:pc="http://schemas.microsoft.com/office/infopath/2007/PartnerControls" targetNamespace="1bb24863-89de-455f-aabf-4424925aa312" elementFormDefault="qualified">
+    <xsd:import namespace="http://schemas.microsoft.com/office/2006/documentManagement/types"/>
+    <xsd:import namespace="http://schemas.microsoft.com/office/infopath/2007/PartnerControls"/>
+    <xsd:element name="MediaServiceMetadata" ma:index="8" nillable="true" ma:displayName="MediaServiceMetadata" ma:hidden="true" ma:internalName="MediaServiceMetadata" ma:readOnly="true">
+      <xsd:simpleType>
+        <xsd:restriction base="dms:Note"/>
+      </xsd:simpleType>
+    </xsd:element>
+    <xsd:element name="MediaServiceFastMetadata" ma:index="9" nillable="true" ma:displayName="MediaServiceFastMetadata" ma:hidden="true" ma:internalName="MediaServiceFastMetadata" ma:readOnly="true">
+      <xsd:simpleType>
+        <xsd:restriction base="dms:Note"/>
+      </xsd:simpleType>
+    </xsd:element>
+    <xsd:element name="MediaServiceAutoTags" ma:index="10" nillable="true" ma:displayName="MediaServiceAutoTags" ma:internalName="MediaServiceAutoTags" ma:readOnly="true">
+      <xsd:simpleType>
+        <xsd:restriction base="dms:Text"/>
+      </xsd:simpleType>
+    </xsd:element>
+    <xsd:element name="MediaServiceOCR" ma:index="11" nillable="true" ma:displayName="MediaServiceOCR" ma:internalName="MediaServiceOCR" ma:readOnly="true">
+      <xsd:simpleType>
+        <xsd:restriction base="dms:Note">
+          <xsd:maxLength value="255"/>
+        </xsd:restriction>
+      </xsd:simpleType>
+    </xsd:element>
+    <xsd:element name="MediaServiceDateTaken" ma:index="12" nillable="true" ma:displayName="MediaServiceDateTaken" ma:hidden="true" ma:internalName="MediaServiceDateTaken" ma:readOnly="true">
+      <xsd:simpleType>
+        <xsd:restriction base="dms:Text"/>
+      </xsd:simpleType>
+    </xsd:element>
+  </xsd:schema>
+  <xsd:schema xmlns="http://schemas.openxmlformats.org/package/2006/metadata/core-properties" xmlns:xsd="http://www.w3.org/2001/XMLSchema" xmlns:xsi="http://www.w3.org/2001/XMLSchema-instance" xmlns:dc="http://purl.org/dc/elements/1.1/" xmlns:dcterms="http://purl.org/dc/terms/" xmlns:odoc="http://schemas.microsoft.com/internal/obd" targetNamespace="http://schemas.openxmlformats.org/package/2006/metadata/core-properties" elementFormDefault="qualified" attributeFormDefault="unqualified" blockDefault="#all">
+    <xsd:import namespace="http://purl.org/dc/elements/1.1/" schemaLocation="http://dublincore.org/schemas/xmls/qdc/2003/04/02/dc.xsd"/>
+    <xsd:import namespace="http://purl.org/dc/terms/" schemaLocation="http://dublincore.org/schemas/xmls/qdc/2003/04/02/dcterms.xsd"/>
+    <xsd:element name="coreProperties" type="CT_coreProperties"/>
+    <xsd:complexType name="CT_coreProperties">
+      <xsd:all>
+        <xsd:element ref="dc:creator" minOccurs="0" maxOccurs="1"/>
+        <xsd:element ref="dcterms:created" minOccurs="0" maxOccurs="1"/>
+        <xsd:element ref="dc:identifier" minOccurs="0" maxOccurs="1"/>
+        <xsd:element name="contentType" minOccurs="0" maxOccurs="1" type="xsd:string" ma:index="0" ma:displayName="Content Type"/>
+        <xsd:element ref="dc:title" minOccurs="0" maxOccurs="1" ma:index="4" ma:displayName="Title"/>
+        <xsd:element ref="dc:subject" minOccurs="0" maxOccurs="1"/>
+        <xsd:element ref="dc:description" minOccurs="0" maxOccurs="1"/>
+        <xsd:element name="keywords" minOccurs="0" maxOccurs="1" type="xsd:string"/>
+        <xsd:element ref="dc:language" minOccurs="0" maxOccurs="1"/>
+        <xsd:element name="category" minOccurs="0" maxOccurs="1" type="xsd:string"/>
+        <xsd:element name="version" minOccurs="0" maxOccurs="1" type="xsd:string"/>
+        <xsd:element name="revision" minOccurs="0" maxOccurs="1" type="xsd:string">
+          <xsd:annotation>
+            <xsd:documentation>
+                        This value indicates the number of saves or revisions. The application is responsible for updating this value after each revision.
+                    </xsd:documentation>
+          </xsd:annotation>
+        </xsd:element>
+        <xsd:element name="lastModifiedBy" minOccurs="0" maxOccurs="1" type="xsd:string"/>
+        <xsd:element ref="dcterms:modified" minOccurs="0" maxOccurs="1"/>
+        <xsd:element name="contentStatus" minOccurs="0" maxOccurs="1" type="xsd:string"/>
+      </xsd:all>
+    </xsd:complexType>
+  </xsd:schema>
+  <xs:schema xmlns:pc="http://schemas.microsoft.com/office/infopath/2007/PartnerControls" xmlns:xs="http://www.w3.org/2001/XMLSchema" targetNamespace="http://schemas.microsoft.com/office/infopath/2007/PartnerControls" elementFormDefault="qualified" attributeFormDefault="unqualified">
+    <xs:element name="Person">
+      <xs:complexType>
+        <xs:sequence>
+          <xs:element ref="pc:DisplayName" minOccurs="0"/>
+          <xs:element ref="pc:AccountId" minOccurs="0"/>
+          <xs:element ref="pc:AccountType" minOccurs="0"/>
+        </xs:sequence>
+      </xs:complexType>
+    </xs:element>
+    <xs:element name="DisplayName" type="xs:string"/>
+    <xs:element name="AccountId" type="xs:string"/>
+    <xs:element name="AccountType" type="xs:string"/>
+    <xs:element name="BDCAssociatedEntity">
+      <xs:complexType>
+        <xs:sequence>
+          <xs:element ref="pc:BDCEntity" minOccurs="0" maxOccurs="unbounded"/>
+        </xs:sequence>
+        <xs:attribute ref="pc:EntityNamespace"/>
+        <xs:attribute ref="pc:EntityName"/>
+        <xs:attribute ref="pc:SystemInstanceName"/>
+        <xs:attribute ref="pc:AssociationName"/>
+      </xs:complexType>
+    </xs:element>
+    <xs:attribute name="EntityNamespace" type="xs:string"/>
+    <xs:attribute name="EntityName" type="xs:string"/>
+    <xs:attribute name="SystemInstanceName" type="xs:string"/>
+    <xs:attribute name="AssociationName" type="xs:string"/>
+    <xs:element name="BDCEntity">
+      <xs:complexType>
+        <xs:sequence>
+          <xs:element ref="pc:EntityDisplayName" minOccurs="0"/>
+          <xs:element ref="pc:EntityInstanceReference" minOccurs="0"/>
+          <xs:element ref="pc:EntityId1" minOccurs="0"/>
+          <xs:element ref="pc:EntityId2" minOccurs="0"/>
+          <xs:element ref="pc:EntityId3" minOccurs="0"/>
+          <xs:element ref="pc:EntityId4" minOccurs="0"/>
+          <xs:element ref="pc:EntityId5" minOccurs="0"/>
+        </xs:sequence>
+      </xs:complexType>
+    </xs:element>
+    <xs:element name="EntityDisplayName" type="xs:string"/>
+    <xs:element name="EntityInstanceReference" type="xs:string"/>
+    <xs:element name="EntityId1" type="xs:string"/>
+    <xs:element name="EntityId2" type="xs:string"/>
+    <xs:element name="EntityId3" type="xs:string"/>
+    <xs:element name="EntityId4" type="xs:string"/>
+    <xs:element name="EntityId5" type="xs:string"/>
+    <xs:element name="Terms">
+      <xs:complexType>
+        <xs:sequence>
+          <xs:element ref="pc:TermInfo" minOccurs="0" maxOccurs="unbounded"/>
+        </xs:sequence>
+      </xs:complexType>
+    </xs:element>
+    <xs:element name="TermInfo">
+      <xs:complexType>
+        <xs:sequence>
+          <xs:element ref="pc:TermName" minOccurs="0"/>
+          <xs:element ref="pc:TermId" minOccurs="0"/>
+        </xs:sequence>
+      </xs:complexType>
+    </xs:element>
+    <xs:element name="TermName" type="xs:string"/>
+    <xs:element name="TermId" type="xs:string"/>
+  </xs:schema>
+</ct:contentTypeSchema>
+</file>
+
+<file path=ppt/customXml/item2.xml><?xml version="1.0" encoding="utf-8"?>
+<?mso-contentType ?>
+<FormTemplates xmlns="http://schemas.microsoft.com/sharepoint/v3/contenttype/forms">
+  <Display>DocumentLibraryForm</Display>
+  <Edit>DocumentLibraryForm</Edit>
+  <New>DocumentLibraryForm</New>
+</FormTemplates>
+</file>
+
+<file path=ppt/customXml/item3.xml><?xml version="1.0" encoding="utf-8"?>
+<p:properties xmlns:p="http://schemas.microsoft.com/office/2006/metadata/properties" xmlns:xsi="http://www.w3.org/2001/XMLSchema-instance" xmlns:pc="http://schemas.microsoft.com/office/infopath/2007/PartnerControls">
+  <documentManagement/>
+</p:properties>
+</file>
+
+<file path=ppt/customXml/itemProps1.xml><?xml version="1.0" encoding="utf-8"?>
+<ds:datastoreItem xmlns:ds="http://schemas.openxmlformats.org/officeDocument/2006/customXml" ds:itemID="{5EA7D27E-4B05-4D22-AD97-6C014BF38290}"/>
+</file>
+
+<file path=ppt/customXml/itemProps2.xml><?xml version="1.0" encoding="utf-8"?>
+<ds:datastoreItem xmlns:ds="http://schemas.openxmlformats.org/officeDocument/2006/customXml" ds:itemID="{A29E571B-A306-45F6-8A51-A4ABCC68D86B}"/>
+</file>
+
+<file path=ppt/customXml/itemProps3.xml><?xml version="1.0" encoding="utf-8"?>
+<ds:datastoreItem xmlns:ds="http://schemas.openxmlformats.org/officeDocument/2006/customXml" ds:itemID="{BAB7F77E-F07E-4F31-83F1-0CCC6AC9FE43}"/>
 </file>
 
 <file path=ppt/notesMasters/notesMaster1.xml><?xml version="1.0" encoding="utf-8"?>
@@ -505,7 +684,7 @@
         </p:nvSpPr>
         <p:spPr>
           <a:xfrm>
-            <a:off x="1524000" y="1122363"/>
+            <a:off x="1524000" y="1465263"/>
             <a:ext cx="9144000" cy="2387600"/>
           </a:xfrm>
         </p:spPr>
@@ -513,7 +692,7 @@
           <a:bodyPr anchor="b"/>
           <a:lstStyle>
             <a:lvl1pPr algn="ctr">
-              <a:defRPr sz="6000"/>
+              <a:defRPr sz="4800"/>
             </a:lvl1pPr>
           </a:lstStyle>
           <a:p>
@@ -542,7 +721,7 @@
         </p:nvSpPr>
         <p:spPr>
           <a:xfrm>
-            <a:off x="1524000" y="3602038"/>
+            <a:off x="1524000" y="3944938"/>
             <a:ext cx="9144000" cy="1655762"/>
           </a:xfrm>
         </p:spPr>
@@ -551,39 +730,39 @@
           <a:lstStyle>
             <a:lvl1pPr marL="0" indent="0" algn="ctr">
               <a:buNone/>
-              <a:defRPr sz="2400"/>
+              <a:defRPr sz="1920"/>
             </a:lvl1pPr>
             <a:lvl2pPr marL="457200" indent="0" algn="ctr">
               <a:buNone/>
-              <a:defRPr sz="2000"/>
+              <a:defRPr sz="1600"/>
             </a:lvl2pPr>
             <a:lvl3pPr marL="914400" indent="0" algn="ctr">
               <a:buNone/>
-              <a:defRPr sz="1800"/>
+              <a:defRPr sz="1440"/>
             </a:lvl3pPr>
             <a:lvl4pPr marL="1371600" indent="0" algn="ctr">
               <a:buNone/>
-              <a:defRPr sz="1600"/>
+              <a:defRPr sz="1280"/>
             </a:lvl4pPr>
             <a:lvl5pPr marL="1828800" indent="0" algn="ctr">
               <a:buNone/>
-              <a:defRPr sz="1600"/>
+              <a:defRPr sz="1280"/>
             </a:lvl5pPr>
             <a:lvl6pPr marL="2286000" indent="0" algn="ctr">
               <a:buNone/>
-              <a:defRPr sz="1600"/>
+              <a:defRPr sz="1280"/>
             </a:lvl6pPr>
             <a:lvl7pPr marL="2743200" indent="0" algn="ctr">
               <a:buNone/>
-              <a:defRPr sz="1600"/>
+              <a:defRPr sz="1280"/>
             </a:lvl7pPr>
             <a:lvl8pPr marL="3200400" indent="0" algn="ctr">
               <a:buNone/>
-              <a:defRPr sz="1600"/>
+              <a:defRPr sz="1280"/>
             </a:lvl8pPr>
             <a:lvl9pPr marL="3657600" indent="0" algn="ctr">
               <a:buNone/>
-              <a:defRPr sz="1600"/>
+              <a:defRPr sz="1280"/>
             </a:lvl9pPr>
           </a:lstStyle>
           <a:p>
@@ -644,35 +823,6 @@
           <a:bodyPr/>
           <a:lstStyle/>
           <a:p>
-            <a:endParaRPr lang="en-US"/>
-          </a:p>
-        </p:txBody>
-      </p:sp>
-      <p:sp>
-        <p:nvSpPr>
-          <p:cNvPr id="6" name="Slide Number Placeholder 5">
-            <a:extLst>
-              <a:ext uri="{FF2B5EF4-FFF2-40B4-BE49-F238E27FC236}">
-                <a16:creationId xmlns:a16="http://schemas.microsoft.com/office/drawing/2014/main" id="{B11D0107-4F83-46D8-AE85-EEB1FC9E6623}"/>
-              </a:ext>
-            </a:extLst>
-          </p:cNvPr>
-          <p:cNvSpPr>
-            <a:spLocks noGrp="1"/>
-          </p:cNvSpPr>
-          <p:nvPr>
-            <p:ph type="sldNum" sz="quarter" idx="12"/>
-          </p:nvPr>
-        </p:nvSpPr>
-        <p:spPr/>
-        <p:txBody>
-          <a:bodyPr/>
-          <a:lstStyle/>
-          <a:p>
-            <a:fld id="{6CB4759B-89EF-486F-A495-36988C5D6AB8}" type="slidenum">
-              <a:rPr lang="en-US" smtClean="0"/>
-              <a:t>‹#›</a:t>
-            </a:fld>
             <a:endParaRPr lang="en-US"/>
           </a:p>
         </p:txBody>
@@ -846,35 +996,6 @@
           </a:p>
         </p:txBody>
       </p:sp>
-      <p:sp>
-        <p:nvSpPr>
-          <p:cNvPr id="6" name="Slide Number Placeholder 5">
-            <a:extLst>
-              <a:ext uri="{FF2B5EF4-FFF2-40B4-BE49-F238E27FC236}">
-                <a16:creationId xmlns:a16="http://schemas.microsoft.com/office/drawing/2014/main" id="{20FF330C-FF96-4ED7-A27A-42BD09505763}"/>
-              </a:ext>
-            </a:extLst>
-          </p:cNvPr>
-          <p:cNvSpPr>
-            <a:spLocks noGrp="1"/>
-          </p:cNvSpPr>
-          <p:nvPr>
-            <p:ph type="sldNum" sz="quarter" idx="12"/>
-          </p:nvPr>
-        </p:nvSpPr>
-        <p:spPr/>
-        <p:txBody>
-          <a:bodyPr/>
-          <a:lstStyle/>
-          <a:p>
-            <a:fld id="{6CB4759B-89EF-486F-A495-36988C5D6AB8}" type="slidenum">
-              <a:rPr lang="en-US" smtClean="0"/>
-              <a:t>‹#›</a:t>
-            </a:fld>
-            <a:endParaRPr lang="en-US"/>
-          </a:p>
-        </p:txBody>
-      </p:sp>
     </p:spTree>
     <p:extLst>
       <p:ext uri="{BB962C8B-B14F-4D97-AF65-F5344CB8AC3E}">
@@ -923,7 +1044,7 @@
         </p:nvSpPr>
         <p:spPr>
           <a:xfrm>
-            <a:off x="8724900" y="365125"/>
+            <a:off x="8724900" y="708025"/>
             <a:ext cx="2628900" cy="5811838"/>
           </a:xfrm>
         </p:spPr>
@@ -956,7 +1077,7 @@
         </p:nvSpPr>
         <p:spPr>
           <a:xfrm>
-            <a:off x="838200" y="365125"/>
+            <a:off x="838200" y="708025"/>
             <a:ext cx="7734300" cy="5811838"/>
           </a:xfrm>
         </p:spPr>
@@ -1050,35 +1171,6 @@
           <a:bodyPr/>
           <a:lstStyle/>
           <a:p>
-            <a:endParaRPr lang="en-US"/>
-          </a:p>
-        </p:txBody>
-      </p:sp>
-      <p:sp>
-        <p:nvSpPr>
-          <p:cNvPr id="6" name="Slide Number Placeholder 5">
-            <a:extLst>
-              <a:ext uri="{FF2B5EF4-FFF2-40B4-BE49-F238E27FC236}">
-                <a16:creationId xmlns:a16="http://schemas.microsoft.com/office/drawing/2014/main" id="{40014769-6700-4F6B-A497-075C34C1E7AC}"/>
-              </a:ext>
-            </a:extLst>
-          </p:cNvPr>
-          <p:cNvSpPr>
-            <a:spLocks noGrp="1"/>
-          </p:cNvSpPr>
-          <p:nvPr>
-            <p:ph type="sldNum" sz="quarter" idx="12"/>
-          </p:nvPr>
-        </p:nvSpPr>
-        <p:spPr/>
-        <p:txBody>
-          <a:bodyPr/>
-          <a:lstStyle/>
-          <a:p>
-            <a:fld id="{6CB4759B-89EF-486F-A495-36988C5D6AB8}" type="slidenum">
-              <a:rPr lang="en-US" smtClean="0"/>
-              <a:t>‹#›</a:t>
-            </a:fld>
             <a:endParaRPr lang="en-US"/>
           </a:p>
         </p:txBody>
@@ -1252,35 +1344,6 @@
           </a:p>
         </p:txBody>
       </p:sp>
-      <p:sp>
-        <p:nvSpPr>
-          <p:cNvPr id="6" name="Slide Number Placeholder 5">
-            <a:extLst>
-              <a:ext uri="{FF2B5EF4-FFF2-40B4-BE49-F238E27FC236}">
-                <a16:creationId xmlns:a16="http://schemas.microsoft.com/office/drawing/2014/main" id="{98E2BA67-99A5-4E9A-B1BB-C83E7052D870}"/>
-              </a:ext>
-            </a:extLst>
-          </p:cNvPr>
-          <p:cNvSpPr>
-            <a:spLocks noGrp="1"/>
-          </p:cNvSpPr>
-          <p:nvPr>
-            <p:ph type="sldNum" sz="quarter" idx="12"/>
-          </p:nvPr>
-        </p:nvSpPr>
-        <p:spPr/>
-        <p:txBody>
-          <a:bodyPr/>
-          <a:lstStyle/>
-          <a:p>
-            <a:fld id="{6CB4759B-89EF-486F-A495-36988C5D6AB8}" type="slidenum">
-              <a:rPr lang="en-US" smtClean="0"/>
-              <a:t>‹#›</a:t>
-            </a:fld>
-            <a:endParaRPr lang="en-US"/>
-          </a:p>
-        </p:txBody>
-      </p:sp>
     </p:spTree>
     <p:extLst>
       <p:ext uri="{BB962C8B-B14F-4D97-AF65-F5344CB8AC3E}">
@@ -1329,7 +1392,7 @@
         </p:nvSpPr>
         <p:spPr>
           <a:xfrm>
-            <a:off x="831850" y="1709738"/>
+            <a:off x="831850" y="2052638"/>
             <a:ext cx="10515600" cy="2852737"/>
           </a:xfrm>
         </p:spPr>
@@ -1337,7 +1400,7 @@
           <a:bodyPr anchor="b"/>
           <a:lstStyle>
             <a:lvl1pPr>
-              <a:defRPr sz="6000"/>
+              <a:defRPr sz="4800"/>
             </a:lvl1pPr>
           </a:lstStyle>
           <a:p>
@@ -1366,7 +1429,7 @@
         </p:nvSpPr>
         <p:spPr>
           <a:xfrm>
-            <a:off x="831850" y="4589463"/>
+            <a:off x="831850" y="4932363"/>
             <a:ext cx="10515600" cy="1500187"/>
           </a:xfrm>
         </p:spPr>
@@ -1375,7 +1438,7 @@
           <a:lstStyle>
             <a:lvl1pPr marL="0" indent="0">
               <a:buNone/>
-              <a:defRPr sz="2400">
+              <a:defRPr sz="1920">
                 <a:solidFill>
                   <a:schemeClr val="tx1">
                     <a:tint val="75000"/>
@@ -1385,7 +1448,7 @@
             </a:lvl1pPr>
             <a:lvl2pPr marL="457200" indent="0">
               <a:buNone/>
-              <a:defRPr sz="2000">
+              <a:defRPr sz="1600">
                 <a:solidFill>
                   <a:schemeClr val="tx1">
                     <a:tint val="75000"/>
@@ -1395,7 +1458,7 @@
             </a:lvl2pPr>
             <a:lvl3pPr marL="914400" indent="0">
               <a:buNone/>
-              <a:defRPr sz="1800">
+              <a:defRPr sz="1440">
                 <a:solidFill>
                   <a:schemeClr val="tx1">
                     <a:tint val="75000"/>
@@ -1405,7 +1468,7 @@
             </a:lvl3pPr>
             <a:lvl4pPr marL="1371600" indent="0">
               <a:buNone/>
-              <a:defRPr sz="1600">
+              <a:defRPr sz="1280">
                 <a:solidFill>
                   <a:schemeClr val="tx1">
                     <a:tint val="75000"/>
@@ -1415,7 +1478,7 @@
             </a:lvl4pPr>
             <a:lvl5pPr marL="1828800" indent="0">
               <a:buNone/>
-              <a:defRPr sz="1600">
+              <a:defRPr sz="1280">
                 <a:solidFill>
                   <a:schemeClr val="tx1">
                     <a:tint val="75000"/>
@@ -1425,7 +1488,7 @@
             </a:lvl5pPr>
             <a:lvl6pPr marL="2286000" indent="0">
               <a:buNone/>
-              <a:defRPr sz="1600">
+              <a:defRPr sz="1280">
                 <a:solidFill>
                   <a:schemeClr val="tx1">
                     <a:tint val="75000"/>
@@ -1435,7 +1498,7 @@
             </a:lvl6pPr>
             <a:lvl7pPr marL="2743200" indent="0">
               <a:buNone/>
-              <a:defRPr sz="1600">
+              <a:defRPr sz="1280">
                 <a:solidFill>
                   <a:schemeClr val="tx1">
                     <a:tint val="75000"/>
@@ -1445,7 +1508,7 @@
             </a:lvl7pPr>
             <a:lvl8pPr marL="3200400" indent="0">
               <a:buNone/>
-              <a:defRPr sz="1600">
+              <a:defRPr sz="1280">
                 <a:solidFill>
                   <a:schemeClr val="tx1">
                     <a:tint val="75000"/>
@@ -1455,7 +1518,7 @@
             </a:lvl8pPr>
             <a:lvl9pPr marL="3657600" indent="0">
               <a:buNone/>
-              <a:defRPr sz="1600">
+              <a:defRPr sz="1280">
                 <a:solidFill>
                   <a:schemeClr val="tx1">
                     <a:tint val="75000"/>
@@ -1523,35 +1586,6 @@
           <a:bodyPr/>
           <a:lstStyle/>
           <a:p>
-            <a:endParaRPr lang="en-US"/>
-          </a:p>
-        </p:txBody>
-      </p:sp>
-      <p:sp>
-        <p:nvSpPr>
-          <p:cNvPr id="6" name="Slide Number Placeholder 5">
-            <a:extLst>
-              <a:ext uri="{FF2B5EF4-FFF2-40B4-BE49-F238E27FC236}">
-                <a16:creationId xmlns:a16="http://schemas.microsoft.com/office/drawing/2014/main" id="{635C8F58-69E9-4D3C-8A5D-601DA4F052A6}"/>
-              </a:ext>
-            </a:extLst>
-          </p:cNvPr>
-          <p:cNvSpPr>
-            <a:spLocks noGrp="1"/>
-          </p:cNvSpPr>
-          <p:nvPr>
-            <p:ph type="sldNum" sz="quarter" idx="12"/>
-          </p:nvPr>
-        </p:nvSpPr>
-        <p:spPr/>
-        <p:txBody>
-          <a:bodyPr/>
-          <a:lstStyle/>
-          <a:p>
-            <a:fld id="{6CB4759B-89EF-486F-A495-36988C5D6AB8}" type="slidenum">
-              <a:rPr lang="en-US" smtClean="0"/>
-              <a:t>‹#›</a:t>
-            </a:fld>
             <a:endParaRPr lang="en-US"/>
           </a:p>
         </p:txBody>
@@ -1632,7 +1666,7 @@
         </p:nvSpPr>
         <p:spPr>
           <a:xfrm>
-            <a:off x="838200" y="1825625"/>
+            <a:off x="838200" y="2168525"/>
             <a:ext cx="5181600" cy="4351338"/>
           </a:xfrm>
         </p:spPr>
@@ -1694,7 +1728,7 @@
         </p:nvSpPr>
         <p:spPr>
           <a:xfrm>
-            <a:off x="6172200" y="1825625"/>
+            <a:off x="6172200" y="2168525"/>
             <a:ext cx="5181600" cy="4351338"/>
           </a:xfrm>
         </p:spPr>
@@ -1788,35 +1822,6 @@
           <a:bodyPr/>
           <a:lstStyle/>
           <a:p>
-            <a:endParaRPr lang="en-US"/>
-          </a:p>
-        </p:txBody>
-      </p:sp>
-      <p:sp>
-        <p:nvSpPr>
-          <p:cNvPr id="7" name="Slide Number Placeholder 6">
-            <a:extLst>
-              <a:ext uri="{FF2B5EF4-FFF2-40B4-BE49-F238E27FC236}">
-                <a16:creationId xmlns:a16="http://schemas.microsoft.com/office/drawing/2014/main" id="{E5F83873-23CB-4BFD-A530-BC823BD14858}"/>
-              </a:ext>
-            </a:extLst>
-          </p:cNvPr>
-          <p:cNvSpPr>
-            <a:spLocks noGrp="1"/>
-          </p:cNvSpPr>
-          <p:nvPr>
-            <p:ph type="sldNum" sz="quarter" idx="12"/>
-          </p:nvPr>
-        </p:nvSpPr>
-        <p:spPr/>
-        <p:txBody>
-          <a:bodyPr/>
-          <a:lstStyle/>
-          <a:p>
-            <a:fld id="{6CB4759B-89EF-486F-A495-36988C5D6AB8}" type="slidenum">
-              <a:rPr lang="en-US" smtClean="0"/>
-              <a:t>‹#›</a:t>
-            </a:fld>
             <a:endParaRPr lang="en-US"/>
           </a:p>
         </p:txBody>
@@ -1869,7 +1874,7 @@
         </p:nvSpPr>
         <p:spPr>
           <a:xfrm>
-            <a:off x="839788" y="365125"/>
+            <a:off x="839788" y="708025"/>
             <a:ext cx="10515600" cy="1325563"/>
           </a:xfrm>
         </p:spPr>
@@ -1902,7 +1907,7 @@
         </p:nvSpPr>
         <p:spPr>
           <a:xfrm>
-            <a:off x="839788" y="1681163"/>
+            <a:off x="839788" y="2024063"/>
             <a:ext cx="5157787" cy="823912"/>
           </a:xfrm>
         </p:spPr>
@@ -1911,39 +1916,39 @@
           <a:lstStyle>
             <a:lvl1pPr marL="0" indent="0">
               <a:buNone/>
-              <a:defRPr sz="2400" b="1"/>
+              <a:defRPr sz="1920" b="1"/>
             </a:lvl1pPr>
             <a:lvl2pPr marL="457200" indent="0">
               <a:buNone/>
-              <a:defRPr sz="2000" b="1"/>
+              <a:defRPr sz="1600" b="1"/>
             </a:lvl2pPr>
             <a:lvl3pPr marL="914400" indent="0">
               <a:buNone/>
-              <a:defRPr sz="1800" b="1"/>
+              <a:defRPr sz="1440" b="1"/>
             </a:lvl3pPr>
             <a:lvl4pPr marL="1371600" indent="0">
               <a:buNone/>
-              <a:defRPr sz="1600" b="1"/>
+              <a:defRPr sz="1280" b="1"/>
             </a:lvl4pPr>
             <a:lvl5pPr marL="1828800" indent="0">
               <a:buNone/>
-              <a:defRPr sz="1600" b="1"/>
+              <a:defRPr sz="1280" b="1"/>
             </a:lvl5pPr>
             <a:lvl6pPr marL="2286000" indent="0">
               <a:buNone/>
-              <a:defRPr sz="1600" b="1"/>
+              <a:defRPr sz="1280" b="1"/>
             </a:lvl6pPr>
             <a:lvl7pPr marL="2743200" indent="0">
               <a:buNone/>
-              <a:defRPr sz="1600" b="1"/>
+              <a:defRPr sz="1280" b="1"/>
             </a:lvl7pPr>
             <a:lvl8pPr marL="3200400" indent="0">
               <a:buNone/>
-              <a:defRPr sz="1600" b="1"/>
+              <a:defRPr sz="1280" b="1"/>
             </a:lvl8pPr>
             <a:lvl9pPr marL="3657600" indent="0">
               <a:buNone/>
-              <a:defRPr sz="1600" b="1"/>
+              <a:defRPr sz="1280" b="1"/>
             </a:lvl9pPr>
           </a:lstStyle>
           <a:p>
@@ -1973,7 +1978,7 @@
         </p:nvSpPr>
         <p:spPr>
           <a:xfrm>
-            <a:off x="839788" y="2505075"/>
+            <a:off x="839788" y="2847975"/>
             <a:ext cx="5157787" cy="3684588"/>
           </a:xfrm>
         </p:spPr>
@@ -2035,7 +2040,7 @@
         </p:nvSpPr>
         <p:spPr>
           <a:xfrm>
-            <a:off x="6172200" y="1681163"/>
+            <a:off x="6172200" y="2024063"/>
             <a:ext cx="5183188" cy="823912"/>
           </a:xfrm>
         </p:spPr>
@@ -2044,39 +2049,39 @@
           <a:lstStyle>
             <a:lvl1pPr marL="0" indent="0">
               <a:buNone/>
-              <a:defRPr sz="2400" b="1"/>
+              <a:defRPr sz="1920" b="1"/>
             </a:lvl1pPr>
             <a:lvl2pPr marL="457200" indent="0">
               <a:buNone/>
-              <a:defRPr sz="2000" b="1"/>
+              <a:defRPr sz="1600" b="1"/>
             </a:lvl2pPr>
             <a:lvl3pPr marL="914400" indent="0">
               <a:buNone/>
-              <a:defRPr sz="1800" b="1"/>
+              <a:defRPr sz="1440" b="1"/>
             </a:lvl3pPr>
             <a:lvl4pPr marL="1371600" indent="0">
               <a:buNone/>
-              <a:defRPr sz="1600" b="1"/>
+              <a:defRPr sz="1280" b="1"/>
             </a:lvl4pPr>
             <a:lvl5pPr marL="1828800" indent="0">
               <a:buNone/>
-              <a:defRPr sz="1600" b="1"/>
+              <a:defRPr sz="1280" b="1"/>
             </a:lvl5pPr>
             <a:lvl6pPr marL="2286000" indent="0">
               <a:buNone/>
-              <a:defRPr sz="1600" b="1"/>
+              <a:defRPr sz="1280" b="1"/>
             </a:lvl6pPr>
             <a:lvl7pPr marL="2743200" indent="0">
               <a:buNone/>
-              <a:defRPr sz="1600" b="1"/>
+              <a:defRPr sz="1280" b="1"/>
             </a:lvl7pPr>
             <a:lvl8pPr marL="3200400" indent="0">
               <a:buNone/>
-              <a:defRPr sz="1600" b="1"/>
+              <a:defRPr sz="1280" b="1"/>
             </a:lvl8pPr>
             <a:lvl9pPr marL="3657600" indent="0">
               <a:buNone/>
-              <a:defRPr sz="1600" b="1"/>
+              <a:defRPr sz="1280" b="1"/>
             </a:lvl9pPr>
           </a:lstStyle>
           <a:p>
@@ -2106,7 +2111,7 @@
         </p:nvSpPr>
         <p:spPr>
           <a:xfrm>
-            <a:off x="6172200" y="2505075"/>
+            <a:off x="6172200" y="2847975"/>
             <a:ext cx="5183188" cy="3684588"/>
           </a:xfrm>
         </p:spPr>
@@ -2200,35 +2205,6 @@
           <a:bodyPr/>
           <a:lstStyle/>
           <a:p>
-            <a:endParaRPr lang="en-US"/>
-          </a:p>
-        </p:txBody>
-      </p:sp>
-      <p:sp>
-        <p:nvSpPr>
-          <p:cNvPr id="9" name="Slide Number Placeholder 8">
-            <a:extLst>
-              <a:ext uri="{FF2B5EF4-FFF2-40B4-BE49-F238E27FC236}">
-                <a16:creationId xmlns:a16="http://schemas.microsoft.com/office/drawing/2014/main" id="{CBFBF84E-6E66-4B07-B2D5-445865CC2F1B}"/>
-              </a:ext>
-            </a:extLst>
-          </p:cNvPr>
-          <p:cNvSpPr>
-            <a:spLocks noGrp="1"/>
-          </p:cNvSpPr>
-          <p:nvPr>
-            <p:ph type="sldNum" sz="quarter" idx="12"/>
-          </p:nvPr>
-        </p:nvSpPr>
-        <p:spPr/>
-        <p:txBody>
-          <a:bodyPr/>
-          <a:lstStyle/>
-          <a:p>
-            <a:fld id="{6CB4759B-89EF-486F-A495-36988C5D6AB8}" type="slidenum">
-              <a:rPr lang="en-US" smtClean="0"/>
-              <a:t>‹#›</a:t>
-            </a:fld>
             <a:endParaRPr lang="en-US"/>
           </a:p>
         </p:txBody>
@@ -2345,35 +2321,6 @@
           </a:p>
         </p:txBody>
       </p:sp>
-      <p:sp>
-        <p:nvSpPr>
-          <p:cNvPr id="5" name="Slide Number Placeholder 4">
-            <a:extLst>
-              <a:ext uri="{FF2B5EF4-FFF2-40B4-BE49-F238E27FC236}">
-                <a16:creationId xmlns:a16="http://schemas.microsoft.com/office/drawing/2014/main" id="{5D4C289B-BF5E-4AB1-8FAD-DEAC0EEB0651}"/>
-              </a:ext>
-            </a:extLst>
-          </p:cNvPr>
-          <p:cNvSpPr>
-            <a:spLocks noGrp="1"/>
-          </p:cNvSpPr>
-          <p:nvPr>
-            <p:ph type="sldNum" sz="quarter" idx="12"/>
-          </p:nvPr>
-        </p:nvSpPr>
-        <p:spPr/>
-        <p:txBody>
-          <a:bodyPr/>
-          <a:lstStyle/>
-          <a:p>
-            <a:fld id="{6CB4759B-89EF-486F-A495-36988C5D6AB8}" type="slidenum">
-              <a:rPr lang="en-US" smtClean="0"/>
-              <a:t>‹#›</a:t>
-            </a:fld>
-            <a:endParaRPr lang="en-US"/>
-          </a:p>
-        </p:txBody>
-      </p:sp>
     </p:spTree>
     <p:extLst>
       <p:ext uri="{BB962C8B-B14F-4D97-AF65-F5344CB8AC3E}">
@@ -2458,35 +2405,6 @@
           </a:p>
         </p:txBody>
       </p:sp>
-      <p:sp>
-        <p:nvSpPr>
-          <p:cNvPr id="4" name="Slide Number Placeholder 3">
-            <a:extLst>
-              <a:ext uri="{FF2B5EF4-FFF2-40B4-BE49-F238E27FC236}">
-                <a16:creationId xmlns:a16="http://schemas.microsoft.com/office/drawing/2014/main" id="{4CBD0B97-D558-482C-9212-777003A5D570}"/>
-              </a:ext>
-            </a:extLst>
-          </p:cNvPr>
-          <p:cNvSpPr>
-            <a:spLocks noGrp="1"/>
-          </p:cNvSpPr>
-          <p:nvPr>
-            <p:ph type="sldNum" sz="quarter" idx="12"/>
-          </p:nvPr>
-        </p:nvSpPr>
-        <p:spPr/>
-        <p:txBody>
-          <a:bodyPr/>
-          <a:lstStyle/>
-          <a:p>
-            <a:fld id="{6CB4759B-89EF-486F-A495-36988C5D6AB8}" type="slidenum">
-              <a:rPr lang="en-US" smtClean="0"/>
-              <a:t>‹#›</a:t>
-            </a:fld>
-            <a:endParaRPr lang="en-US"/>
-          </a:p>
-        </p:txBody>
-      </p:sp>
     </p:spTree>
     <p:extLst>
       <p:ext uri="{BB962C8B-B14F-4D97-AF65-F5344CB8AC3E}">
@@ -2535,7 +2453,7 @@
         </p:nvSpPr>
         <p:spPr>
           <a:xfrm>
-            <a:off x="839788" y="457200"/>
+            <a:off x="839788" y="800100"/>
             <a:ext cx="3932237" cy="1600200"/>
           </a:xfrm>
         </p:spPr>
@@ -2543,7 +2461,7 @@
           <a:bodyPr anchor="b"/>
           <a:lstStyle>
             <a:lvl1pPr>
-              <a:defRPr sz="3200"/>
+              <a:defRPr sz="2560"/>
             </a:lvl1pPr>
           </a:lstStyle>
           <a:p>
@@ -2572,7 +2490,7 @@
         </p:nvSpPr>
         <p:spPr>
           <a:xfrm>
-            <a:off x="5183188" y="987425"/>
+            <a:off x="5183188" y="1330325"/>
             <a:ext cx="6172200" cy="4873625"/>
           </a:xfrm>
         </p:spPr>
@@ -2580,31 +2498,31 @@
           <a:bodyPr/>
           <a:lstStyle>
             <a:lvl1pPr>
-              <a:defRPr sz="3200"/>
+              <a:defRPr sz="2560"/>
             </a:lvl1pPr>
             <a:lvl2pPr>
-              <a:defRPr sz="2800"/>
+              <a:defRPr sz="2240"/>
             </a:lvl2pPr>
             <a:lvl3pPr>
-              <a:defRPr sz="2400"/>
+              <a:defRPr sz="1920"/>
             </a:lvl3pPr>
             <a:lvl4pPr>
-              <a:defRPr sz="2000"/>
+              <a:defRPr sz="1600"/>
             </a:lvl4pPr>
             <a:lvl5pPr>
-              <a:defRPr sz="2000"/>
+              <a:defRPr sz="1600"/>
             </a:lvl5pPr>
             <a:lvl6pPr>
-              <a:defRPr sz="2000"/>
+              <a:defRPr sz="1600"/>
             </a:lvl6pPr>
             <a:lvl7pPr>
-              <a:defRPr sz="2000"/>
+              <a:defRPr sz="1600"/>
             </a:lvl7pPr>
             <a:lvl8pPr>
-              <a:defRPr sz="2000"/>
+              <a:defRPr sz="1600"/>
             </a:lvl8pPr>
             <a:lvl9pPr>
-              <a:defRPr sz="2000"/>
+              <a:defRPr sz="1600"/>
             </a:lvl9pPr>
           </a:lstStyle>
           <a:p>
@@ -2662,7 +2580,7 @@
         </p:nvSpPr>
         <p:spPr>
           <a:xfrm>
-            <a:off x="839788" y="2057400"/>
+            <a:off x="839788" y="2400300"/>
             <a:ext cx="3932237" cy="3811588"/>
           </a:xfrm>
         </p:spPr>
@@ -2671,39 +2589,39 @@
           <a:lstStyle>
             <a:lvl1pPr marL="0" indent="0">
               <a:buNone/>
-              <a:defRPr sz="1600"/>
+              <a:defRPr sz="1280"/>
             </a:lvl1pPr>
             <a:lvl2pPr marL="457200" indent="0">
               <a:buNone/>
-              <a:defRPr sz="1400"/>
+              <a:defRPr sz="1120"/>
             </a:lvl2pPr>
             <a:lvl3pPr marL="914400" indent="0">
               <a:buNone/>
-              <a:defRPr sz="1200"/>
+              <a:defRPr sz="960"/>
             </a:lvl3pPr>
             <a:lvl4pPr marL="1371600" indent="0">
               <a:buNone/>
-              <a:defRPr sz="1000"/>
+              <a:defRPr sz="800"/>
             </a:lvl4pPr>
             <a:lvl5pPr marL="1828800" indent="0">
               <a:buNone/>
-              <a:defRPr sz="1000"/>
+              <a:defRPr sz="800"/>
             </a:lvl5pPr>
             <a:lvl6pPr marL="2286000" indent="0">
               <a:buNone/>
-              <a:defRPr sz="1000"/>
+              <a:defRPr sz="800"/>
             </a:lvl6pPr>
             <a:lvl7pPr marL="2743200" indent="0">
               <a:buNone/>
-              <a:defRPr sz="1000"/>
+              <a:defRPr sz="800"/>
             </a:lvl7pPr>
             <a:lvl8pPr marL="3200400" indent="0">
               <a:buNone/>
-              <a:defRPr sz="1000"/>
+              <a:defRPr sz="800"/>
             </a:lvl8pPr>
             <a:lvl9pPr marL="3657600" indent="0">
               <a:buNone/>
-              <a:defRPr sz="1000"/>
+              <a:defRPr sz="800"/>
             </a:lvl9pPr>
           </a:lstStyle>
           <a:p>
@@ -2765,35 +2683,6 @@
           <a:bodyPr/>
           <a:lstStyle/>
           <a:p>
-            <a:endParaRPr lang="en-US"/>
-          </a:p>
-        </p:txBody>
-      </p:sp>
-      <p:sp>
-        <p:nvSpPr>
-          <p:cNvPr id="7" name="Slide Number Placeholder 6">
-            <a:extLst>
-              <a:ext uri="{FF2B5EF4-FFF2-40B4-BE49-F238E27FC236}">
-                <a16:creationId xmlns:a16="http://schemas.microsoft.com/office/drawing/2014/main" id="{FF4B521A-CC62-43B9-96C0-FCEBC96C325E}"/>
-              </a:ext>
-            </a:extLst>
-          </p:cNvPr>
-          <p:cNvSpPr>
-            <a:spLocks noGrp="1"/>
-          </p:cNvSpPr>
-          <p:nvPr>
-            <p:ph type="sldNum" sz="quarter" idx="12"/>
-          </p:nvPr>
-        </p:nvSpPr>
-        <p:spPr/>
-        <p:txBody>
-          <a:bodyPr/>
-          <a:lstStyle/>
-          <a:p>
-            <a:fld id="{6CB4759B-89EF-486F-A495-36988C5D6AB8}" type="slidenum">
-              <a:rPr lang="en-US" smtClean="0"/>
-              <a:t>‹#›</a:t>
-            </a:fld>
             <a:endParaRPr lang="en-US"/>
           </a:p>
         </p:txBody>
@@ -2846,7 +2735,7 @@
         </p:nvSpPr>
         <p:spPr>
           <a:xfrm>
-            <a:off x="839788" y="457200"/>
+            <a:off x="839788" y="800100"/>
             <a:ext cx="3932237" cy="1600200"/>
           </a:xfrm>
         </p:spPr>
@@ -2854,7 +2743,7 @@
           <a:bodyPr anchor="b"/>
           <a:lstStyle>
             <a:lvl1pPr>
-              <a:defRPr sz="3200"/>
+              <a:defRPr sz="2560"/>
             </a:lvl1pPr>
           </a:lstStyle>
           <a:p>
@@ -2883,7 +2772,7 @@
         </p:nvSpPr>
         <p:spPr>
           <a:xfrm>
-            <a:off x="5183188" y="987425"/>
+            <a:off x="5183188" y="1330325"/>
             <a:ext cx="6172200" cy="4873625"/>
           </a:xfrm>
         </p:spPr>
@@ -2892,39 +2781,39 @@
           <a:lstStyle>
             <a:lvl1pPr marL="0" indent="0">
               <a:buNone/>
-              <a:defRPr sz="3200"/>
+              <a:defRPr sz="2560"/>
             </a:lvl1pPr>
             <a:lvl2pPr marL="457200" indent="0">
               <a:buNone/>
-              <a:defRPr sz="2800"/>
+              <a:defRPr sz="2240"/>
             </a:lvl2pPr>
             <a:lvl3pPr marL="914400" indent="0">
               <a:buNone/>
-              <a:defRPr sz="2400"/>
+              <a:defRPr sz="1920"/>
             </a:lvl3pPr>
             <a:lvl4pPr marL="1371600" indent="0">
               <a:buNone/>
-              <a:defRPr sz="2000"/>
+              <a:defRPr sz="1600"/>
             </a:lvl4pPr>
             <a:lvl5pPr marL="1828800" indent="0">
               <a:buNone/>
-              <a:defRPr sz="2000"/>
+              <a:defRPr sz="1600"/>
             </a:lvl5pPr>
             <a:lvl6pPr marL="2286000" indent="0">
               <a:buNone/>
-              <a:defRPr sz="2000"/>
+              <a:defRPr sz="1600"/>
             </a:lvl6pPr>
             <a:lvl7pPr marL="2743200" indent="0">
               <a:buNone/>
-              <a:defRPr sz="2000"/>
+              <a:defRPr sz="1600"/>
             </a:lvl7pPr>
             <a:lvl8pPr marL="3200400" indent="0">
               <a:buNone/>
-              <a:defRPr sz="2000"/>
+              <a:defRPr sz="1600"/>
             </a:lvl8pPr>
             <a:lvl9pPr marL="3657600" indent="0">
               <a:buNone/>
-              <a:defRPr sz="2000"/>
+              <a:defRPr sz="1600"/>
             </a:lvl9pPr>
           </a:lstStyle>
           <a:p>
@@ -2950,7 +2839,7 @@
         </p:nvSpPr>
         <p:spPr>
           <a:xfrm>
-            <a:off x="839788" y="2057400"/>
+            <a:off x="839788" y="2400300"/>
             <a:ext cx="3932237" cy="3811588"/>
           </a:xfrm>
         </p:spPr>
@@ -2959,39 +2848,39 @@
           <a:lstStyle>
             <a:lvl1pPr marL="0" indent="0">
               <a:buNone/>
-              <a:defRPr sz="1600"/>
+              <a:defRPr sz="1280"/>
             </a:lvl1pPr>
             <a:lvl2pPr marL="457200" indent="0">
               <a:buNone/>
-              <a:defRPr sz="1400"/>
+              <a:defRPr sz="1120"/>
             </a:lvl2pPr>
             <a:lvl3pPr marL="914400" indent="0">
               <a:buNone/>
-              <a:defRPr sz="1200"/>
+              <a:defRPr sz="960"/>
             </a:lvl3pPr>
             <a:lvl4pPr marL="1371600" indent="0">
               <a:buNone/>
-              <a:defRPr sz="1000"/>
+              <a:defRPr sz="800"/>
             </a:lvl4pPr>
             <a:lvl5pPr marL="1828800" indent="0">
               <a:buNone/>
-              <a:defRPr sz="1000"/>
+              <a:defRPr sz="800"/>
             </a:lvl5pPr>
             <a:lvl6pPr marL="2286000" indent="0">
               <a:buNone/>
-              <a:defRPr sz="1000"/>
+              <a:defRPr sz="800"/>
             </a:lvl6pPr>
             <a:lvl7pPr marL="2743200" indent="0">
               <a:buNone/>
-              <a:defRPr sz="1000"/>
+              <a:defRPr sz="800"/>
             </a:lvl7pPr>
             <a:lvl8pPr marL="3200400" indent="0">
               <a:buNone/>
-              <a:defRPr sz="1000"/>
+              <a:defRPr sz="800"/>
             </a:lvl8pPr>
             <a:lvl9pPr marL="3657600" indent="0">
               <a:buNone/>
-              <a:defRPr sz="1000"/>
+              <a:defRPr sz="800"/>
             </a:lvl9pPr>
           </a:lstStyle>
           <a:p>
@@ -3053,35 +2942,6 @@
           <a:bodyPr/>
           <a:lstStyle/>
           <a:p>
-            <a:endParaRPr lang="en-US"/>
-          </a:p>
-        </p:txBody>
-      </p:sp>
-      <p:sp>
-        <p:nvSpPr>
-          <p:cNvPr id="7" name="Slide Number Placeholder 6">
-            <a:extLst>
-              <a:ext uri="{FF2B5EF4-FFF2-40B4-BE49-F238E27FC236}">
-                <a16:creationId xmlns:a16="http://schemas.microsoft.com/office/drawing/2014/main" id="{6A26AF35-49D6-44F4-BBA9-B033B364BE84}"/>
-              </a:ext>
-            </a:extLst>
-          </p:cNvPr>
-          <p:cNvSpPr>
-            <a:spLocks noGrp="1"/>
-          </p:cNvSpPr>
-          <p:nvPr>
-            <p:ph type="sldNum" sz="quarter" idx="12"/>
-          </p:nvPr>
-        </p:nvSpPr>
-        <p:spPr/>
-        <p:txBody>
-          <a:bodyPr/>
-          <a:lstStyle/>
-          <a:p>
-            <a:fld id="{6CB4759B-89EF-486F-A495-36988C5D6AB8}" type="slidenum">
-              <a:rPr lang="en-US" smtClean="0"/>
-              <a:t>‹#›</a:t>
-            </a:fld>
             <a:endParaRPr lang="en-US"/>
           </a:p>
         </p:txBody>
@@ -3139,7 +2999,7 @@
         </p:nvSpPr>
         <p:spPr>
           <a:xfrm>
-            <a:off x="838200" y="365125"/>
+            <a:off x="838200" y="708025"/>
             <a:ext cx="10515600" cy="1325563"/>
           </a:xfrm>
           <a:prstGeom prst="rect">
@@ -3177,7 +3037,7 @@
         </p:nvSpPr>
         <p:spPr>
           <a:xfrm>
-            <a:off x="838200" y="1825625"/>
+            <a:off x="838200" y="2168525"/>
             <a:ext cx="10515600" cy="4351338"/>
           </a:xfrm>
           <a:prstGeom prst="rect">
@@ -3244,7 +3104,7 @@
         </p:nvSpPr>
         <p:spPr>
           <a:xfrm>
-            <a:off x="838200" y="6356350"/>
+            <a:off x="838200" y="6699250"/>
             <a:ext cx="2743200" cy="365125"/>
           </a:xfrm>
           <a:prstGeom prst="rect">
@@ -3255,7 +3115,7 @@
           <a:bodyPr vert="horz" lIns="91440" tIns="45720" rIns="91440" bIns="45720" rtlCol="0" anchor="ctr"/>
           <a:lstStyle>
             <a:lvl1pPr algn="l">
-              <a:defRPr sz="1200">
+              <a:defRPr sz="960">
                 <a:solidFill>
                   <a:schemeClr val="tx1">
                     <a:tint val="75000"/>
@@ -3291,7 +3151,7 @@
         </p:nvSpPr>
         <p:spPr>
           <a:xfrm>
-            <a:off x="4038600" y="6356350"/>
+            <a:off x="4038600" y="6699250"/>
             <a:ext cx="4114800" cy="365125"/>
           </a:xfrm>
           <a:prstGeom prst="rect">
@@ -3302,7 +3162,7 @@
           <a:bodyPr vert="horz" lIns="91440" tIns="45720" rIns="91440" bIns="45720" rtlCol="0" anchor="ctr"/>
           <a:lstStyle>
             <a:lvl1pPr algn="ctr">
-              <a:defRPr sz="1200">
+              <a:defRPr sz="960">
                 <a:solidFill>
                   <a:schemeClr val="tx1">
                     <a:tint val="75000"/>
@@ -3312,53 +3172,6 @@
             </a:lvl1pPr>
           </a:lstStyle>
           <a:p>
-            <a:endParaRPr lang="en-US"/>
-          </a:p>
-        </p:txBody>
-      </p:sp>
-      <p:sp>
-        <p:nvSpPr>
-          <p:cNvPr id="6" name="Slide Number Placeholder 5">
-            <a:extLst>
-              <a:ext uri="{FF2B5EF4-FFF2-40B4-BE49-F238E27FC236}">
-                <a16:creationId xmlns:a16="http://schemas.microsoft.com/office/drawing/2014/main" id="{DFFEAE65-4C3F-4737-B4AA-0DB0026D3A70}"/>
-              </a:ext>
-            </a:extLst>
-          </p:cNvPr>
-          <p:cNvSpPr>
-            <a:spLocks noGrp="1"/>
-          </p:cNvSpPr>
-          <p:nvPr>
-            <p:ph type="sldNum" sz="quarter" idx="4"/>
-          </p:nvPr>
-        </p:nvSpPr>
-        <p:spPr>
-          <a:xfrm>
-            <a:off x="8610600" y="6356350"/>
-            <a:ext cx="2743200" cy="365125"/>
-          </a:xfrm>
-          <a:prstGeom prst="rect">
-            <a:avLst/>
-          </a:prstGeom>
-        </p:spPr>
-        <p:txBody>
-          <a:bodyPr vert="horz" lIns="91440" tIns="45720" rIns="91440" bIns="45720" rtlCol="0" anchor="ctr"/>
-          <a:lstStyle>
-            <a:lvl1pPr algn="r">
-              <a:defRPr sz="1200">
-                <a:solidFill>
-                  <a:schemeClr val="tx1">
-                    <a:tint val="75000"/>
-                  </a:schemeClr>
-                </a:solidFill>
-              </a:defRPr>
-            </a:lvl1pPr>
-          </a:lstStyle>
-          <a:p>
-            <a:fld id="{6CB4759B-89EF-486F-A495-36988C5D6AB8}" type="slidenum">
-              <a:rPr lang="en-US" smtClean="0"/>
-              <a:t>‹#›</a:t>
-            </a:fld>
             <a:endParaRPr lang="en-US"/>
           </a:p>
         </p:txBody>
@@ -3395,11 +3208,11 @@
           <a:spcPct val="0"/>
         </a:spcBef>
         <a:buNone/>
-        <a:defRPr sz="4400" kern="1200">
+        <a:defRPr sz="3520" kern="1200">
           <a:solidFill>
             <a:schemeClr val="tx1"/>
           </a:solidFill>
-          <a:latin typeface="+mj-lt"/>
+          <a:latin typeface="Arial"/>
           <a:ea typeface="+mj-ea"/>
           <a:cs typeface="+mj-cs"/>
         </a:defRPr>
@@ -3415,11 +3228,11 @@
         </a:spcBef>
         <a:buFont typeface="Arial" panose="020B0604020202020204" pitchFamily="34" charset="0"/>
         <a:buChar char="•"/>
-        <a:defRPr sz="2800" kern="1200">
+        <a:defRPr sz="2240" kern="1200">
           <a:solidFill>
             <a:schemeClr val="tx1"/>
           </a:solidFill>
-          <a:latin typeface="+mn-lt"/>
+          <a:latin typeface="Arial"/>
           <a:ea typeface="+mn-ea"/>
           <a:cs typeface="+mn-cs"/>
         </a:defRPr>
@@ -3433,11 +3246,11 @@
         </a:spcBef>
         <a:buFont typeface="Arial" panose="020B0604020202020204" pitchFamily="34" charset="0"/>
         <a:buChar char="•"/>
-        <a:defRPr sz="2400" kern="1200">
+        <a:defRPr sz="1920" kern="1200">
           <a:solidFill>
             <a:schemeClr val="tx1"/>
           </a:solidFill>
-          <a:latin typeface="+mn-lt"/>
+          <a:latin typeface="Arial"/>
           <a:ea typeface="+mn-ea"/>
           <a:cs typeface="+mn-cs"/>
         </a:defRPr>
@@ -3451,11 +3264,11 @@
         </a:spcBef>
         <a:buFont typeface="Arial" panose="020B0604020202020204" pitchFamily="34" charset="0"/>
         <a:buChar char="•"/>
-        <a:defRPr sz="2000" kern="1200">
+        <a:defRPr sz="1600" kern="1200">
           <a:solidFill>
             <a:schemeClr val="tx1"/>
           </a:solidFill>
-          <a:latin typeface="+mn-lt"/>
+          <a:latin typeface="Arial"/>
           <a:ea typeface="+mn-ea"/>
           <a:cs typeface="+mn-cs"/>
         </a:defRPr>
@@ -3469,11 +3282,11 @@
         </a:spcBef>
         <a:buFont typeface="Arial" panose="020B0604020202020204" pitchFamily="34" charset="0"/>
         <a:buChar char="•"/>
-        <a:defRPr sz="1800" kern="1200">
+        <a:defRPr sz="1440" kern="1200">
           <a:solidFill>
             <a:schemeClr val="tx1"/>
           </a:solidFill>
-          <a:latin typeface="+mn-lt"/>
+          <a:latin typeface="Arial"/>
           <a:ea typeface="+mn-ea"/>
           <a:cs typeface="+mn-cs"/>
         </a:defRPr>
@@ -3487,11 +3300,11 @@
         </a:spcBef>
         <a:buFont typeface="Arial" panose="020B0604020202020204" pitchFamily="34" charset="0"/>
         <a:buChar char="•"/>
-        <a:defRPr sz="1800" kern="1200">
+        <a:defRPr sz="1440" kern="1200">
           <a:solidFill>
             <a:schemeClr val="tx1"/>
           </a:solidFill>
-          <a:latin typeface="+mn-lt"/>
+          <a:latin typeface="Arial"/>
           <a:ea typeface="+mn-ea"/>
           <a:cs typeface="+mn-cs"/>
         </a:defRPr>
@@ -3505,11 +3318,11 @@
         </a:spcBef>
         <a:buFont typeface="Arial" panose="020B0604020202020204" pitchFamily="34" charset="0"/>
         <a:buChar char="•"/>
-        <a:defRPr sz="1800" kern="1200">
+        <a:defRPr sz="1440" kern="1200">
           <a:solidFill>
             <a:schemeClr val="tx1"/>
           </a:solidFill>
-          <a:latin typeface="+mn-lt"/>
+          <a:latin typeface="Arial"/>
           <a:ea typeface="+mn-ea"/>
           <a:cs typeface="+mn-cs"/>
         </a:defRPr>
@@ -3523,11 +3336,11 @@
         </a:spcBef>
         <a:buFont typeface="Arial" panose="020B0604020202020204" pitchFamily="34" charset="0"/>
         <a:buChar char="•"/>
-        <a:defRPr sz="1800" kern="1200">
+        <a:defRPr sz="1440" kern="1200">
           <a:solidFill>
             <a:schemeClr val="tx1"/>
           </a:solidFill>
-          <a:latin typeface="+mn-lt"/>
+          <a:latin typeface="Arial"/>
           <a:ea typeface="+mn-ea"/>
           <a:cs typeface="+mn-cs"/>
         </a:defRPr>
@@ -3541,11 +3354,11 @@
         </a:spcBef>
         <a:buFont typeface="Arial" panose="020B0604020202020204" pitchFamily="34" charset="0"/>
         <a:buChar char="•"/>
-        <a:defRPr sz="1800" kern="1200">
+        <a:defRPr sz="1440" kern="1200">
           <a:solidFill>
             <a:schemeClr val="tx1"/>
           </a:solidFill>
-          <a:latin typeface="+mn-lt"/>
+          <a:latin typeface="Arial"/>
           <a:ea typeface="+mn-ea"/>
           <a:cs typeface="+mn-cs"/>
         </a:defRPr>
@@ -3559,11 +3372,11 @@
         </a:spcBef>
         <a:buFont typeface="Arial" panose="020B0604020202020204" pitchFamily="34" charset="0"/>
         <a:buChar char="•"/>
-        <a:defRPr sz="1800" kern="1200">
+        <a:defRPr sz="1440" kern="1200">
           <a:solidFill>
             <a:schemeClr val="tx1"/>
           </a:solidFill>
-          <a:latin typeface="+mn-lt"/>
+          <a:latin typeface="Arial"/>
           <a:ea typeface="+mn-ea"/>
           <a:cs typeface="+mn-cs"/>
         </a:defRPr>
@@ -3574,91 +3387,91 @@
         <a:defRPr lang="en-US"/>
       </a:defPPr>
       <a:lvl1pPr marL="0" algn="l" defTabSz="914400" rtl="0" eaLnBrk="1" latinLnBrk="0" hangingPunct="1">
-        <a:defRPr sz="1800" kern="1200">
+        <a:defRPr sz="1440" kern="1200">
           <a:solidFill>
             <a:schemeClr val="tx1"/>
           </a:solidFill>
-          <a:latin typeface="+mn-lt"/>
+          <a:latin typeface="Arial"/>
           <a:ea typeface="+mn-ea"/>
           <a:cs typeface="+mn-cs"/>
         </a:defRPr>
       </a:lvl1pPr>
       <a:lvl2pPr marL="457200" algn="l" defTabSz="914400" rtl="0" eaLnBrk="1" latinLnBrk="0" hangingPunct="1">
-        <a:defRPr sz="1800" kern="1200">
+        <a:defRPr sz="1440" kern="1200">
           <a:solidFill>
             <a:schemeClr val="tx1"/>
           </a:solidFill>
-          <a:latin typeface="+mn-lt"/>
+          <a:latin typeface="Arial"/>
           <a:ea typeface="+mn-ea"/>
           <a:cs typeface="+mn-cs"/>
         </a:defRPr>
       </a:lvl2pPr>
       <a:lvl3pPr marL="914400" algn="l" defTabSz="914400" rtl="0" eaLnBrk="1" latinLnBrk="0" hangingPunct="1">
-        <a:defRPr sz="1800" kern="1200">
+        <a:defRPr sz="1440" kern="1200">
           <a:solidFill>
             <a:schemeClr val="tx1"/>
           </a:solidFill>
-          <a:latin typeface="+mn-lt"/>
+          <a:latin typeface="Arial"/>
           <a:ea typeface="+mn-ea"/>
           <a:cs typeface="+mn-cs"/>
         </a:defRPr>
       </a:lvl3pPr>
       <a:lvl4pPr marL="1371600" algn="l" defTabSz="914400" rtl="0" eaLnBrk="1" latinLnBrk="0" hangingPunct="1">
-        <a:defRPr sz="1800" kern="1200">
+        <a:defRPr sz="1440" kern="1200">
           <a:solidFill>
             <a:schemeClr val="tx1"/>
           </a:solidFill>
-          <a:latin typeface="+mn-lt"/>
+          <a:latin typeface="Arial"/>
           <a:ea typeface="+mn-ea"/>
           <a:cs typeface="+mn-cs"/>
         </a:defRPr>
       </a:lvl4pPr>
       <a:lvl5pPr marL="1828800" algn="l" defTabSz="914400" rtl="0" eaLnBrk="1" latinLnBrk="0" hangingPunct="1">
-        <a:defRPr sz="1800" kern="1200">
+        <a:defRPr sz="1440" kern="1200">
           <a:solidFill>
             <a:schemeClr val="tx1"/>
           </a:solidFill>
-          <a:latin typeface="+mn-lt"/>
+          <a:latin typeface="Arial"/>
           <a:ea typeface="+mn-ea"/>
           <a:cs typeface="+mn-cs"/>
         </a:defRPr>
       </a:lvl5pPr>
       <a:lvl6pPr marL="2286000" algn="l" defTabSz="914400" rtl="0" eaLnBrk="1" latinLnBrk="0" hangingPunct="1">
-        <a:defRPr sz="1800" kern="1200">
+        <a:defRPr sz="1440" kern="1200">
           <a:solidFill>
             <a:schemeClr val="tx1"/>
           </a:solidFill>
-          <a:latin typeface="+mn-lt"/>
+          <a:latin typeface="Arial"/>
           <a:ea typeface="+mn-ea"/>
           <a:cs typeface="+mn-cs"/>
         </a:defRPr>
       </a:lvl6pPr>
       <a:lvl7pPr marL="2743200" algn="l" defTabSz="914400" rtl="0" eaLnBrk="1" latinLnBrk="0" hangingPunct="1">
-        <a:defRPr sz="1800" kern="1200">
+        <a:defRPr sz="1440" kern="1200">
           <a:solidFill>
             <a:schemeClr val="tx1"/>
           </a:solidFill>
-          <a:latin typeface="+mn-lt"/>
+          <a:latin typeface="Arial"/>
           <a:ea typeface="+mn-ea"/>
           <a:cs typeface="+mn-cs"/>
         </a:defRPr>
       </a:lvl7pPr>
       <a:lvl8pPr marL="3200400" algn="l" defTabSz="914400" rtl="0" eaLnBrk="1" latinLnBrk="0" hangingPunct="1">
-        <a:defRPr sz="1800" kern="1200">
+        <a:defRPr sz="1440" kern="1200">
           <a:solidFill>
             <a:schemeClr val="tx1"/>
           </a:solidFill>
-          <a:latin typeface="+mn-lt"/>
+          <a:latin typeface="Arial"/>
           <a:ea typeface="+mn-ea"/>
           <a:cs typeface="+mn-cs"/>
         </a:defRPr>
       </a:lvl8pPr>
       <a:lvl9pPr marL="3657600" algn="l" defTabSz="914400" rtl="0" eaLnBrk="1" latinLnBrk="0" hangingPunct="1">
-        <a:defRPr sz="1800" kern="1200">
+        <a:defRPr sz="1440" kern="1200">
           <a:solidFill>
             <a:schemeClr val="tx1"/>
           </a:solidFill>
-          <a:latin typeface="+mn-lt"/>
+          <a:latin typeface="Arial"/>
           <a:ea typeface="+mn-ea"/>
           <a:cs typeface="+mn-cs"/>
         </a:defRPr>
@@ -3718,7 +3531,7 @@
         </p:nvSpPr>
         <p:spPr>
           <a:xfrm>
-            <a:off x="0" y="4918509"/>
+            <a:off x="0" y="5261409"/>
             <a:ext cx="12192000" cy="1939491"/>
           </a:xfrm>
           <a:prstGeom prst="rect">
@@ -3784,7 +3597,7 @@
         </p:blipFill>
         <p:spPr>
           <a:xfrm>
-            <a:off x="273812" y="1124973"/>
+            <a:off x="273812" y="1467873"/>
             <a:ext cx="2974213" cy="2074513"/>
           </a:xfrm>
           <a:prstGeom prst="rect">
@@ -3820,7 +3633,7 @@
         </p:blipFill>
         <p:spPr>
           <a:xfrm>
-            <a:off x="8527082" y="660155"/>
+            <a:off x="8527082" y="1003055"/>
             <a:ext cx="3619459" cy="3004150"/>
           </a:xfrm>
           <a:prstGeom prst="rect">
@@ -3856,7 +3669,7 @@
         </p:blipFill>
         <p:spPr>
           <a:xfrm>
-            <a:off x="3392362" y="895460"/>
+            <a:off x="3392362" y="1238360"/>
             <a:ext cx="5144245" cy="2533540"/>
           </a:xfrm>
           <a:prstGeom prst="rect">
@@ -3882,7 +3695,7 @@
         </p:nvSpPr>
         <p:spPr>
           <a:xfrm>
-            <a:off x="1600200" y="4269282"/>
+            <a:off x="1600200" y="4612182"/>
             <a:ext cx="8991600" cy="1264762"/>
           </a:xfrm>
           <a:solidFill>
@@ -3903,7 +3716,7 @@
           <a:p>
             <a:pPr algn="ctr"/>
             <a:r>
-              <a:rPr lang="en-US" sz="4000">
+              <a:rPr lang="en-US" sz="3200">
                 <a:solidFill>
                   <a:srgbClr val="404040"/>
                 </a:solidFill>
@@ -3915,30 +3728,202 @@
       </p:sp>
       <p:sp>
         <p:nvSpPr>
-          <p:cNvPr id="19" name="Slide Number Placeholder 18">
-            <a:extLst>
-              <a:ext uri="{FF2B5EF4-FFF2-40B4-BE49-F238E27FC236}">
-                <a16:creationId xmlns:a16="http://schemas.microsoft.com/office/drawing/2014/main" id="{1AB920EB-CCFE-48E3-94DD-AB2F069F3BA0}"/>
-              </a:ext>
-            </a:extLst>
-          </p:cNvPr>
+          <p:cNvPr id="29" name="DSPIRA 1"/>
           <p:cNvSpPr>
             <a:spLocks noGrp="1"/>
           </p:cNvSpPr>
-          <p:nvPr>
-            <p:ph type="sldNum" sz="quarter" idx="12"/>
-          </p:nvPr>
+          <p:nvPr/>
         </p:nvSpPr>
-        <p:spPr/>
+        <p:spPr>
+          <a:xfrm>
+            <a:off x="0" y="0"/>
+            <a:ext cx="12192000" cy="342900"/>
+          </a:xfrm>
+          <a:prstGeom prst="rect">
+            <a:avLst/>
+          </a:prstGeom>
+          <a:solidFill>
+            <a:srgbClr val="FFFFFF"/>
+          </a:solidFill>
+          <a:ln w="0">
+            <a:noFill/>
+          </a:ln>
+        </p:spPr>
+      </p:sp>
+      <p:sp>
+        <p:nvSpPr>
+          <p:cNvPr id="30" name="DSPIRA 2"/>
+          <p:cNvSpPr>
+            <a:spLocks noGrp="1"/>
+          </p:cNvSpPr>
+          <p:nvPr/>
+        </p:nvSpPr>
+        <p:spPr>
+          <a:xfrm>
+            <a:off x="0" y="7200900"/>
+            <a:ext cx="12192000" cy="342900"/>
+          </a:xfrm>
+          <a:prstGeom prst="rect">
+            <a:avLst/>
+          </a:prstGeom>
+          <a:solidFill>
+            <a:srgbClr val="FFFFFF"/>
+          </a:solidFill>
+          <a:ln w="0">
+            <a:noFill/>
+          </a:ln>
+        </p:spPr>
+      </p:sp>
+      <p:sp>
+        <p:nvSpPr>
+          <p:cNvPr id="31" name="DSPIRA 3"/>
+          <p:cNvSpPr>
+            <a:spLocks noGrp="1"/>
+          </p:cNvSpPr>
+          <p:nvPr/>
+        </p:nvSpPr>
+        <p:spPr>
+          <a:xfrm>
+            <a:off x="228600" y="76200"/>
+            <a:ext cx="4762500" cy="228600"/>
+          </a:xfrm>
+          <a:prstGeom prst="rect">
+            <a:avLst/>
+          </a:prstGeom>
+          <a:noFill/>
+          <a:ln w="0">
+            <a:noFill/>
+          </a:ln>
+        </p:spPr>
         <p:txBody>
-          <a:bodyPr/>
+          <a:bodyPr>
+            <a:noAutofit/>
+          </a:bodyPr>
           <a:lstStyle/>
           <a:p>
-            <a:fld id="{6CB4759B-89EF-486F-A495-36988C5D6AB8}" type="slidenum">
-              <a:rPr lang="en-US" smtClean="0"/>
-              <a:t>1</a:t>
-            </a:fld>
-            <a:endParaRPr lang="en-US"/>
+            <a:pPr>
+              <a:defRPr sz="1200" b="1">
+                <a:solidFill>
+                  <a:srgbClr val="002855"/>
+                </a:solidFill>
+                <a:latin typeface="Arial"/>
+                <a:ea typeface="Arial"/>
+                <a:cs typeface="Arial"/>
+              </a:defRPr>
+            </a:pPr>
+            <a:r>
+              <a:rPr sz="1200" b="1">
+                <a:solidFill>
+                  <a:srgbClr val="002855"/>
+                </a:solidFill>
+                <a:latin typeface="Arial"/>
+                <a:ea typeface="Arial"/>
+                <a:cs typeface="Arial"/>
+              </a:rPr>
+              <a:t>WVU DSPIRA</a:t>
+            </a:r>
+          </a:p>
+        </p:txBody>
+      </p:sp>
+      <p:sp>
+        <p:nvSpPr>
+          <p:cNvPr id="32" name="DSPIRA 4"/>
+          <p:cNvSpPr>
+            <a:spLocks noGrp="1"/>
+          </p:cNvSpPr>
+          <p:nvPr/>
+        </p:nvSpPr>
+        <p:spPr>
+          <a:xfrm>
+            <a:off x="228600" y="7277100"/>
+            <a:ext cx="6667500" cy="228600"/>
+          </a:xfrm>
+          <a:prstGeom prst="rect">
+            <a:avLst/>
+          </a:prstGeom>
+          <a:noFill/>
+          <a:ln w="0">
+            <a:noFill/>
+          </a:ln>
+        </p:spPr>
+        <p:txBody>
+          <a:bodyPr>
+            <a:noAutofit/>
+          </a:bodyPr>
+          <a:lstStyle/>
+          <a:p>
+            <a:pPr>
+              <a:defRPr sz="900" b="0">
+                <a:solidFill>
+                  <a:srgbClr val="002855"/>
+                </a:solidFill>
+                <a:latin typeface="Arial"/>
+                <a:ea typeface="Arial"/>
+                <a:cs typeface="Arial"/>
+              </a:defRPr>
+            </a:pPr>
+            <a:r>
+              <a:rPr sz="900" b="0">
+                <a:solidFill>
+                  <a:srgbClr val="002855"/>
+                </a:solidFill>
+                <a:latin typeface="Arial"/>
+                <a:ea typeface="Arial"/>
+                <a:cs typeface="Arial"/>
+              </a:rPr>
+              <a:t>wvurail.org/dspira</a:t>
+            </a:r>
+          </a:p>
+        </p:txBody>
+      </p:sp>
+      <p:sp>
+        <p:nvSpPr>
+          <p:cNvPr id="33" name="DSPIRA 5"/>
+          <p:cNvSpPr>
+            <a:spLocks noGrp="1"/>
+          </p:cNvSpPr>
+          <p:nvPr/>
+        </p:nvSpPr>
+        <p:spPr>
+          <a:xfrm>
+            <a:off x="11191875" y="7277100"/>
+            <a:ext cx="762000" cy="228600"/>
+          </a:xfrm>
+          <a:prstGeom prst="rect">
+            <a:avLst/>
+          </a:prstGeom>
+          <a:noFill/>
+          <a:ln w="0">
+            <a:noFill/>
+          </a:ln>
+        </p:spPr>
+        <p:txBody>
+          <a:bodyPr>
+            <a:noAutofit/>
+          </a:bodyPr>
+          <a:lstStyle/>
+          <a:p>
+            <a:pPr>
+              <a:defRPr sz="900" b="0">
+                <a:solidFill>
+                  <a:srgbClr val="002855"/>
+                </a:solidFill>
+                <a:latin typeface="Arial"/>
+                <a:ea typeface="Arial"/>
+                <a:cs typeface="Arial"/>
+              </a:defRPr>
+            </a:pPr>
+            <a:r>
+              <a:rPr sz="900" b="0">
+                <a:solidFill>
+                  <a:srgbClr val="002855"/>
+                </a:solidFill>
+                <a:latin typeface="Arial"/>
+                <a:ea typeface="Arial"/>
+                <a:cs typeface="Arial"/>
+              </a:rPr>
+              <a:t>1 of 7</a:t>
+            </a:r>
           </a:p>
         </p:txBody>
       </p:sp>
@@ -4005,7 +3990,7 @@
         </p:nvSpPr>
         <p:spPr>
           <a:xfrm>
-            <a:off x="4639056" y="0"/>
+            <a:off x="4639056" y="342900"/>
             <a:ext cx="7552944" cy="6858000"/>
           </a:xfrm>
           <a:prstGeom prst="rect">
@@ -4068,7 +4053,7 @@
         </p:nvSpPr>
         <p:spPr>
           <a:xfrm>
-            <a:off x="5123688" y="484632"/>
+            <a:off x="5123688" y="827532"/>
             <a:ext cx="6584098" cy="5739187"/>
           </a:xfrm>
           <a:prstGeom prst="roundRect">
@@ -4145,7 +4130,7 @@
         </p:blipFill>
         <p:spPr>
           <a:xfrm>
-            <a:off x="6288999" y="691143"/>
+            <a:off x="6288999" y="1034043"/>
             <a:ext cx="2297430" cy="1585227"/>
           </a:xfrm>
           <a:prstGeom prst="rect">
@@ -4172,7 +4157,7 @@
         </p:nvSpPr>
         <p:spPr>
           <a:xfrm>
-            <a:off x="648929" y="629266"/>
+            <a:off x="648929" y="972166"/>
             <a:ext cx="3505495" cy="1622321"/>
           </a:xfrm>
         </p:spPr>
@@ -4183,11 +4168,11 @@
           <a:lstStyle/>
           <a:p>
             <a:r>
-              <a:rPr lang="en-US" sz="4100" kern="1200">
+              <a:rPr lang="en-US" sz="3280" kern="1200">
                 <a:solidFill>
                   <a:schemeClr val="tx1"/>
                 </a:solidFill>
-                <a:latin typeface="+mj-lt"/>
+                <a:latin typeface="Arial"/>
                 <a:ea typeface="+mj-ea"/>
                 <a:cs typeface="+mj-cs"/>
               </a:rPr>
@@ -4227,13 +4212,13 @@
               <a:lstStyle/>
               <a:p>
                 <a:r>
-                  <a:rPr lang="en-US" sz="1900"/>
+                  <a:rPr lang="en-US" sz="1520"/>
                   <a:t>A signal can be represented as a combination of other signals</a:t>
                 </a:r>
               </a:p>
               <a:p>
                 <a:r>
-                  <a:rPr lang="en-US" sz="1900"/>
+                  <a:rPr lang="en-US" sz="1520"/>
                   <a:t>Example (last time) </a:t>
                 </a:r>
               </a:p>
@@ -4245,7 +4230,7 @@
                       <m:rPr>
                         <m:sty m:val="p"/>
                       </m:rPr>
-                      <a:rPr lang="en-US" sz="1900" i="1">
+                      <a:rPr lang="en-US" sz="1520" i="1">
                         <a:latin typeface="Cambria Math" panose="02040503050406030204" pitchFamily="18" charset="0"/>
                       </a:rPr>
                       <m:t>Λ</m:t>
@@ -4253,20 +4238,20 @@
                     <m:d>
                       <m:dPr>
                         <m:ctrlPr>
-                          <a:rPr lang="en-US" sz="1900" i="1">
+                          <a:rPr lang="en-US" sz="1520" i="1">
                             <a:latin typeface="Cambria Math" panose="02040503050406030204" pitchFamily="18" charset="0"/>
                           </a:rPr>
                         </m:ctrlPr>
                       </m:dPr>
                       <m:e>
                         <m:r>
-                          <a:rPr lang="en-US" sz="1900" b="0" i="1">
+                          <a:rPr lang="en-US" sz="1520" b="0" i="1">
                             <a:latin typeface="Cambria Math" panose="02040503050406030204" pitchFamily="18" charset="0"/>
                           </a:rPr>
                           <m:t>0.5</m:t>
                         </m:r>
                         <m:r>
-                          <a:rPr lang="en-US" sz="1900" b="0" i="1">
+                          <a:rPr lang="en-US" sz="1520" b="0" i="1">
                             <a:latin typeface="Cambria Math" panose="02040503050406030204" pitchFamily="18" charset="0"/>
                           </a:rPr>
                           <m:t>𝑡</m:t>
@@ -4274,7 +4259,7 @@
                       </m:e>
                     </m:d>
                     <m:r>
-                      <a:rPr lang="en-US" sz="1900" b="0" i="1">
+                      <a:rPr lang="en-US" sz="1520" b="0" i="1">
                         <a:latin typeface="Cambria Math" panose="02040503050406030204" pitchFamily="18" charset="0"/>
                       </a:rPr>
                       <m:t>−</m:t>
@@ -4283,36 +4268,36 @@
                       <m:rPr>
                         <m:sty m:val="p"/>
                       </m:rPr>
-                      <a:rPr lang="en-US" sz="1900" i="1">
+                      <a:rPr lang="en-US" sz="1520" i="1">
                         <a:latin typeface="Cambria Math" panose="02040503050406030204" pitchFamily="18" charset="0"/>
                       </a:rPr>
                       <m:t>Λ</m:t>
                     </m:r>
                     <m:r>
-                      <a:rPr lang="en-US" sz="1900" b="0" i="1">
+                      <a:rPr lang="en-US" sz="1520" b="0" i="1">
                         <a:latin typeface="Cambria Math" panose="02040503050406030204" pitchFamily="18" charset="0"/>
                       </a:rPr>
                       <m:t>(</m:t>
                     </m:r>
                     <m:r>
-                      <a:rPr lang="en-US" sz="1900" b="0" i="1">
+                      <a:rPr lang="en-US" sz="1520" b="0" i="1">
                         <a:latin typeface="Cambria Math" panose="02040503050406030204" pitchFamily="18" charset="0"/>
                       </a:rPr>
                       <m:t>𝑡</m:t>
                     </m:r>
                     <m:r>
-                      <a:rPr lang="en-US" sz="1900" b="0" i="1">
+                      <a:rPr lang="en-US" sz="1520" b="0" i="1">
                         <a:latin typeface="Cambria Math" panose="02040503050406030204" pitchFamily="18" charset="0"/>
                       </a:rPr>
                       <m:t>)</m:t>
                     </m:r>
                   </m:oMath>
                 </a14:m>
-                <a:endParaRPr lang="en-US" sz="1900"/>
+                <a:endParaRPr lang="en-US" sz="1520"/>
               </a:p>
               <a:p>
                 <a:r>
-                  <a:rPr lang="en-US" sz="1900"/>
+                  <a:rPr lang="en-US" sz="1520"/>
                   <a:t>Depending on a type of signal, it can be decomposed in a series</a:t>
                 </a:r>
               </a:p>
@@ -4321,7 +4306,7 @@
                 <a14:m>
                   <m:oMath xmlns:m="http://schemas.openxmlformats.org/officeDocument/2006/math">
                     <m:r>
-                      <a:rPr lang="en-US" sz="1900" b="0" i="1">
+                      <a:rPr lang="en-US" sz="1520" b="0" i="1">
                         <a:latin typeface="Cambria Math" panose="02040503050406030204" pitchFamily="18" charset="0"/>
                       </a:rPr>
                       <m:t>𝑥</m:t>
@@ -4329,14 +4314,14 @@
                     <m:d>
                       <m:dPr>
                         <m:ctrlPr>
-                          <a:rPr lang="en-US" sz="1900" b="0" i="1">
+                          <a:rPr lang="en-US" sz="1520" b="0" i="1">
                             <a:latin typeface="Cambria Math" panose="02040503050406030204" pitchFamily="18" charset="0"/>
                           </a:rPr>
                         </m:ctrlPr>
                       </m:dPr>
                       <m:e>
                         <m:r>
-                          <a:rPr lang="en-US" sz="1900" b="0" i="1">
+                          <a:rPr lang="en-US" sz="1520" b="0" i="1">
                             <a:latin typeface="Cambria Math" panose="02040503050406030204" pitchFamily="18" charset="0"/>
                           </a:rPr>
                           <m:t>𝑡</m:t>
@@ -4344,7 +4329,7 @@
                       </m:e>
                     </m:d>
                     <m:r>
-                      <a:rPr lang="en-US" sz="1900" b="0" i="1">
+                      <a:rPr lang="en-US" sz="1520" b="0" i="1">
                         <a:latin typeface="Cambria Math" panose="02040503050406030204" pitchFamily="18" charset="0"/>
                       </a:rPr>
                       <m:t>=</m:t>
@@ -4353,7 +4338,7 @@
                       <m:naryPr>
                         <m:chr m:val="∑"/>
                         <m:ctrlPr>
-                          <a:rPr lang="en-US" sz="1900" b="0" i="1">
+                          <a:rPr lang="en-US" sz="1520" b="0" i="1">
                             <a:latin typeface="Cambria Math" panose="02040503050406030204" pitchFamily="18" charset="0"/>
                           </a:rPr>
                         </m:ctrlPr>
@@ -4363,13 +4348,13 @@
                           <m:rPr>
                             <m:brk m:alnAt="23"/>
                           </m:rPr>
-                          <a:rPr lang="en-US" sz="1900" b="0" i="1">
+                          <a:rPr lang="en-US" sz="1520" b="0" i="1">
                             <a:latin typeface="Cambria Math" panose="02040503050406030204" pitchFamily="18" charset="0"/>
                           </a:rPr>
                           <m:t>𝑘</m:t>
                         </m:r>
                         <m:r>
-                          <a:rPr lang="en-US" sz="1900" b="0" i="1">
+                          <a:rPr lang="en-US" sz="1520" b="0" i="1">
                             <a:latin typeface="Cambria Math" panose="02040503050406030204" pitchFamily="18" charset="0"/>
                           </a:rPr>
                           <m:t>=−∞</m:t>
@@ -4377,7 +4362,7 @@
                       </m:sub>
                       <m:sup>
                         <m:r>
-                          <a:rPr lang="en-US" sz="1900" b="0" i="1">
+                          <a:rPr lang="en-US" sz="1520" b="0" i="1">
                             <a:latin typeface="Cambria Math" panose="02040503050406030204" pitchFamily="18" charset="0"/>
                           </a:rPr>
                           <m:t>+∞</m:t>
@@ -4387,14 +4372,14 @@
                         <m:sSub>
                           <m:sSubPr>
                             <m:ctrlPr>
-                              <a:rPr lang="en-US" sz="1900" b="0" i="1">
+                              <a:rPr lang="en-US" sz="1520" b="0" i="1">
                                 <a:latin typeface="Cambria Math" panose="02040503050406030204" pitchFamily="18" charset="0"/>
                               </a:rPr>
                             </m:ctrlPr>
                           </m:sSubPr>
                           <m:e>
                             <m:r>
-                              <a:rPr lang="en-US" sz="1900" b="0" i="1">
+                              <a:rPr lang="en-US" sz="1520" b="0" i="1">
                                 <a:latin typeface="Cambria Math" panose="02040503050406030204" pitchFamily="18" charset="0"/>
                               </a:rPr>
                               <m:t>𝑎</m:t>
@@ -4402,7 +4387,7 @@
                           </m:e>
                           <m:sub>
                             <m:r>
-                              <a:rPr lang="en-US" sz="1900" b="0" i="1">
+                              <a:rPr lang="en-US" sz="1520" b="0" i="1">
                                 <a:latin typeface="Cambria Math" panose="02040503050406030204" pitchFamily="18" charset="0"/>
                               </a:rPr>
                               <m:t>𝑘</m:t>
@@ -4412,14 +4397,14 @@
                         <m:sSub>
                           <m:sSubPr>
                             <m:ctrlPr>
-                              <a:rPr lang="en-US" sz="1900" b="0" i="1">
+                              <a:rPr lang="en-US" sz="1520" b="0" i="1">
                                 <a:latin typeface="Cambria Math" panose="02040503050406030204" pitchFamily="18" charset="0"/>
                               </a:rPr>
                             </m:ctrlPr>
                           </m:sSubPr>
                           <m:e>
                             <m:r>
-                              <a:rPr lang="en-US" sz="1900" b="0" i="1">
+                              <a:rPr lang="en-US" sz="1520" b="0" i="1">
                                 <a:latin typeface="Cambria Math" panose="02040503050406030204" pitchFamily="18" charset="0"/>
                               </a:rPr>
                               <m:t>𝜑</m:t>
@@ -4427,7 +4412,7 @@
                           </m:e>
                           <m:sub>
                             <m:r>
-                              <a:rPr lang="en-US" sz="1900" b="0" i="1">
+                              <a:rPr lang="en-US" sz="1520" b="0" i="1">
                                 <a:latin typeface="Cambria Math" panose="02040503050406030204" pitchFamily="18" charset="0"/>
                               </a:rPr>
                               <m:t>𝑘</m:t>
@@ -4435,19 +4420,19 @@
                           </m:sub>
                         </m:sSub>
                         <m:r>
-                          <a:rPr lang="en-US" sz="1900" b="0" i="1">
+                          <a:rPr lang="en-US" sz="1520" b="0" i="1">
                             <a:latin typeface="Cambria Math" panose="02040503050406030204" pitchFamily="18" charset="0"/>
                           </a:rPr>
                           <m:t>(</m:t>
                         </m:r>
                         <m:r>
-                          <a:rPr lang="en-US" sz="1900" b="0" i="1">
+                          <a:rPr lang="en-US" sz="1520" b="0" i="1">
                             <a:latin typeface="Cambria Math" panose="02040503050406030204" pitchFamily="18" charset="0"/>
                           </a:rPr>
                           <m:t>𝑡</m:t>
                         </m:r>
                         <m:r>
-                          <a:rPr lang="en-US" sz="1900" b="0" i="1">
+                          <a:rPr lang="en-US" sz="1520" b="0" i="1">
                             <a:latin typeface="Cambria Math" panose="02040503050406030204" pitchFamily="18" charset="0"/>
                           </a:rPr>
                           <m:t>)</m:t>
@@ -4456,7 +4441,7 @@
                     </m:nary>
                   </m:oMath>
                 </a14:m>
-                <a:endParaRPr lang="en-US" sz="1900"/>
+                <a:endParaRPr lang="en-US" sz="1520"/>
               </a:p>
               <a:p>
                 <a:pPr marL="0"/>
@@ -4465,14 +4450,14 @@
                     <m:sSub>
                       <m:sSubPr>
                         <m:ctrlPr>
-                          <a:rPr lang="en-US" sz="1900" i="1">
+                          <a:rPr lang="en-US" sz="1520" i="1">
                             <a:latin typeface="Cambria Math" panose="02040503050406030204" pitchFamily="18" charset="0"/>
                           </a:rPr>
                         </m:ctrlPr>
                       </m:sSubPr>
                       <m:e>
                         <m:r>
-                          <a:rPr lang="en-US" sz="1900" b="0" i="1">
+                          <a:rPr lang="en-US" sz="1520" b="0" i="1">
                             <a:latin typeface="Cambria Math" panose="02040503050406030204" pitchFamily="18" charset="0"/>
                           </a:rPr>
                           <m:t>𝑎</m:t>
@@ -4480,7 +4465,7 @@
                       </m:e>
                       <m:sub>
                         <m:r>
-                          <a:rPr lang="en-US" sz="1900" b="0" i="1">
+                          <a:rPr lang="en-US" sz="1520" b="0" i="1">
                             <a:latin typeface="Cambria Math" panose="02040503050406030204" pitchFamily="18" charset="0"/>
                           </a:rPr>
                           <m:t>𝑘</m:t>
@@ -4490,7 +4475,7 @@
                   </m:oMath>
                 </a14:m>
                 <a:r>
-                  <a:rPr lang="en-US" sz="1900"/>
+                  <a:rPr lang="en-US" sz="1520"/>
                   <a:t> are weights, </a:t>
                 </a:r>
               </a:p>
@@ -4501,14 +4486,14 @@
                     <m:sSub>
                       <m:sSubPr>
                         <m:ctrlPr>
-                          <a:rPr lang="en-US" sz="1900" i="1">
+                          <a:rPr lang="en-US" sz="1520" i="1">
                             <a:latin typeface="Cambria Math" panose="02040503050406030204" pitchFamily="18" charset="0"/>
                           </a:rPr>
                         </m:ctrlPr>
                       </m:sSubPr>
                       <m:e>
                         <m:r>
-                          <a:rPr lang="en-US" sz="1900" i="1">
+                          <a:rPr lang="en-US" sz="1520" i="1">
                             <a:latin typeface="Cambria Math" panose="02040503050406030204" pitchFamily="18" charset="0"/>
                           </a:rPr>
                           <m:t>𝜑</m:t>
@@ -4516,7 +4501,7 @@
                       </m:e>
                       <m:sub>
                         <m:r>
-                          <a:rPr lang="en-US" sz="1900" b="0" i="1">
+                          <a:rPr lang="en-US" sz="1520" b="0" i="1">
                             <a:latin typeface="Cambria Math" panose="02040503050406030204" pitchFamily="18" charset="0"/>
                           </a:rPr>
                           <m:t>𝑘</m:t>
@@ -4524,19 +4509,19 @@
                       </m:sub>
                     </m:sSub>
                     <m:r>
-                      <a:rPr lang="en-US" sz="1900" b="0" i="1">
+                      <a:rPr lang="en-US" sz="1520" b="0" i="1">
                         <a:latin typeface="Cambria Math" panose="02040503050406030204" pitchFamily="18" charset="0"/>
                       </a:rPr>
                       <m:t>(</m:t>
                     </m:r>
                     <m:r>
-                      <a:rPr lang="en-US" sz="1900" b="0" i="1">
+                      <a:rPr lang="en-US" sz="1520" b="0" i="1">
                         <a:latin typeface="Cambria Math" panose="02040503050406030204" pitchFamily="18" charset="0"/>
                       </a:rPr>
                       <m:t>𝑡</m:t>
                     </m:r>
                     <m:r>
-                      <a:rPr lang="en-US" sz="1900" b="0" i="1">
+                      <a:rPr lang="en-US" sz="1520" b="0" i="1">
                         <a:latin typeface="Cambria Math" panose="02040503050406030204" pitchFamily="18" charset="0"/>
                       </a:rPr>
                       <m:t>)</m:t>
@@ -4544,7 +4529,7 @@
                   </m:oMath>
                 </a14:m>
                 <a:r>
-                  <a:rPr lang="en-US" sz="1900"/>
+                  <a:rPr lang="en-US" sz="1520"/>
                   <a:t> are known functions. </a:t>
                 </a:r>
               </a:p>
@@ -4623,7 +4608,7 @@
         </p:blipFill>
         <p:spPr>
           <a:xfrm>
-            <a:off x="6307671" y="2670662"/>
+            <a:off x="6307671" y="3013562"/>
             <a:ext cx="4396307" cy="3334166"/>
           </a:xfrm>
           <a:prstGeom prst="rect">
@@ -4645,7 +4630,7 @@
         </p:nvSpPr>
         <p:spPr>
           <a:xfrm>
-            <a:off x="8942115" y="819150"/>
+            <a:off x="8942115" y="1162050"/>
             <a:ext cx="1592295" cy="369332"/>
           </a:xfrm>
           <a:prstGeom prst="rect">
@@ -4680,7 +4665,7 @@
         </p:nvSpPr>
         <p:spPr>
           <a:xfrm>
-            <a:off x="8972550" y="2095395"/>
+            <a:off x="8972550" y="2438295"/>
             <a:ext cx="2058897" cy="369332"/>
           </a:xfrm>
           <a:prstGeom prst="rect">
@@ -4703,30 +4688,202 @@
       </p:sp>
       <p:sp>
         <p:nvSpPr>
-          <p:cNvPr id="12" name="Slide Number Placeholder 11">
-            <a:extLst>
-              <a:ext uri="{FF2B5EF4-FFF2-40B4-BE49-F238E27FC236}">
-                <a16:creationId xmlns:a16="http://schemas.microsoft.com/office/drawing/2014/main" id="{D0E020E0-DC08-4B74-A522-E40FC9130F35}"/>
-              </a:ext>
-            </a:extLst>
-          </p:cNvPr>
+          <p:cNvPr id="14" name="DSPIRA 1"/>
           <p:cNvSpPr>
             <a:spLocks noGrp="1"/>
           </p:cNvSpPr>
-          <p:nvPr>
-            <p:ph type="sldNum" sz="quarter" idx="12"/>
-          </p:nvPr>
+          <p:nvPr/>
         </p:nvSpPr>
-        <p:spPr/>
+        <p:spPr>
+          <a:xfrm>
+            <a:off x="0" y="0"/>
+            <a:ext cx="12192000" cy="342900"/>
+          </a:xfrm>
+          <a:prstGeom prst="rect">
+            <a:avLst/>
+          </a:prstGeom>
+          <a:solidFill>
+            <a:srgbClr val="FFFFFF"/>
+          </a:solidFill>
+          <a:ln w="0">
+            <a:noFill/>
+          </a:ln>
+        </p:spPr>
+      </p:sp>
+      <p:sp>
+        <p:nvSpPr>
+          <p:cNvPr id="15" name="DSPIRA 2"/>
+          <p:cNvSpPr>
+            <a:spLocks noGrp="1"/>
+          </p:cNvSpPr>
+          <p:nvPr/>
+        </p:nvSpPr>
+        <p:spPr>
+          <a:xfrm>
+            <a:off x="0" y="7200900"/>
+            <a:ext cx="12192000" cy="342900"/>
+          </a:xfrm>
+          <a:prstGeom prst="rect">
+            <a:avLst/>
+          </a:prstGeom>
+          <a:solidFill>
+            <a:srgbClr val="FFFFFF"/>
+          </a:solidFill>
+          <a:ln w="0">
+            <a:noFill/>
+          </a:ln>
+        </p:spPr>
+      </p:sp>
+      <p:sp>
+        <p:nvSpPr>
+          <p:cNvPr id="16" name="DSPIRA 3"/>
+          <p:cNvSpPr>
+            <a:spLocks noGrp="1"/>
+          </p:cNvSpPr>
+          <p:nvPr/>
+        </p:nvSpPr>
+        <p:spPr>
+          <a:xfrm>
+            <a:off x="228600" y="76200"/>
+            <a:ext cx="4762500" cy="228600"/>
+          </a:xfrm>
+          <a:prstGeom prst="rect">
+            <a:avLst/>
+          </a:prstGeom>
+          <a:noFill/>
+          <a:ln w="0">
+            <a:noFill/>
+          </a:ln>
+        </p:spPr>
         <p:txBody>
-          <a:bodyPr/>
+          <a:bodyPr>
+            <a:noAutofit/>
+          </a:bodyPr>
           <a:lstStyle/>
           <a:p>
-            <a:fld id="{6CB4759B-89EF-486F-A495-36988C5D6AB8}" type="slidenum">
-              <a:rPr lang="en-US" smtClean="0"/>
-              <a:t>2</a:t>
-            </a:fld>
-            <a:endParaRPr lang="en-US"/>
+            <a:pPr>
+              <a:defRPr sz="1200" b="1">
+                <a:solidFill>
+                  <a:srgbClr val="002855"/>
+                </a:solidFill>
+                <a:latin typeface="Arial"/>
+                <a:ea typeface="Arial"/>
+                <a:cs typeface="Arial"/>
+              </a:defRPr>
+            </a:pPr>
+            <a:r>
+              <a:rPr sz="1200" b="1">
+                <a:solidFill>
+                  <a:srgbClr val="002855"/>
+                </a:solidFill>
+                <a:latin typeface="Arial"/>
+                <a:ea typeface="Arial"/>
+                <a:cs typeface="Arial"/>
+              </a:rPr>
+              <a:t>WVU DSPIRA</a:t>
+            </a:r>
+          </a:p>
+        </p:txBody>
+      </p:sp>
+      <p:sp>
+        <p:nvSpPr>
+          <p:cNvPr id="17" name="DSPIRA 4"/>
+          <p:cNvSpPr>
+            <a:spLocks noGrp="1"/>
+          </p:cNvSpPr>
+          <p:nvPr/>
+        </p:nvSpPr>
+        <p:spPr>
+          <a:xfrm>
+            <a:off x="228600" y="7277100"/>
+            <a:ext cx="6667500" cy="228600"/>
+          </a:xfrm>
+          <a:prstGeom prst="rect">
+            <a:avLst/>
+          </a:prstGeom>
+          <a:noFill/>
+          <a:ln w="0">
+            <a:noFill/>
+          </a:ln>
+        </p:spPr>
+        <p:txBody>
+          <a:bodyPr>
+            <a:noAutofit/>
+          </a:bodyPr>
+          <a:lstStyle/>
+          <a:p>
+            <a:pPr>
+              <a:defRPr sz="900" b="0">
+                <a:solidFill>
+                  <a:srgbClr val="002855"/>
+                </a:solidFill>
+                <a:latin typeface="Arial"/>
+                <a:ea typeface="Arial"/>
+                <a:cs typeface="Arial"/>
+              </a:defRPr>
+            </a:pPr>
+            <a:r>
+              <a:rPr sz="900" b="0">
+                <a:solidFill>
+                  <a:srgbClr val="002855"/>
+                </a:solidFill>
+                <a:latin typeface="Arial"/>
+                <a:ea typeface="Arial"/>
+                <a:cs typeface="Arial"/>
+              </a:rPr>
+              <a:t>wvurail.org/dspira</a:t>
+            </a:r>
+          </a:p>
+        </p:txBody>
+      </p:sp>
+      <p:sp>
+        <p:nvSpPr>
+          <p:cNvPr id="18" name="DSPIRA 5"/>
+          <p:cNvSpPr>
+            <a:spLocks noGrp="1"/>
+          </p:cNvSpPr>
+          <p:nvPr/>
+        </p:nvSpPr>
+        <p:spPr>
+          <a:xfrm>
+            <a:off x="11191875" y="7277100"/>
+            <a:ext cx="762000" cy="228600"/>
+          </a:xfrm>
+          <a:prstGeom prst="rect">
+            <a:avLst/>
+          </a:prstGeom>
+          <a:noFill/>
+          <a:ln w="0">
+            <a:noFill/>
+          </a:ln>
+        </p:spPr>
+        <p:txBody>
+          <a:bodyPr>
+            <a:noAutofit/>
+          </a:bodyPr>
+          <a:lstStyle/>
+          <a:p>
+            <a:pPr>
+              <a:defRPr sz="900" b="0">
+                <a:solidFill>
+                  <a:srgbClr val="002855"/>
+                </a:solidFill>
+                <a:latin typeface="Arial"/>
+                <a:ea typeface="Arial"/>
+                <a:cs typeface="Arial"/>
+              </a:defRPr>
+            </a:pPr>
+            <a:r>
+              <a:rPr sz="900" b="0">
+                <a:solidFill>
+                  <a:srgbClr val="002855"/>
+                </a:solidFill>
+                <a:latin typeface="Arial"/>
+                <a:ea typeface="Arial"/>
+                <a:cs typeface="Arial"/>
+              </a:rPr>
+              <a:t>2 of 7</a:t>
+            </a:r>
           </a:p>
         </p:txBody>
       </p:sp>
@@ -4834,7 +4991,7 @@
                     </m:oMathParaPr>
                     <m:oMath xmlns:m="http://schemas.openxmlformats.org/officeDocument/2006/math">
                       <m:r>
-                        <a:rPr lang="en-US" sz="2600" b="0" i="1" smtClean="0">
+                        <a:rPr lang="en-US" sz="2080" b="0" i="1" smtClean="0">
                           <a:latin typeface="Cambria Math" panose="02040503050406030204" pitchFamily="18" charset="0"/>
                         </a:rPr>
                         <m:t>𝑥</m:t>
@@ -4842,14 +4999,14 @@
                       <m:d>
                         <m:dPr>
                           <m:ctrlPr>
-                            <a:rPr lang="en-US" sz="2600" b="0" i="1" smtClean="0">
+                            <a:rPr lang="en-US" sz="2080" b="0" i="1" smtClean="0">
                               <a:latin typeface="Cambria Math" panose="02040503050406030204" pitchFamily="18" charset="0"/>
                             </a:rPr>
                           </m:ctrlPr>
                         </m:dPr>
                         <m:e>
                           <m:r>
-                            <a:rPr lang="en-US" sz="2600" b="0" i="1" smtClean="0">
+                            <a:rPr lang="en-US" sz="2080" b="0" i="1" smtClean="0">
                               <a:latin typeface="Cambria Math" panose="02040503050406030204" pitchFamily="18" charset="0"/>
                             </a:rPr>
                             <m:t>𝑡</m:t>
@@ -4857,7 +5014,7 @@
                         </m:e>
                       </m:d>
                       <m:r>
-                        <a:rPr lang="en-US" sz="2600" b="0" i="1" smtClean="0">
+                        <a:rPr lang="en-US" sz="2080" b="0" i="1" smtClean="0">
                           <a:latin typeface="Cambria Math" panose="02040503050406030204" pitchFamily="18" charset="0"/>
                         </a:rPr>
                         <m:t>=</m:t>
@@ -4865,14 +5022,14 @@
                       <m:sSub>
                         <m:sSubPr>
                           <m:ctrlPr>
-                            <a:rPr lang="en-US" sz="2600" b="0" i="1" smtClean="0">
+                            <a:rPr lang="en-US" sz="2080" b="0" i="1" smtClean="0">
                               <a:latin typeface="Cambria Math" panose="02040503050406030204" pitchFamily="18" charset="0"/>
                             </a:rPr>
                           </m:ctrlPr>
                         </m:sSubPr>
                         <m:e>
                           <m:r>
-                            <a:rPr lang="en-US" sz="2600" b="0" i="1" smtClean="0">
+                            <a:rPr lang="en-US" sz="2080" b="0" i="1" smtClean="0">
                               <a:latin typeface="Cambria Math" panose="02040503050406030204" pitchFamily="18" charset="0"/>
                             </a:rPr>
                             <m:t>𝑏</m:t>
@@ -4880,7 +5037,7 @@
                         </m:e>
                         <m:sub>
                           <m:r>
-                            <a:rPr lang="en-US" sz="2600" b="0" i="1" smtClean="0">
+                            <a:rPr lang="en-US" sz="2080" b="0" i="1" smtClean="0">
                               <a:latin typeface="Cambria Math" panose="02040503050406030204" pitchFamily="18" charset="0"/>
                             </a:rPr>
                             <m:t>0</m:t>
@@ -4888,7 +5045,7 @@
                         </m:sub>
                       </m:sSub>
                       <m:r>
-                        <a:rPr lang="en-US" sz="2600" b="0" i="1" smtClean="0">
+                        <a:rPr lang="en-US" sz="2080" b="0" i="1" smtClean="0">
                           <a:latin typeface="Cambria Math" panose="02040503050406030204" pitchFamily="18" charset="0"/>
                         </a:rPr>
                         <m:t>+</m:t>
@@ -4897,7 +5054,7 @@
                         <m:naryPr>
                           <m:chr m:val="∑"/>
                           <m:ctrlPr>
-                            <a:rPr lang="en-US" sz="2600" b="0" i="1" smtClean="0">
+                            <a:rPr lang="en-US" sz="2080" b="0" i="1" smtClean="0">
                               <a:latin typeface="Cambria Math" panose="02040503050406030204" pitchFamily="18" charset="0"/>
                             </a:rPr>
                           </m:ctrlPr>
@@ -4907,13 +5064,13 @@
                             <m:rPr>
                               <m:brk m:alnAt="23"/>
                             </m:rPr>
-                            <a:rPr lang="en-US" sz="2600" b="0" i="1" smtClean="0">
+                            <a:rPr lang="en-US" sz="2080" b="0" i="1" smtClean="0">
                               <a:latin typeface="Cambria Math" panose="02040503050406030204" pitchFamily="18" charset="0"/>
                             </a:rPr>
                             <m:t>𝑘</m:t>
                           </m:r>
                           <m:r>
-                            <a:rPr lang="en-US" sz="2600" b="0" i="1" smtClean="0">
+                            <a:rPr lang="en-US" sz="2080" b="0" i="1" smtClean="0">
                               <a:latin typeface="Cambria Math" panose="02040503050406030204" pitchFamily="18" charset="0"/>
                             </a:rPr>
                             <m:t>=1</m:t>
@@ -4921,13 +5078,13 @@
                         </m:sub>
                         <m:sup>
                           <m:r>
-                            <a:rPr lang="en-US" sz="2600" b="0" i="1" smtClean="0">
+                            <a:rPr lang="en-US" sz="2080" b="0" i="1" smtClean="0">
                               <a:latin typeface="Cambria Math" panose="02040503050406030204" pitchFamily="18" charset="0"/>
                             </a:rPr>
                             <m:t>+</m:t>
                           </m:r>
                           <m:r>
-                            <a:rPr lang="en-US" sz="2600" b="0" i="1" smtClean="0">
+                            <a:rPr lang="en-US" sz="2080" b="0" i="1" smtClean="0">
                               <a:latin typeface="Cambria Math" panose="02040503050406030204" pitchFamily="18" charset="0"/>
                               <a:ea typeface="Cambria Math" panose="02040503050406030204" pitchFamily="18" charset="0"/>
                             </a:rPr>
@@ -4938,14 +5095,14 @@
                           <m:sSub>
                             <m:sSubPr>
                               <m:ctrlPr>
-                                <a:rPr lang="en-US" sz="2600" b="0" i="1" smtClean="0">
+                                <a:rPr lang="en-US" sz="2080" b="0" i="1" smtClean="0">
                                   <a:latin typeface="Cambria Math" panose="02040503050406030204" pitchFamily="18" charset="0"/>
                                 </a:rPr>
                               </m:ctrlPr>
                             </m:sSubPr>
                             <m:e>
                               <m:r>
-                                <a:rPr lang="en-US" sz="2600" b="0" i="1" smtClean="0">
+                                <a:rPr lang="en-US" sz="2080" b="0" i="1" smtClean="0">
                                   <a:latin typeface="Cambria Math" panose="02040503050406030204" pitchFamily="18" charset="0"/>
                                 </a:rPr>
                                 <m:t>𝑏</m:t>
@@ -4953,7 +5110,7 @@
                             </m:e>
                             <m:sub>
                               <m:r>
-                                <a:rPr lang="en-US" sz="2600" b="0" i="1" smtClean="0">
+                                <a:rPr lang="en-US" sz="2080" b="0" i="1" smtClean="0">
                                   <a:latin typeface="Cambria Math" panose="02040503050406030204" pitchFamily="18" charset="0"/>
                                 </a:rPr>
                                 <m:t>𝑘</m:t>
@@ -4964,13 +5121,13 @@
                             <m:rPr>
                               <m:sty m:val="p"/>
                             </m:rPr>
-                            <a:rPr lang="en-US" sz="2600" b="0" i="0" smtClean="0">
+                            <a:rPr lang="en-US" sz="2080" b="0" i="0" smtClean="0">
                               <a:latin typeface="Cambria Math" panose="02040503050406030204" pitchFamily="18" charset="0"/>
                             </a:rPr>
                             <m:t>cos</m:t>
                           </m:r>
                           <m:r>
-                            <a:rPr lang="en-US" sz="2600" b="0" i="1" smtClean="0">
+                            <a:rPr lang="en-US" sz="2080" b="0" i="1" smtClean="0">
                               <a:latin typeface="Cambria Math" panose="02040503050406030204" pitchFamily="18" charset="0"/>
                             </a:rPr>
                             <m:t>⁡(</m:t>
@@ -4978,14 +5135,14 @@
                           <m:sSub>
                             <m:sSubPr>
                               <m:ctrlPr>
-                                <a:rPr lang="en-US" sz="2600" b="0" i="1" smtClean="0">
+                                <a:rPr lang="en-US" sz="2080" b="0" i="1" smtClean="0">
                                   <a:latin typeface="Cambria Math" panose="02040503050406030204" pitchFamily="18" charset="0"/>
                                 </a:rPr>
                               </m:ctrlPr>
                             </m:sSubPr>
                             <m:e>
                               <m:r>
-                                <a:rPr lang="en-US" sz="2600" b="0" i="1" smtClean="0">
+                                <a:rPr lang="en-US" sz="2080" b="0" i="1" smtClean="0">
                                   <a:latin typeface="Cambria Math" panose="02040503050406030204" pitchFamily="18" charset="0"/>
                                   <a:ea typeface="Cambria Math" panose="02040503050406030204" pitchFamily="18" charset="0"/>
                                 </a:rPr>
@@ -4994,7 +5151,7 @@
                             </m:e>
                             <m:sub>
                               <m:r>
-                                <a:rPr lang="en-US" sz="2600" b="0" i="1" smtClean="0">
+                                <a:rPr lang="en-US" sz="2080" b="0" i="1" smtClean="0">
                                   <a:latin typeface="Cambria Math" panose="02040503050406030204" pitchFamily="18" charset="0"/>
                                 </a:rPr>
                                 <m:t>0</m:t>
@@ -5002,13 +5159,13 @@
                             </m:sub>
                           </m:sSub>
                           <m:r>
-                            <a:rPr lang="en-US" sz="2600" b="0" i="1" smtClean="0">
+                            <a:rPr lang="en-US" sz="2080" b="0" i="1" smtClean="0">
                               <a:latin typeface="Cambria Math" panose="02040503050406030204" pitchFamily="18" charset="0"/>
                             </a:rPr>
                             <m:t>𝑘𝑡</m:t>
                           </m:r>
                           <m:r>
-                            <a:rPr lang="en-US" sz="2600" b="0" i="1" smtClean="0">
+                            <a:rPr lang="en-US" sz="2080" b="0" i="1" smtClean="0">
                               <a:latin typeface="Cambria Math" panose="02040503050406030204" pitchFamily="18" charset="0"/>
                             </a:rPr>
                             <m:t>)</m:t>
@@ -5016,7 +5173,7 @@
                         </m:e>
                       </m:nary>
                       <m:r>
-                        <a:rPr lang="en-US" sz="2600" b="0" i="1" smtClean="0">
+                        <a:rPr lang="en-US" sz="2080" b="0" i="1" smtClean="0">
                           <a:latin typeface="Cambria Math" panose="02040503050406030204" pitchFamily="18" charset="0"/>
                         </a:rPr>
                         <m:t>+</m:t>
@@ -5025,7 +5182,7 @@
                         <m:naryPr>
                           <m:chr m:val="∑"/>
                           <m:ctrlPr>
-                            <a:rPr lang="en-US" sz="2600" b="0" i="1" smtClean="0">
+                            <a:rPr lang="en-US" sz="2080" b="0" i="1" smtClean="0">
                               <a:latin typeface="Cambria Math" panose="02040503050406030204" pitchFamily="18" charset="0"/>
                             </a:rPr>
                           </m:ctrlPr>
@@ -5035,13 +5192,13 @@
                             <m:rPr>
                               <m:brk m:alnAt="23"/>
                             </m:rPr>
-                            <a:rPr lang="en-US" sz="2600" b="0" i="1" smtClean="0">
+                            <a:rPr lang="en-US" sz="2080" b="0" i="1" smtClean="0">
                               <a:latin typeface="Cambria Math" panose="02040503050406030204" pitchFamily="18" charset="0"/>
                             </a:rPr>
                             <m:t>𝑘</m:t>
                           </m:r>
                           <m:r>
-                            <a:rPr lang="en-US" sz="2600" b="0" i="1" smtClean="0">
+                            <a:rPr lang="en-US" sz="2080" b="0" i="1" smtClean="0">
                               <a:latin typeface="Cambria Math" panose="02040503050406030204" pitchFamily="18" charset="0"/>
                             </a:rPr>
                             <m:t>=1</m:t>
@@ -5049,7 +5206,7 @@
                         </m:sub>
                         <m:sup>
                           <m:r>
-                            <a:rPr lang="en-US" sz="2600" b="0" i="1" smtClean="0">
+                            <a:rPr lang="en-US" sz="2080" b="0" i="1" smtClean="0">
                               <a:latin typeface="Cambria Math" panose="02040503050406030204" pitchFamily="18" charset="0"/>
                               <a:ea typeface="Cambria Math" panose="02040503050406030204" pitchFamily="18" charset="0"/>
                             </a:rPr>
@@ -5060,14 +5217,14 @@
                           <m:sSub>
                             <m:sSubPr>
                               <m:ctrlPr>
-                                <a:rPr lang="en-US" sz="2600" i="1">
+                                <a:rPr lang="en-US" sz="2080" i="1">
                                   <a:latin typeface="Cambria Math" panose="02040503050406030204" pitchFamily="18" charset="0"/>
                                 </a:rPr>
                               </m:ctrlPr>
                             </m:sSubPr>
                             <m:e>
                               <m:r>
-                                <a:rPr lang="en-US" sz="2600" b="0" i="1" smtClean="0">
+                                <a:rPr lang="en-US" sz="2080" b="0" i="1" smtClean="0">
                                   <a:latin typeface="Cambria Math" panose="02040503050406030204" pitchFamily="18" charset="0"/>
                                 </a:rPr>
                                 <m:t>𝑐</m:t>
@@ -5075,7 +5232,7 @@
                             </m:e>
                             <m:sub>
                               <m:r>
-                                <a:rPr lang="en-US" sz="2600" i="1">
+                                <a:rPr lang="en-US" sz="2080" i="1">
                                   <a:latin typeface="Cambria Math" panose="02040503050406030204" pitchFamily="18" charset="0"/>
                                 </a:rPr>
                                 <m:t>𝑘</m:t>
@@ -5086,13 +5243,13 @@
                             <m:rPr>
                               <m:sty m:val="p"/>
                             </m:rPr>
-                            <a:rPr lang="en-US" sz="2600" b="0" i="0" smtClean="0">
+                            <a:rPr lang="en-US" sz="2080" b="0" i="0" smtClean="0">
                               <a:latin typeface="Cambria Math" panose="02040503050406030204" pitchFamily="18" charset="0"/>
                             </a:rPr>
                             <m:t>sin</m:t>
                           </m:r>
                           <m:r>
-                            <a:rPr lang="en-US" sz="2600" i="1">
+                            <a:rPr lang="en-US" sz="2080" i="1">
                               <a:latin typeface="Cambria Math" panose="02040503050406030204" pitchFamily="18" charset="0"/>
                             </a:rPr>
                             <m:t>(</m:t>
@@ -5100,14 +5257,14 @@
                           <m:sSub>
                             <m:sSubPr>
                               <m:ctrlPr>
-                                <a:rPr lang="en-US" sz="2600" i="1">
+                                <a:rPr lang="en-US" sz="2080" i="1">
                                   <a:latin typeface="Cambria Math" panose="02040503050406030204" pitchFamily="18" charset="0"/>
                                 </a:rPr>
                               </m:ctrlPr>
                             </m:sSubPr>
                             <m:e>
                               <m:r>
-                                <a:rPr lang="en-US" sz="2600" i="1">
+                                <a:rPr lang="en-US" sz="2080" i="1">
                                   <a:latin typeface="Cambria Math" panose="02040503050406030204" pitchFamily="18" charset="0"/>
                                   <a:ea typeface="Cambria Math" panose="02040503050406030204" pitchFamily="18" charset="0"/>
                                 </a:rPr>
@@ -5116,7 +5273,7 @@
                             </m:e>
                             <m:sub>
                               <m:r>
-                                <a:rPr lang="en-US" sz="2600" i="1">
+                                <a:rPr lang="en-US" sz="2080" i="1">
                                   <a:latin typeface="Cambria Math" panose="02040503050406030204" pitchFamily="18" charset="0"/>
                                 </a:rPr>
                                 <m:t>0</m:t>
@@ -5124,19 +5281,19 @@
                             </m:sub>
                           </m:sSub>
                           <m:r>
-                            <a:rPr lang="en-US" sz="2600" i="1">
+                            <a:rPr lang="en-US" sz="2080" i="1">
                               <a:latin typeface="Cambria Math" panose="02040503050406030204" pitchFamily="18" charset="0"/>
                             </a:rPr>
                             <m:t>𝑘</m:t>
                           </m:r>
                           <m:r>
-                            <a:rPr lang="en-US" sz="2600" b="0" i="1" smtClean="0">
+                            <a:rPr lang="en-US" sz="2080" b="0" i="1" smtClean="0">
                               <a:latin typeface="Cambria Math" panose="02040503050406030204" pitchFamily="18" charset="0"/>
                             </a:rPr>
                             <m:t>𝑡</m:t>
                           </m:r>
                           <m:r>
-                            <a:rPr lang="en-US" sz="2600" b="0" i="1" smtClean="0">
+                            <a:rPr lang="en-US" sz="2080" b="0" i="1" smtClean="0">
                               <a:latin typeface="Cambria Math" panose="02040503050406030204" pitchFamily="18" charset="0"/>
                             </a:rPr>
                             <m:t>)</m:t>
@@ -5146,7 +5303,7 @@
                     </m:oMath>
                   </m:oMathPara>
                 </a14:m>
-                <a:endParaRPr lang="en-US" sz="2600" dirty="0"/>
+                <a:endParaRPr lang="en-US" sz="2080" dirty="0"/>
               </a:p>
               <a:p>
                 <a:pPr marL="0" indent="0">
@@ -5161,14 +5318,14 @@
                       <m:sSub>
                         <m:sSubPr>
                           <m:ctrlPr>
-                            <a:rPr lang="en-US" sz="2600" i="1" smtClean="0">
+                            <a:rPr lang="en-US" sz="2080" i="1" smtClean="0">
                               <a:latin typeface="Cambria Math" panose="02040503050406030204" pitchFamily="18" charset="0"/>
                             </a:rPr>
                           </m:ctrlPr>
                         </m:sSubPr>
                         <m:e>
                           <m:r>
-                            <a:rPr lang="en-US" sz="2600" b="0" i="1" smtClean="0">
+                            <a:rPr lang="en-US" sz="2080" b="0" i="1" smtClean="0">
                               <a:latin typeface="Cambria Math" panose="02040503050406030204" pitchFamily="18" charset="0"/>
                             </a:rPr>
                             <m:t>𝑏</m:t>
@@ -5176,7 +5333,7 @@
                         </m:e>
                         <m:sub>
                           <m:r>
-                            <a:rPr lang="en-US" sz="2600" b="0" i="1" smtClean="0">
+                            <a:rPr lang="en-US" sz="2080" b="0" i="1" smtClean="0">
                               <a:latin typeface="Cambria Math" panose="02040503050406030204" pitchFamily="18" charset="0"/>
                             </a:rPr>
                             <m:t>𝑘</m:t>
@@ -5184,7 +5341,7 @@
                         </m:sub>
                       </m:sSub>
                       <m:r>
-                        <a:rPr lang="en-US" sz="2600" b="0" i="1" smtClean="0">
+                        <a:rPr lang="en-US" sz="2080" b="0" i="1" smtClean="0">
                           <a:latin typeface="Cambria Math" panose="02040503050406030204" pitchFamily="18" charset="0"/>
                         </a:rPr>
                         <m:t>=</m:t>
@@ -5192,14 +5349,14 @@
                       <m:f>
                         <m:fPr>
                           <m:ctrlPr>
-                            <a:rPr lang="en-US" sz="2600" b="0" i="1" smtClean="0">
+                            <a:rPr lang="en-US" sz="2080" b="0" i="1" smtClean="0">
                               <a:latin typeface="Cambria Math" panose="02040503050406030204" pitchFamily="18" charset="0"/>
                             </a:rPr>
                           </m:ctrlPr>
                         </m:fPr>
                         <m:num>
                           <m:r>
-                            <a:rPr lang="en-US" sz="2600" b="0" i="1" smtClean="0">
+                            <a:rPr lang="en-US" sz="2080" b="0" i="1" smtClean="0">
                               <a:latin typeface="Cambria Math" panose="02040503050406030204" pitchFamily="18" charset="0"/>
                             </a:rPr>
                             <m:t>2</m:t>
@@ -5209,14 +5366,14 @@
                           <m:sSub>
                             <m:sSubPr>
                               <m:ctrlPr>
-                                <a:rPr lang="en-US" sz="2600" b="0" i="1" smtClean="0">
+                                <a:rPr lang="en-US" sz="2080" b="0" i="1" smtClean="0">
                                   <a:latin typeface="Cambria Math" panose="02040503050406030204" pitchFamily="18" charset="0"/>
                                 </a:rPr>
                               </m:ctrlPr>
                             </m:sSubPr>
                             <m:e>
                               <m:r>
-                                <a:rPr lang="en-US" sz="2600" b="0" i="1" smtClean="0">
+                                <a:rPr lang="en-US" sz="2080" b="0" i="1" smtClean="0">
                                   <a:latin typeface="Cambria Math" panose="02040503050406030204" pitchFamily="18" charset="0"/>
                                 </a:rPr>
                                 <m:t>𝑇</m:t>
@@ -5224,7 +5381,7 @@
                             </m:e>
                             <m:sub>
                               <m:r>
-                                <a:rPr lang="en-US" sz="2600" b="0" i="1" smtClean="0">
+                                <a:rPr lang="en-US" sz="2080" b="0" i="1" smtClean="0">
                                   <a:latin typeface="Cambria Math" panose="02040503050406030204" pitchFamily="18" charset="0"/>
                                 </a:rPr>
                                 <m:t>0</m:t>
@@ -5237,7 +5394,7 @@
                         <m:naryPr>
                           <m:limLoc m:val="undOvr"/>
                           <m:ctrlPr>
-                            <a:rPr lang="en-US" sz="2600" b="0" i="1" smtClean="0">
+                            <a:rPr lang="en-US" sz="2080" b="0" i="1" smtClean="0">
                               <a:latin typeface="Cambria Math" panose="02040503050406030204" pitchFamily="18" charset="0"/>
                             </a:rPr>
                           </m:ctrlPr>
@@ -5246,14 +5403,14 @@
                           <m:sSub>
                             <m:sSubPr>
                               <m:ctrlPr>
-                                <a:rPr lang="en-US" sz="2600" b="0" i="1" smtClean="0">
+                                <a:rPr lang="en-US" sz="2080" b="0" i="1" smtClean="0">
                                   <a:latin typeface="Cambria Math" panose="02040503050406030204" pitchFamily="18" charset="0"/>
                                 </a:rPr>
                               </m:ctrlPr>
                             </m:sSubPr>
                             <m:e>
                               <m:r>
-                                <a:rPr lang="en-US" sz="2600" b="0" i="1" smtClean="0">
+                                <a:rPr lang="en-US" sz="2080" b="0" i="1" smtClean="0">
                                   <a:latin typeface="Cambria Math" panose="02040503050406030204" pitchFamily="18" charset="0"/>
                                 </a:rPr>
                                 <m:t>𝑡</m:t>
@@ -5261,7 +5418,7 @@
                             </m:e>
                             <m:sub>
                               <m:r>
-                                <a:rPr lang="en-US" sz="2600" b="0" i="1" smtClean="0">
+                                <a:rPr lang="en-US" sz="2080" b="0" i="1" smtClean="0">
                                   <a:latin typeface="Cambria Math" panose="02040503050406030204" pitchFamily="18" charset="0"/>
                                 </a:rPr>
                                 <m:t>0</m:t>
@@ -5273,14 +5430,14 @@
                           <m:sSub>
                             <m:sSubPr>
                               <m:ctrlPr>
-                                <a:rPr lang="en-US" sz="2600" b="0" i="1" smtClean="0">
+                                <a:rPr lang="en-US" sz="2080" b="0" i="1" smtClean="0">
                                   <a:latin typeface="Cambria Math" panose="02040503050406030204" pitchFamily="18" charset="0"/>
                                 </a:rPr>
                               </m:ctrlPr>
                             </m:sSubPr>
                             <m:e>
                               <m:r>
-                                <a:rPr lang="en-US" sz="2600" b="0" i="1" smtClean="0">
+                                <a:rPr lang="en-US" sz="2080" b="0" i="1" smtClean="0">
                                   <a:latin typeface="Cambria Math" panose="02040503050406030204" pitchFamily="18" charset="0"/>
                                 </a:rPr>
                                 <m:t>𝑡</m:t>
@@ -5288,7 +5445,7 @@
                             </m:e>
                             <m:sub>
                               <m:r>
-                                <a:rPr lang="en-US" sz="2600" b="0" i="1" smtClean="0">
+                                <a:rPr lang="en-US" sz="2080" b="0" i="1" smtClean="0">
                                   <a:latin typeface="Cambria Math" panose="02040503050406030204" pitchFamily="18" charset="0"/>
                                 </a:rPr>
                                 <m:t>0</m:t>
@@ -5296,7 +5453,7 @@
                             </m:sub>
                           </m:sSub>
                           <m:r>
-                            <a:rPr lang="en-US" sz="2600" b="0" i="1" smtClean="0">
+                            <a:rPr lang="en-US" sz="2080" b="0" i="1" smtClean="0">
                               <a:latin typeface="Cambria Math" panose="02040503050406030204" pitchFamily="18" charset="0"/>
                             </a:rPr>
                             <m:t>+</m:t>
@@ -5304,14 +5461,14 @@
                           <m:sSub>
                             <m:sSubPr>
                               <m:ctrlPr>
-                                <a:rPr lang="en-US" sz="2600" b="0" i="1" smtClean="0">
+                                <a:rPr lang="en-US" sz="2080" b="0" i="1" smtClean="0">
                                   <a:latin typeface="Cambria Math" panose="02040503050406030204" pitchFamily="18" charset="0"/>
                                 </a:rPr>
                               </m:ctrlPr>
                             </m:sSubPr>
                             <m:e>
                               <m:r>
-                                <a:rPr lang="en-US" sz="2600" b="0" i="1" smtClean="0">
+                                <a:rPr lang="en-US" sz="2080" b="0" i="1" smtClean="0">
                                   <a:latin typeface="Cambria Math" panose="02040503050406030204" pitchFamily="18" charset="0"/>
                                 </a:rPr>
                                 <m:t>𝑇</m:t>
@@ -5319,7 +5476,7 @@
                             </m:e>
                             <m:sub>
                               <m:r>
-                                <a:rPr lang="en-US" sz="2600" b="0" i="1" smtClean="0">
+                                <a:rPr lang="en-US" sz="2080" b="0" i="1" smtClean="0">
                                   <a:latin typeface="Cambria Math" panose="02040503050406030204" pitchFamily="18" charset="0"/>
                                 </a:rPr>
                                 <m:t>0</m:t>
@@ -5329,7 +5486,7 @@
                         </m:sup>
                         <m:e>
                           <m:r>
-                            <a:rPr lang="en-US" sz="2600" b="0" i="1" smtClean="0">
+                            <a:rPr lang="en-US" sz="2080" b="0" i="1" smtClean="0">
                               <a:latin typeface="Cambria Math" panose="02040503050406030204" pitchFamily="18" charset="0"/>
                             </a:rPr>
                             <m:t>𝑥</m:t>
@@ -5337,14 +5494,14 @@
                           <m:d>
                             <m:dPr>
                               <m:ctrlPr>
-                                <a:rPr lang="en-US" sz="2600" b="0" i="1" smtClean="0">
+                                <a:rPr lang="en-US" sz="2080" b="0" i="1" smtClean="0">
                                   <a:latin typeface="Cambria Math" panose="02040503050406030204" pitchFamily="18" charset="0"/>
                                 </a:rPr>
                               </m:ctrlPr>
                             </m:dPr>
                             <m:e>
                               <m:r>
-                                <a:rPr lang="en-US" sz="2600" b="0" i="1" smtClean="0">
+                                <a:rPr lang="en-US" sz="2080" b="0" i="1" smtClean="0">
                                   <a:latin typeface="Cambria Math" panose="02040503050406030204" pitchFamily="18" charset="0"/>
                                 </a:rPr>
                                 <m:t>𝑡</m:t>
@@ -5354,7 +5511,7 @@
                           <m:func>
                             <m:funcPr>
                               <m:ctrlPr>
-                                <a:rPr lang="en-US" sz="2600" b="0" i="1" smtClean="0">
+                                <a:rPr lang="en-US" sz="2080" b="0" i="1" smtClean="0">
                                   <a:latin typeface="Cambria Math" panose="02040503050406030204" pitchFamily="18" charset="0"/>
                                 </a:rPr>
                               </m:ctrlPr>
@@ -5364,7 +5521,7 @@
                                 <m:rPr>
                                   <m:sty m:val="p"/>
                                 </m:rPr>
-                                <a:rPr lang="en-US" sz="2600" b="0" i="0" smtClean="0">
+                                <a:rPr lang="en-US" sz="2080" b="0" i="0" smtClean="0">
                                   <a:latin typeface="Cambria Math" panose="02040503050406030204" pitchFamily="18" charset="0"/>
                                 </a:rPr>
                                 <m:t>cos</m:t>
@@ -5374,7 +5531,7 @@
                               <m:d>
                                 <m:dPr>
                                   <m:ctrlPr>
-                                    <a:rPr lang="en-US" sz="2600" b="0" i="1" smtClean="0">
+                                    <a:rPr lang="en-US" sz="2080" b="0" i="1" smtClean="0">
                                       <a:latin typeface="Cambria Math" panose="02040503050406030204" pitchFamily="18" charset="0"/>
                                     </a:rPr>
                                   </m:ctrlPr>
@@ -5383,14 +5540,14 @@
                                   <m:sSub>
                                     <m:sSubPr>
                                       <m:ctrlPr>
-                                        <a:rPr lang="en-US" sz="2600" b="0" i="1" smtClean="0">
+                                        <a:rPr lang="en-US" sz="2080" b="0" i="1" smtClean="0">
                                           <a:latin typeface="Cambria Math" panose="02040503050406030204" pitchFamily="18" charset="0"/>
                                         </a:rPr>
                                       </m:ctrlPr>
                                     </m:sSubPr>
                                     <m:e>
                                       <m:r>
-                                        <a:rPr lang="en-US" sz="2600" b="0" i="1" smtClean="0">
+                                        <a:rPr lang="en-US" sz="2080" b="0" i="1" smtClean="0">
                                           <a:latin typeface="Cambria Math" panose="02040503050406030204" pitchFamily="18" charset="0"/>
                                           <a:ea typeface="Cambria Math" panose="02040503050406030204" pitchFamily="18" charset="0"/>
                                         </a:rPr>
@@ -5399,7 +5556,7 @@
                                     </m:e>
                                     <m:sub>
                                       <m:r>
-                                        <a:rPr lang="en-US" sz="2600" b="0" i="1" smtClean="0">
+                                        <a:rPr lang="en-US" sz="2080" b="0" i="1" smtClean="0">
                                           <a:latin typeface="Cambria Math" panose="02040503050406030204" pitchFamily="18" charset="0"/>
                                         </a:rPr>
                                         <m:t>0</m:t>
@@ -5407,7 +5564,7 @@
                                     </m:sub>
                                   </m:sSub>
                                   <m:r>
-                                    <a:rPr lang="en-US" sz="2600" b="0" i="1" smtClean="0">
+                                    <a:rPr lang="en-US" sz="2080" b="0" i="1" smtClean="0">
                                       <a:latin typeface="Cambria Math" panose="02040503050406030204" pitchFamily="18" charset="0"/>
                                     </a:rPr>
                                     <m:t>𝑘𝑡</m:t>
@@ -5417,7 +5574,7 @@
                             </m:e>
                           </m:func>
                           <m:r>
-                            <a:rPr lang="en-US" sz="2600" b="0" i="1" smtClean="0">
+                            <a:rPr lang="en-US" sz="2080" b="0" i="1" smtClean="0">
                               <a:latin typeface="Cambria Math" panose="02040503050406030204" pitchFamily="18" charset="0"/>
                             </a:rPr>
                             <m:t>𝑑𝑡</m:t>
@@ -5427,7 +5584,7 @@
                     </m:oMath>
                   </m:oMathPara>
                 </a14:m>
-                <a:endParaRPr lang="en-US" sz="2600" dirty="0"/>
+                <a:endParaRPr lang="en-US" sz="2080" dirty="0"/>
               </a:p>
               <a:p>
                 <a:pPr marL="0" indent="0">
@@ -5442,14 +5599,14 @@
                       <m:sSub>
                         <m:sSubPr>
                           <m:ctrlPr>
-                            <a:rPr lang="en-US" sz="2600" i="1">
+                            <a:rPr lang="en-US" sz="2080" i="1">
                               <a:latin typeface="Cambria Math" panose="02040503050406030204" pitchFamily="18" charset="0"/>
                             </a:rPr>
                           </m:ctrlPr>
                         </m:sSubPr>
                         <m:e>
                           <m:r>
-                            <a:rPr lang="en-US" sz="2600" b="0" i="1" smtClean="0">
+                            <a:rPr lang="en-US" sz="2080" b="0" i="1" smtClean="0">
                               <a:latin typeface="Cambria Math" panose="02040503050406030204" pitchFamily="18" charset="0"/>
                             </a:rPr>
                             <m:t>𝑐</m:t>
@@ -5457,7 +5614,7 @@
                         </m:e>
                         <m:sub>
                           <m:r>
-                            <a:rPr lang="en-US" sz="2600" i="1">
+                            <a:rPr lang="en-US" sz="2080" i="1">
                               <a:latin typeface="Cambria Math" panose="02040503050406030204" pitchFamily="18" charset="0"/>
                             </a:rPr>
                             <m:t>𝑘</m:t>
@@ -5465,7 +5622,7 @@
                         </m:sub>
                       </m:sSub>
                       <m:r>
-                        <a:rPr lang="en-US" sz="2600" i="1">
+                        <a:rPr lang="en-US" sz="2080" i="1">
                           <a:latin typeface="Cambria Math" panose="02040503050406030204" pitchFamily="18" charset="0"/>
                         </a:rPr>
                         <m:t>=</m:t>
@@ -5473,14 +5630,14 @@
                       <m:f>
                         <m:fPr>
                           <m:ctrlPr>
-                            <a:rPr lang="en-US" sz="2600" i="1">
+                            <a:rPr lang="en-US" sz="2080" i="1">
                               <a:latin typeface="Cambria Math" panose="02040503050406030204" pitchFamily="18" charset="0"/>
                             </a:rPr>
                           </m:ctrlPr>
                         </m:fPr>
                         <m:num>
                           <m:r>
-                            <a:rPr lang="en-US" sz="2600" i="1">
+                            <a:rPr lang="en-US" sz="2080" i="1">
                               <a:latin typeface="Cambria Math" panose="02040503050406030204" pitchFamily="18" charset="0"/>
                             </a:rPr>
                             <m:t>2</m:t>
@@ -5490,14 +5647,14 @@
                           <m:sSub>
                             <m:sSubPr>
                               <m:ctrlPr>
-                                <a:rPr lang="en-US" sz="2600" i="1">
+                                <a:rPr lang="en-US" sz="2080" i="1">
                                   <a:latin typeface="Cambria Math" panose="02040503050406030204" pitchFamily="18" charset="0"/>
                                 </a:rPr>
                               </m:ctrlPr>
                             </m:sSubPr>
                             <m:e>
                               <m:r>
-                                <a:rPr lang="en-US" sz="2600" i="1">
+                                <a:rPr lang="en-US" sz="2080" i="1">
                                   <a:latin typeface="Cambria Math" panose="02040503050406030204" pitchFamily="18" charset="0"/>
                                 </a:rPr>
                                 <m:t>𝑇</m:t>
@@ -5505,7 +5662,7 @@
                             </m:e>
                             <m:sub>
                               <m:r>
-                                <a:rPr lang="en-US" sz="2600" i="1">
+                                <a:rPr lang="en-US" sz="2080" i="1">
                                   <a:latin typeface="Cambria Math" panose="02040503050406030204" pitchFamily="18" charset="0"/>
                                 </a:rPr>
                                 <m:t>0</m:t>
@@ -5518,7 +5675,7 @@
                         <m:naryPr>
                           <m:limLoc m:val="undOvr"/>
                           <m:ctrlPr>
-                            <a:rPr lang="en-US" sz="2600" i="1">
+                            <a:rPr lang="en-US" sz="2080" i="1">
                               <a:latin typeface="Cambria Math" panose="02040503050406030204" pitchFamily="18" charset="0"/>
                             </a:rPr>
                           </m:ctrlPr>
@@ -5527,14 +5684,14 @@
                           <m:sSub>
                             <m:sSubPr>
                               <m:ctrlPr>
-                                <a:rPr lang="en-US" sz="2600" i="1">
+                                <a:rPr lang="en-US" sz="2080" i="1">
                                   <a:latin typeface="Cambria Math" panose="02040503050406030204" pitchFamily="18" charset="0"/>
                                 </a:rPr>
                               </m:ctrlPr>
                             </m:sSubPr>
                             <m:e>
                               <m:r>
-                                <a:rPr lang="en-US" sz="2600" i="1">
+                                <a:rPr lang="en-US" sz="2080" i="1">
                                   <a:latin typeface="Cambria Math" panose="02040503050406030204" pitchFamily="18" charset="0"/>
                                 </a:rPr>
                                 <m:t>𝑡</m:t>
@@ -5542,7 +5699,7 @@
                             </m:e>
                             <m:sub>
                               <m:r>
-                                <a:rPr lang="en-US" sz="2600" i="1">
+                                <a:rPr lang="en-US" sz="2080" i="1">
                                   <a:latin typeface="Cambria Math" panose="02040503050406030204" pitchFamily="18" charset="0"/>
                                 </a:rPr>
                                 <m:t>0</m:t>
@@ -5554,14 +5711,14 @@
                           <m:sSub>
                             <m:sSubPr>
                               <m:ctrlPr>
-                                <a:rPr lang="en-US" sz="2600" i="1">
+                                <a:rPr lang="en-US" sz="2080" i="1">
                                   <a:latin typeface="Cambria Math" panose="02040503050406030204" pitchFamily="18" charset="0"/>
                                 </a:rPr>
                               </m:ctrlPr>
                             </m:sSubPr>
                             <m:e>
                               <m:r>
-                                <a:rPr lang="en-US" sz="2600" i="1">
+                                <a:rPr lang="en-US" sz="2080" i="1">
                                   <a:latin typeface="Cambria Math" panose="02040503050406030204" pitchFamily="18" charset="0"/>
                                 </a:rPr>
                                 <m:t>𝑡</m:t>
@@ -5569,7 +5726,7 @@
                             </m:e>
                             <m:sub>
                               <m:r>
-                                <a:rPr lang="en-US" sz="2600" i="1">
+                                <a:rPr lang="en-US" sz="2080" i="1">
                                   <a:latin typeface="Cambria Math" panose="02040503050406030204" pitchFamily="18" charset="0"/>
                                 </a:rPr>
                                 <m:t>0</m:t>
@@ -5577,7 +5734,7 @@
                             </m:sub>
                           </m:sSub>
                           <m:r>
-                            <a:rPr lang="en-US" sz="2600" i="1">
+                            <a:rPr lang="en-US" sz="2080" i="1">
                               <a:latin typeface="Cambria Math" panose="02040503050406030204" pitchFamily="18" charset="0"/>
                             </a:rPr>
                             <m:t>+</m:t>
@@ -5585,14 +5742,14 @@
                           <m:sSub>
                             <m:sSubPr>
                               <m:ctrlPr>
-                                <a:rPr lang="en-US" sz="2600" i="1">
+                                <a:rPr lang="en-US" sz="2080" i="1">
                                   <a:latin typeface="Cambria Math" panose="02040503050406030204" pitchFamily="18" charset="0"/>
                                 </a:rPr>
                               </m:ctrlPr>
                             </m:sSubPr>
                             <m:e>
                               <m:r>
-                                <a:rPr lang="en-US" sz="2600" i="1">
+                                <a:rPr lang="en-US" sz="2080" i="1">
                                   <a:latin typeface="Cambria Math" panose="02040503050406030204" pitchFamily="18" charset="0"/>
                                 </a:rPr>
                                 <m:t>𝑇</m:t>
@@ -5600,7 +5757,7 @@
                             </m:e>
                             <m:sub>
                               <m:r>
-                                <a:rPr lang="en-US" sz="2600" i="1">
+                                <a:rPr lang="en-US" sz="2080" i="1">
                                   <a:latin typeface="Cambria Math" panose="02040503050406030204" pitchFamily="18" charset="0"/>
                                 </a:rPr>
                                 <m:t>0</m:t>
@@ -5610,7 +5767,7 @@
                         </m:sup>
                         <m:e>
                           <m:r>
-                            <a:rPr lang="en-US" sz="2600" i="1">
+                            <a:rPr lang="en-US" sz="2080" i="1">
                               <a:latin typeface="Cambria Math" panose="02040503050406030204" pitchFamily="18" charset="0"/>
                             </a:rPr>
                             <m:t>𝑥</m:t>
@@ -5618,14 +5775,14 @@
                           <m:d>
                             <m:dPr>
                               <m:ctrlPr>
-                                <a:rPr lang="en-US" sz="2600" i="1">
+                                <a:rPr lang="en-US" sz="2080" i="1">
                                   <a:latin typeface="Cambria Math" panose="02040503050406030204" pitchFamily="18" charset="0"/>
                                 </a:rPr>
                               </m:ctrlPr>
                             </m:dPr>
                             <m:e>
                               <m:r>
-                                <a:rPr lang="en-US" sz="2600" i="1">
+                                <a:rPr lang="en-US" sz="2080" i="1">
                                   <a:latin typeface="Cambria Math" panose="02040503050406030204" pitchFamily="18" charset="0"/>
                                 </a:rPr>
                                 <m:t>𝑡</m:t>
@@ -5636,13 +5793,13 @@
                             <m:rPr>
                               <m:sty m:val="p"/>
                             </m:rPr>
-                            <a:rPr lang="en-US" sz="2600" b="0" i="0" smtClean="0">
+                            <a:rPr lang="en-US" sz="2080" b="0" i="0" smtClean="0">
                               <a:latin typeface="Cambria Math" panose="02040503050406030204" pitchFamily="18" charset="0"/>
                             </a:rPr>
                             <m:t>sin</m:t>
                           </m:r>
                           <m:r>
-                            <a:rPr lang="en-US" sz="2600" b="0" i="1" smtClean="0">
+                            <a:rPr lang="en-US" sz="2080" b="0" i="1" smtClean="0">
                               <a:latin typeface="Cambria Math" panose="02040503050406030204" pitchFamily="18" charset="0"/>
                             </a:rPr>
                             <m:t>⁡(</m:t>
@@ -5650,14 +5807,14 @@
                           <m:sSub>
                             <m:sSubPr>
                               <m:ctrlPr>
-                                <a:rPr lang="en-US" sz="2600" b="0" i="1" smtClean="0">
+                                <a:rPr lang="en-US" sz="2080" b="0" i="1" smtClean="0">
                                   <a:latin typeface="Cambria Math" panose="02040503050406030204" pitchFamily="18" charset="0"/>
                                 </a:rPr>
                               </m:ctrlPr>
                             </m:sSubPr>
                             <m:e>
                               <m:r>
-                                <a:rPr lang="en-US" sz="2600" b="0" i="1" smtClean="0">
+                                <a:rPr lang="en-US" sz="2080" b="0" i="1" smtClean="0">
                                   <a:latin typeface="Cambria Math" panose="02040503050406030204" pitchFamily="18" charset="0"/>
                                   <a:ea typeface="Cambria Math" panose="02040503050406030204" pitchFamily="18" charset="0"/>
                                 </a:rPr>
@@ -5666,7 +5823,7 @@
                             </m:e>
                             <m:sub>
                               <m:r>
-                                <a:rPr lang="en-US" sz="2600" b="0" i="1" smtClean="0">
+                                <a:rPr lang="en-US" sz="2080" b="0" i="1" smtClean="0">
                                   <a:latin typeface="Cambria Math" panose="02040503050406030204" pitchFamily="18" charset="0"/>
                                 </a:rPr>
                                 <m:t>0</m:t>
@@ -5674,19 +5831,19 @@
                             </m:sub>
                           </m:sSub>
                           <m:r>
-                            <a:rPr lang="en-US" sz="2600" b="0" i="1" smtClean="0">
+                            <a:rPr lang="en-US" sz="2080" b="0" i="1" smtClean="0">
                               <a:latin typeface="Cambria Math" panose="02040503050406030204" pitchFamily="18" charset="0"/>
                             </a:rPr>
                             <m:t>𝑘𝑡</m:t>
                           </m:r>
                           <m:r>
-                            <a:rPr lang="en-US" sz="2600" b="0" i="1" smtClean="0">
+                            <a:rPr lang="en-US" sz="2080" b="0" i="1" smtClean="0">
                               <a:latin typeface="Cambria Math" panose="02040503050406030204" pitchFamily="18" charset="0"/>
                             </a:rPr>
                             <m:t>)</m:t>
                           </m:r>
                           <m:r>
-                            <a:rPr lang="en-US" sz="2600" i="1">
+                            <a:rPr lang="en-US" sz="2080" i="1">
                               <a:latin typeface="Cambria Math" panose="02040503050406030204" pitchFamily="18" charset="0"/>
                             </a:rPr>
                             <m:t>𝑑𝑡</m:t>
@@ -5696,7 +5853,7 @@
                     </m:oMath>
                   </m:oMathPara>
                 </a14:m>
-                <a:endParaRPr lang="en-US" sz="2600" dirty="0"/>
+                <a:endParaRPr lang="en-US" sz="2080" dirty="0"/>
               </a:p>
               <a:p>
                 <a:pPr marL="0" indent="0">
@@ -5711,14 +5868,14 @@
                       <m:sSub>
                         <m:sSubPr>
                           <m:ctrlPr>
-                            <a:rPr lang="en-US" sz="2600" i="1">
+                            <a:rPr lang="en-US" sz="2080" i="1">
                               <a:latin typeface="Cambria Math" panose="02040503050406030204" pitchFamily="18" charset="0"/>
                             </a:rPr>
                           </m:ctrlPr>
                         </m:sSubPr>
                         <m:e>
                           <m:r>
-                            <a:rPr lang="en-US" sz="2600" i="1">
+                            <a:rPr lang="en-US" sz="2080" i="1">
                               <a:latin typeface="Cambria Math" panose="02040503050406030204" pitchFamily="18" charset="0"/>
                             </a:rPr>
                             <m:t>𝑏</m:t>
@@ -5726,7 +5883,7 @@
                         </m:e>
                         <m:sub>
                           <m:r>
-                            <a:rPr lang="en-US" sz="2600" b="0" i="1" smtClean="0">
+                            <a:rPr lang="en-US" sz="2080" b="0" i="1" smtClean="0">
                               <a:latin typeface="Cambria Math" panose="02040503050406030204" pitchFamily="18" charset="0"/>
                             </a:rPr>
                             <m:t>0</m:t>
@@ -5734,7 +5891,7 @@
                         </m:sub>
                       </m:sSub>
                       <m:r>
-                        <a:rPr lang="en-US" sz="2600" i="1">
+                        <a:rPr lang="en-US" sz="2080" i="1">
                           <a:latin typeface="Cambria Math" panose="02040503050406030204" pitchFamily="18" charset="0"/>
                         </a:rPr>
                         <m:t>=</m:t>
@@ -5742,14 +5899,14 @@
                       <m:f>
                         <m:fPr>
                           <m:ctrlPr>
-                            <a:rPr lang="en-US" sz="2600" i="1">
+                            <a:rPr lang="en-US" sz="2080" i="1">
                               <a:latin typeface="Cambria Math" panose="02040503050406030204" pitchFamily="18" charset="0"/>
                             </a:rPr>
                           </m:ctrlPr>
                         </m:fPr>
                         <m:num>
                           <m:r>
-                            <a:rPr lang="en-US" sz="2600" b="0" i="1" smtClean="0">
+                            <a:rPr lang="en-US" sz="2080" b="0" i="1" smtClean="0">
                               <a:latin typeface="Cambria Math" panose="02040503050406030204" pitchFamily="18" charset="0"/>
                             </a:rPr>
                             <m:t>1</m:t>
@@ -5759,14 +5916,14 @@
                           <m:sSub>
                             <m:sSubPr>
                               <m:ctrlPr>
-                                <a:rPr lang="en-US" sz="2600" i="1">
+                                <a:rPr lang="en-US" sz="2080" i="1">
                                   <a:latin typeface="Cambria Math" panose="02040503050406030204" pitchFamily="18" charset="0"/>
                                 </a:rPr>
                               </m:ctrlPr>
                             </m:sSubPr>
                             <m:e>
                               <m:r>
-                                <a:rPr lang="en-US" sz="2600" i="1">
+                                <a:rPr lang="en-US" sz="2080" i="1">
                                   <a:latin typeface="Cambria Math" panose="02040503050406030204" pitchFamily="18" charset="0"/>
                                 </a:rPr>
                                 <m:t>𝑇</m:t>
@@ -5774,7 +5931,7 @@
                             </m:e>
                             <m:sub>
                               <m:r>
-                                <a:rPr lang="en-US" sz="2600" i="1">
+                                <a:rPr lang="en-US" sz="2080" i="1">
                                   <a:latin typeface="Cambria Math" panose="02040503050406030204" pitchFamily="18" charset="0"/>
                                 </a:rPr>
                                 <m:t>0</m:t>
@@ -5787,7 +5944,7 @@
                         <m:naryPr>
                           <m:limLoc m:val="undOvr"/>
                           <m:ctrlPr>
-                            <a:rPr lang="en-US" sz="2600" i="1">
+                            <a:rPr lang="en-US" sz="2080" i="1">
                               <a:latin typeface="Cambria Math" panose="02040503050406030204" pitchFamily="18" charset="0"/>
                             </a:rPr>
                           </m:ctrlPr>
@@ -5796,14 +5953,14 @@
                           <m:sSub>
                             <m:sSubPr>
                               <m:ctrlPr>
-                                <a:rPr lang="en-US" sz="2600" i="1">
+                                <a:rPr lang="en-US" sz="2080" i="1">
                                   <a:latin typeface="Cambria Math" panose="02040503050406030204" pitchFamily="18" charset="0"/>
                                 </a:rPr>
                               </m:ctrlPr>
                             </m:sSubPr>
                             <m:e>
                               <m:r>
-                                <a:rPr lang="en-US" sz="2600" i="1">
+                                <a:rPr lang="en-US" sz="2080" i="1">
                                   <a:latin typeface="Cambria Math" panose="02040503050406030204" pitchFamily="18" charset="0"/>
                                 </a:rPr>
                                 <m:t>𝑡</m:t>
@@ -5811,7 +5968,7 @@
                             </m:e>
                             <m:sub>
                               <m:r>
-                                <a:rPr lang="en-US" sz="2600" i="1">
+                                <a:rPr lang="en-US" sz="2080" i="1">
                                   <a:latin typeface="Cambria Math" panose="02040503050406030204" pitchFamily="18" charset="0"/>
                                 </a:rPr>
                                 <m:t>0</m:t>
@@ -5823,14 +5980,14 @@
                           <m:sSub>
                             <m:sSubPr>
                               <m:ctrlPr>
-                                <a:rPr lang="en-US" sz="2600" i="1">
+                                <a:rPr lang="en-US" sz="2080" i="1">
                                   <a:latin typeface="Cambria Math" panose="02040503050406030204" pitchFamily="18" charset="0"/>
                                 </a:rPr>
                               </m:ctrlPr>
                             </m:sSubPr>
                             <m:e>
                               <m:r>
-                                <a:rPr lang="en-US" sz="2600" i="1">
+                                <a:rPr lang="en-US" sz="2080" i="1">
                                   <a:latin typeface="Cambria Math" panose="02040503050406030204" pitchFamily="18" charset="0"/>
                                 </a:rPr>
                                 <m:t>𝑡</m:t>
@@ -5838,7 +5995,7 @@
                             </m:e>
                             <m:sub>
                               <m:r>
-                                <a:rPr lang="en-US" sz="2600" i="1">
+                                <a:rPr lang="en-US" sz="2080" i="1">
                                   <a:latin typeface="Cambria Math" panose="02040503050406030204" pitchFamily="18" charset="0"/>
                                 </a:rPr>
                                 <m:t>0</m:t>
@@ -5846,7 +6003,7 @@
                             </m:sub>
                           </m:sSub>
                           <m:r>
-                            <a:rPr lang="en-US" sz="2600" i="1">
+                            <a:rPr lang="en-US" sz="2080" i="1">
                               <a:latin typeface="Cambria Math" panose="02040503050406030204" pitchFamily="18" charset="0"/>
                             </a:rPr>
                             <m:t>+</m:t>
@@ -5854,14 +6011,14 @@
                           <m:sSub>
                             <m:sSubPr>
                               <m:ctrlPr>
-                                <a:rPr lang="en-US" sz="2600" i="1">
+                                <a:rPr lang="en-US" sz="2080" i="1">
                                   <a:latin typeface="Cambria Math" panose="02040503050406030204" pitchFamily="18" charset="0"/>
                                 </a:rPr>
                               </m:ctrlPr>
                             </m:sSubPr>
                             <m:e>
                               <m:r>
-                                <a:rPr lang="en-US" sz="2600" i="1">
+                                <a:rPr lang="en-US" sz="2080" i="1">
                                   <a:latin typeface="Cambria Math" panose="02040503050406030204" pitchFamily="18" charset="0"/>
                                 </a:rPr>
                                 <m:t>𝑇</m:t>
@@ -5869,7 +6026,7 @@
                             </m:e>
                             <m:sub>
                               <m:r>
-                                <a:rPr lang="en-US" sz="2600" i="1">
+                                <a:rPr lang="en-US" sz="2080" i="1">
                                   <a:latin typeface="Cambria Math" panose="02040503050406030204" pitchFamily="18" charset="0"/>
                                 </a:rPr>
                                 <m:t>0</m:t>
@@ -5879,7 +6036,7 @@
                         </m:sup>
                         <m:e>
                           <m:r>
-                            <a:rPr lang="en-US" sz="2600" i="1">
+                            <a:rPr lang="en-US" sz="2080" i="1">
                               <a:latin typeface="Cambria Math" panose="02040503050406030204" pitchFamily="18" charset="0"/>
                             </a:rPr>
                             <m:t>𝑥</m:t>
@@ -5887,14 +6044,14 @@
                           <m:d>
                             <m:dPr>
                               <m:ctrlPr>
-                                <a:rPr lang="en-US" sz="2600" i="1">
+                                <a:rPr lang="en-US" sz="2080" i="1">
                                   <a:latin typeface="Cambria Math" panose="02040503050406030204" pitchFamily="18" charset="0"/>
                                 </a:rPr>
                               </m:ctrlPr>
                             </m:dPr>
                             <m:e>
                               <m:r>
-                                <a:rPr lang="en-US" sz="2600" i="1">
+                                <a:rPr lang="en-US" sz="2080" i="1">
                                   <a:latin typeface="Cambria Math" panose="02040503050406030204" pitchFamily="18" charset="0"/>
                                 </a:rPr>
                                 <m:t>𝑡</m:t>
@@ -5902,7 +6059,7 @@
                             </m:e>
                           </m:d>
                           <m:r>
-                            <a:rPr lang="en-US" sz="2600" i="1">
+                            <a:rPr lang="en-US" sz="2080" i="1">
                               <a:latin typeface="Cambria Math" panose="02040503050406030204" pitchFamily="18" charset="0"/>
                             </a:rPr>
                             <m:t>𝑑𝑡</m:t>
@@ -5912,7 +6069,7 @@
                     </m:oMath>
                   </m:oMathPara>
                 </a14:m>
-                <a:endParaRPr lang="en-US" sz="2600" dirty="0"/>
+                <a:endParaRPr lang="en-US" sz="2080" dirty="0"/>
               </a:p>
             </p:txBody>
           </p:sp>
@@ -5961,35 +6118,6 @@
           </p:sp>
         </mc:Fallback>
       </mc:AlternateContent>
-      <p:sp>
-        <p:nvSpPr>
-          <p:cNvPr id="5" name="Slide Number Placeholder 4">
-            <a:extLst>
-              <a:ext uri="{FF2B5EF4-FFF2-40B4-BE49-F238E27FC236}">
-                <a16:creationId xmlns:a16="http://schemas.microsoft.com/office/drawing/2014/main" id="{D339D711-946B-4C7A-83F9-9950D1EE223B}"/>
-              </a:ext>
-            </a:extLst>
-          </p:cNvPr>
-          <p:cNvSpPr>
-            <a:spLocks noGrp="1"/>
-          </p:cNvSpPr>
-          <p:nvPr>
-            <p:ph type="sldNum" sz="quarter" idx="12"/>
-          </p:nvPr>
-        </p:nvSpPr>
-        <p:spPr/>
-        <p:txBody>
-          <a:bodyPr/>
-          <a:lstStyle/>
-          <a:p>
-            <a:fld id="{6CB4759B-89EF-486F-A495-36988C5D6AB8}" type="slidenum">
-              <a:rPr lang="en-US" smtClean="0"/>
-              <a:t>3</a:t>
-            </a:fld>
-            <a:endParaRPr lang="en-US"/>
-          </a:p>
-        </p:txBody>
-      </p:sp>
       <p:pic>
         <p:nvPicPr>
           <p:cNvPr id="7" name="Picture 6" descr="A close up of a device&#10;&#10;Description generated with high confidence">
@@ -6018,7 +6146,7 @@
         </p:blipFill>
         <p:spPr>
           <a:xfrm>
-            <a:off x="6402535" y="1890558"/>
+            <a:off x="6402535" y="2233458"/>
             <a:ext cx="5113428" cy="3395316"/>
           </a:xfrm>
           <a:prstGeom prst="rect">
@@ -6026,6 +6154,207 @@
           </a:prstGeom>
         </p:spPr>
       </p:pic>
+      <p:sp>
+        <p:nvSpPr>
+          <p:cNvPr id="8" name="DSPIRA 1"/>
+          <p:cNvSpPr>
+            <a:spLocks noGrp="1"/>
+          </p:cNvSpPr>
+          <p:nvPr/>
+        </p:nvSpPr>
+        <p:spPr>
+          <a:xfrm>
+            <a:off x="0" y="0"/>
+            <a:ext cx="12192000" cy="342900"/>
+          </a:xfrm>
+          <a:prstGeom prst="rect">
+            <a:avLst/>
+          </a:prstGeom>
+          <a:solidFill>
+            <a:srgbClr val="FFFFFF"/>
+          </a:solidFill>
+          <a:ln w="0">
+            <a:noFill/>
+          </a:ln>
+        </p:spPr>
+      </p:sp>
+      <p:sp>
+        <p:nvSpPr>
+          <p:cNvPr id="9" name="DSPIRA 2"/>
+          <p:cNvSpPr>
+            <a:spLocks noGrp="1"/>
+          </p:cNvSpPr>
+          <p:nvPr/>
+        </p:nvSpPr>
+        <p:spPr>
+          <a:xfrm>
+            <a:off x="0" y="7200900"/>
+            <a:ext cx="12192000" cy="342900"/>
+          </a:xfrm>
+          <a:prstGeom prst="rect">
+            <a:avLst/>
+          </a:prstGeom>
+          <a:solidFill>
+            <a:srgbClr val="FFFFFF"/>
+          </a:solidFill>
+          <a:ln w="0">
+            <a:noFill/>
+          </a:ln>
+        </p:spPr>
+      </p:sp>
+      <p:sp>
+        <p:nvSpPr>
+          <p:cNvPr id="10" name="DSPIRA 3"/>
+          <p:cNvSpPr>
+            <a:spLocks noGrp="1"/>
+          </p:cNvSpPr>
+          <p:nvPr/>
+        </p:nvSpPr>
+        <p:spPr>
+          <a:xfrm>
+            <a:off x="228600" y="76200"/>
+            <a:ext cx="4762500" cy="228600"/>
+          </a:xfrm>
+          <a:prstGeom prst="rect">
+            <a:avLst/>
+          </a:prstGeom>
+          <a:noFill/>
+          <a:ln w="0">
+            <a:noFill/>
+          </a:ln>
+        </p:spPr>
+        <p:txBody>
+          <a:bodyPr>
+            <a:noAutofit/>
+          </a:bodyPr>
+          <a:lstStyle/>
+          <a:p>
+            <a:pPr>
+              <a:defRPr sz="1200" b="1">
+                <a:solidFill>
+                  <a:srgbClr val="002855"/>
+                </a:solidFill>
+                <a:latin typeface="Arial"/>
+                <a:ea typeface="Arial"/>
+                <a:cs typeface="Arial"/>
+              </a:defRPr>
+            </a:pPr>
+            <a:r>
+              <a:rPr sz="1200" b="1">
+                <a:solidFill>
+                  <a:srgbClr val="002855"/>
+                </a:solidFill>
+                <a:latin typeface="Arial"/>
+                <a:ea typeface="Arial"/>
+                <a:cs typeface="Arial"/>
+              </a:rPr>
+              <a:t>WVU DSPIRA</a:t>
+            </a:r>
+          </a:p>
+        </p:txBody>
+      </p:sp>
+      <p:sp>
+        <p:nvSpPr>
+          <p:cNvPr id="11" name="DSPIRA 4"/>
+          <p:cNvSpPr>
+            <a:spLocks noGrp="1"/>
+          </p:cNvSpPr>
+          <p:nvPr/>
+        </p:nvSpPr>
+        <p:spPr>
+          <a:xfrm>
+            <a:off x="228600" y="7277100"/>
+            <a:ext cx="6667500" cy="228600"/>
+          </a:xfrm>
+          <a:prstGeom prst="rect">
+            <a:avLst/>
+          </a:prstGeom>
+          <a:noFill/>
+          <a:ln w="0">
+            <a:noFill/>
+          </a:ln>
+        </p:spPr>
+        <p:txBody>
+          <a:bodyPr>
+            <a:noAutofit/>
+          </a:bodyPr>
+          <a:lstStyle/>
+          <a:p>
+            <a:pPr>
+              <a:defRPr sz="900" b="0">
+                <a:solidFill>
+                  <a:srgbClr val="002855"/>
+                </a:solidFill>
+                <a:latin typeface="Arial"/>
+                <a:ea typeface="Arial"/>
+                <a:cs typeface="Arial"/>
+              </a:defRPr>
+            </a:pPr>
+            <a:r>
+              <a:rPr sz="900" b="0">
+                <a:solidFill>
+                  <a:srgbClr val="002855"/>
+                </a:solidFill>
+                <a:latin typeface="Arial"/>
+                <a:ea typeface="Arial"/>
+                <a:cs typeface="Arial"/>
+              </a:rPr>
+              <a:t>wvurail.org/dspira</a:t>
+            </a:r>
+          </a:p>
+        </p:txBody>
+      </p:sp>
+      <p:sp>
+        <p:nvSpPr>
+          <p:cNvPr id="12" name="DSPIRA 5"/>
+          <p:cNvSpPr>
+            <a:spLocks noGrp="1"/>
+          </p:cNvSpPr>
+          <p:nvPr/>
+        </p:nvSpPr>
+        <p:spPr>
+          <a:xfrm>
+            <a:off x="11191875" y="7277100"/>
+            <a:ext cx="762000" cy="228600"/>
+          </a:xfrm>
+          <a:prstGeom prst="rect">
+            <a:avLst/>
+          </a:prstGeom>
+          <a:noFill/>
+          <a:ln w="0">
+            <a:noFill/>
+          </a:ln>
+        </p:spPr>
+        <p:txBody>
+          <a:bodyPr>
+            <a:noAutofit/>
+          </a:bodyPr>
+          <a:lstStyle/>
+          <a:p>
+            <a:pPr>
+              <a:defRPr sz="900" b="0">
+                <a:solidFill>
+                  <a:srgbClr val="002855"/>
+                </a:solidFill>
+                <a:latin typeface="Arial"/>
+                <a:ea typeface="Arial"/>
+                <a:cs typeface="Arial"/>
+              </a:defRPr>
+            </a:pPr>
+            <a:r>
+              <a:rPr sz="900" b="0">
+                <a:solidFill>
+                  <a:srgbClr val="002855"/>
+                </a:solidFill>
+                <a:latin typeface="Arial"/>
+                <a:ea typeface="Arial"/>
+                <a:cs typeface="Arial"/>
+              </a:rPr>
+              <a:t>3 of 7</a:t>
+            </a:r>
+          </a:p>
+        </p:txBody>
+      </p:sp>
     </p:spTree>
     <p:extLst>
       <p:ext uri="{BB962C8B-B14F-4D97-AF65-F5344CB8AC3E}">
@@ -6089,7 +6418,7 @@
         </p:nvSpPr>
         <p:spPr bwMode="ltGray">
           <a:xfrm>
-            <a:off x="321564" y="320040"/>
+            <a:off x="321564" y="662940"/>
             <a:ext cx="11548872" cy="6217920"/>
           </a:xfrm>
           <a:prstGeom prst="rect">
@@ -6154,7 +6483,7 @@
         </p:nvCxnSpPr>
         <p:spPr>
           <a:xfrm>
-            <a:off x="4055891" y="2057399"/>
+            <a:off x="4055891" y="2400299"/>
             <a:ext cx="0" cy="2743200"/>
           </a:xfrm>
           <a:prstGeom prst="line">
@@ -6202,7 +6531,7 @@
         </p:nvSpPr>
         <p:spPr>
           <a:xfrm>
-            <a:off x="4380588" y="965199"/>
+            <a:off x="4380588" y="1308099"/>
             <a:ext cx="6766078" cy="4927601"/>
           </a:xfrm>
         </p:spPr>
@@ -6213,14 +6542,14 @@
           <a:lstStyle/>
           <a:p>
             <a:r>
-              <a:rPr lang="en-US" sz="5400" kern="1200">
+              <a:rPr lang="en-US" sz="4320" kern="1200">
                 <a:solidFill>
                   <a:schemeClr val="tx1">
                     <a:lumMod val="85000"/>
                     <a:lumOff val="15000"/>
                   </a:schemeClr>
                 </a:solidFill>
-                <a:latin typeface="+mj-lt"/>
+                <a:latin typeface="Arial"/>
                 <a:ea typeface="+mj-ea"/>
                 <a:cs typeface="+mj-cs"/>
               </a:rPr>
@@ -6231,47 +6560,202 @@
       </p:sp>
       <p:sp>
         <p:nvSpPr>
-          <p:cNvPr id="4" name="Slide Number Placeholder 3">
-            <a:extLst>
-              <a:ext uri="{FF2B5EF4-FFF2-40B4-BE49-F238E27FC236}">
-                <a16:creationId xmlns:a16="http://schemas.microsoft.com/office/drawing/2014/main" id="{45B5566B-117A-49F3-90E4-F3DFD3E40A65}"/>
-              </a:ext>
-            </a:extLst>
-          </p:cNvPr>
+          <p:cNvPr id="12" name="DSPIRA 1"/>
           <p:cNvSpPr>
             <a:spLocks noGrp="1"/>
           </p:cNvSpPr>
-          <p:nvPr>
-            <p:ph type="sldNum" sz="quarter" idx="12"/>
-          </p:nvPr>
+          <p:nvPr/>
         </p:nvSpPr>
         <p:spPr>
           <a:xfrm>
-            <a:off x="10225314" y="6553690"/>
-            <a:ext cx="1128486" cy="274320"/>
+            <a:off x="0" y="0"/>
+            <a:ext cx="12192000" cy="342900"/>
           </a:xfrm>
+          <a:prstGeom prst="rect">
+            <a:avLst/>
+          </a:prstGeom>
+          <a:solidFill>
+            <a:srgbClr val="FFFFFF"/>
+          </a:solidFill>
+          <a:ln w="0">
+            <a:noFill/>
+          </a:ln>
+        </p:spPr>
+      </p:sp>
+      <p:sp>
+        <p:nvSpPr>
+          <p:cNvPr id="13" name="DSPIRA 2"/>
+          <p:cNvSpPr>
+            <a:spLocks noGrp="1"/>
+          </p:cNvSpPr>
+          <p:nvPr/>
+        </p:nvSpPr>
+        <p:spPr>
+          <a:xfrm>
+            <a:off x="0" y="7200900"/>
+            <a:ext cx="12192000" cy="342900"/>
+          </a:xfrm>
+          <a:prstGeom prst="rect">
+            <a:avLst/>
+          </a:prstGeom>
+          <a:solidFill>
+            <a:srgbClr val="FFFFFF"/>
+          </a:solidFill>
+          <a:ln w="0">
+            <a:noFill/>
+          </a:ln>
+        </p:spPr>
+      </p:sp>
+      <p:sp>
+        <p:nvSpPr>
+          <p:cNvPr id="14" name="DSPIRA 3"/>
+          <p:cNvSpPr>
+            <a:spLocks noGrp="1"/>
+          </p:cNvSpPr>
+          <p:nvPr/>
+        </p:nvSpPr>
+        <p:spPr>
+          <a:xfrm>
+            <a:off x="228600" y="76200"/>
+            <a:ext cx="4762500" cy="228600"/>
+          </a:xfrm>
+          <a:prstGeom prst="rect">
+            <a:avLst/>
+          </a:prstGeom>
+          <a:noFill/>
+          <a:ln w="0">
+            <a:noFill/>
+          </a:ln>
         </p:spPr>
         <p:txBody>
-          <a:bodyPr vert="horz" lIns="91440" tIns="45720" rIns="91440" bIns="45720" rtlCol="0" anchor="ctr">
-            <a:normAutofit/>
+          <a:bodyPr>
+            <a:noAutofit/>
           </a:bodyPr>
           <a:lstStyle/>
           <a:p>
             <a:pPr>
-              <a:spcAft>
-                <a:spcPts val="600"/>
-              </a:spcAft>
+              <a:defRPr sz="1200" b="1">
+                <a:solidFill>
+                  <a:srgbClr val="002855"/>
+                </a:solidFill>
+                <a:latin typeface="Arial"/>
+                <a:ea typeface="Arial"/>
+                <a:cs typeface="Arial"/>
+              </a:defRPr>
             </a:pPr>
-            <a:fld id="{6CB4759B-89EF-486F-A495-36988C5D6AB8}" type="slidenum">
-              <a:rPr lang="en-US" sz="1050"/>
-              <a:pPr>
-                <a:spcAft>
-                  <a:spcPts val="600"/>
-                </a:spcAft>
-              </a:pPr>
-              <a:t>4</a:t>
-            </a:fld>
-            <a:endParaRPr lang="en-US" sz="1050"/>
+            <a:r>
+              <a:rPr sz="1200" b="1">
+                <a:solidFill>
+                  <a:srgbClr val="002855"/>
+                </a:solidFill>
+                <a:latin typeface="Arial"/>
+                <a:ea typeface="Arial"/>
+                <a:cs typeface="Arial"/>
+              </a:rPr>
+              <a:t>WVU DSPIRA</a:t>
+            </a:r>
+          </a:p>
+        </p:txBody>
+      </p:sp>
+      <p:sp>
+        <p:nvSpPr>
+          <p:cNvPr id="15" name="DSPIRA 4"/>
+          <p:cNvSpPr>
+            <a:spLocks noGrp="1"/>
+          </p:cNvSpPr>
+          <p:nvPr/>
+        </p:nvSpPr>
+        <p:spPr>
+          <a:xfrm>
+            <a:off x="228600" y="7277100"/>
+            <a:ext cx="6667500" cy="228600"/>
+          </a:xfrm>
+          <a:prstGeom prst="rect">
+            <a:avLst/>
+          </a:prstGeom>
+          <a:noFill/>
+          <a:ln w="0">
+            <a:noFill/>
+          </a:ln>
+        </p:spPr>
+        <p:txBody>
+          <a:bodyPr>
+            <a:noAutofit/>
+          </a:bodyPr>
+          <a:lstStyle/>
+          <a:p>
+            <a:pPr>
+              <a:defRPr sz="900" b="0">
+                <a:solidFill>
+                  <a:srgbClr val="002855"/>
+                </a:solidFill>
+                <a:latin typeface="Arial"/>
+                <a:ea typeface="Arial"/>
+                <a:cs typeface="Arial"/>
+              </a:defRPr>
+            </a:pPr>
+            <a:r>
+              <a:rPr sz="900" b="0">
+                <a:solidFill>
+                  <a:srgbClr val="002855"/>
+                </a:solidFill>
+                <a:latin typeface="Arial"/>
+                <a:ea typeface="Arial"/>
+                <a:cs typeface="Arial"/>
+              </a:rPr>
+              <a:t>wvurail.org/dspira</a:t>
+            </a:r>
+          </a:p>
+        </p:txBody>
+      </p:sp>
+      <p:sp>
+        <p:nvSpPr>
+          <p:cNvPr id="16" name="DSPIRA 5"/>
+          <p:cNvSpPr>
+            <a:spLocks noGrp="1"/>
+          </p:cNvSpPr>
+          <p:nvPr/>
+        </p:nvSpPr>
+        <p:spPr>
+          <a:xfrm>
+            <a:off x="11191875" y="7277100"/>
+            <a:ext cx="762000" cy="228600"/>
+          </a:xfrm>
+          <a:prstGeom prst="rect">
+            <a:avLst/>
+          </a:prstGeom>
+          <a:noFill/>
+          <a:ln w="0">
+            <a:noFill/>
+          </a:ln>
+        </p:spPr>
+        <p:txBody>
+          <a:bodyPr>
+            <a:noAutofit/>
+          </a:bodyPr>
+          <a:lstStyle/>
+          <a:p>
+            <a:pPr>
+              <a:defRPr sz="900" b="0">
+                <a:solidFill>
+                  <a:srgbClr val="002855"/>
+                </a:solidFill>
+                <a:latin typeface="Arial"/>
+                <a:ea typeface="Arial"/>
+                <a:cs typeface="Arial"/>
+              </a:defRPr>
+            </a:pPr>
+            <a:r>
+              <a:rPr sz="900" b="0">
+                <a:solidFill>
+                  <a:srgbClr val="002855"/>
+                </a:solidFill>
+                <a:latin typeface="Arial"/>
+                <a:ea typeface="Arial"/>
+                <a:cs typeface="Arial"/>
+              </a:rPr>
+              <a:t>4 of 7</a:t>
+            </a:r>
           </a:p>
         </p:txBody>
       </p:sp>
@@ -6338,7 +6822,7 @@
         </p:nvSpPr>
         <p:spPr bwMode="ltGray">
           <a:xfrm>
-            <a:off x="321564" y="320040"/>
+            <a:off x="321564" y="662940"/>
             <a:ext cx="11548872" cy="6217920"/>
           </a:xfrm>
           <a:prstGeom prst="rect">
@@ -6400,7 +6884,7 @@
         </p:nvSpPr>
         <p:spPr>
           <a:xfrm>
-            <a:off x="838200" y="668377"/>
+            <a:off x="838200" y="1011277"/>
             <a:ext cx="10515600" cy="1325563"/>
           </a:xfrm>
         </p:spPr>
@@ -6448,13 +6932,13 @@
               <a:lstStyle/>
               <a:p>
                 <a:r>
-                  <a:rPr lang="en-US" sz="2200"/>
+                  <a:rPr lang="en-US" sz="1760"/>
                   <a:t>In place of sine and cosine functions we can use a series of complex exponentials. </a:t>
                 </a:r>
               </a:p>
               <a:p>
                 <a:r>
-                  <a:rPr lang="en-US" sz="2200"/>
+                  <a:rPr lang="en-US" sz="1760"/>
                   <a:t>Recall Euler’s equations: </a:t>
                 </a:r>
               </a:p>
@@ -6471,14 +6955,14 @@
                       <m:sSup>
                         <m:sSupPr>
                           <m:ctrlPr>
-                            <a:rPr lang="en-US" sz="2200" i="1">
+                            <a:rPr lang="en-US" sz="1760" i="1">
                               <a:latin typeface="Cambria Math" panose="02040503050406030204" pitchFamily="18" charset="0"/>
                             </a:rPr>
                           </m:ctrlPr>
                         </m:sSupPr>
                         <m:e>
                           <m:r>
-                            <a:rPr lang="en-US" sz="2200" b="0" i="1">
+                            <a:rPr lang="en-US" sz="1760" b="0" i="1">
                               <a:latin typeface="Cambria Math" panose="02040503050406030204" pitchFamily="18" charset="0"/>
                             </a:rPr>
                             <m:t>𝑒</m:t>
@@ -6486,20 +6970,20 @@
                         </m:e>
                         <m:sup>
                           <m:r>
-                            <a:rPr lang="en-US" sz="2200" b="0" i="1">
+                            <a:rPr lang="en-US" sz="1760" b="0" i="1">
                               <a:latin typeface="Cambria Math" panose="02040503050406030204" pitchFamily="18" charset="0"/>
                             </a:rPr>
                             <m:t>𝑗</m:t>
                           </m:r>
                           <m:r>
-                            <a:rPr lang="en-US" sz="2200" b="0" i="1">
+                            <a:rPr lang="en-US" sz="1760" b="0" i="1">
                               <a:latin typeface="Cambria Math" panose="02040503050406030204" pitchFamily="18" charset="0"/>
                               <a:ea typeface="Cambria Math" panose="02040503050406030204" pitchFamily="18" charset="0"/>
                             </a:rPr>
                             <m:t>𝜔</m:t>
                           </m:r>
                           <m:r>
-                            <a:rPr lang="en-US" sz="2200" b="0" i="1">
+                            <a:rPr lang="en-US" sz="1760" b="0" i="1">
                               <a:latin typeface="Cambria Math" panose="02040503050406030204" pitchFamily="18" charset="0"/>
                               <a:ea typeface="Cambria Math" panose="02040503050406030204" pitchFamily="18" charset="0"/>
                             </a:rPr>
@@ -6508,7 +6992,7 @@
                         </m:sup>
                       </m:sSup>
                       <m:r>
-                        <a:rPr lang="en-US" sz="2200" b="0" i="1">
+                        <a:rPr lang="en-US" sz="1760" b="0" i="1">
                           <a:latin typeface="Cambria Math" panose="02040503050406030204" pitchFamily="18" charset="0"/>
                         </a:rPr>
                         <m:t>=</m:t>
@@ -6516,7 +7000,7 @@
                       <m:func>
                         <m:funcPr>
                           <m:ctrlPr>
-                            <a:rPr lang="en-US" sz="2200" b="0" i="1">
+                            <a:rPr lang="en-US" sz="1760" b="0" i="1">
                               <a:latin typeface="Cambria Math" panose="02040503050406030204" pitchFamily="18" charset="0"/>
                             </a:rPr>
                           </m:ctrlPr>
@@ -6526,7 +7010,7 @@
                             <m:rPr>
                               <m:sty m:val="p"/>
                             </m:rPr>
-                            <a:rPr lang="en-US" sz="2200" b="0" i="0">
+                            <a:rPr lang="en-US" sz="1760" b="0" i="0">
                               <a:latin typeface="Cambria Math" panose="02040503050406030204" pitchFamily="18" charset="0"/>
                             </a:rPr>
                             <m:t>cos</m:t>
@@ -6536,21 +7020,21 @@
                           <m:d>
                             <m:dPr>
                               <m:ctrlPr>
-                                <a:rPr lang="en-US" sz="2200" b="0" i="1">
+                                <a:rPr lang="en-US" sz="1760" b="0" i="1">
                                   <a:latin typeface="Cambria Math" panose="02040503050406030204" pitchFamily="18" charset="0"/>
                                 </a:rPr>
                               </m:ctrlPr>
                             </m:dPr>
                             <m:e>
                               <m:r>
-                                <a:rPr lang="en-US" sz="2200" b="0" i="1">
+                                <a:rPr lang="en-US" sz="1760" b="0" i="1">
                                   <a:latin typeface="Cambria Math" panose="02040503050406030204" pitchFamily="18" charset="0"/>
                                   <a:ea typeface="Cambria Math" panose="02040503050406030204" pitchFamily="18" charset="0"/>
                                 </a:rPr>
                                 <m:t>𝜔</m:t>
                               </m:r>
                               <m:r>
-                                <a:rPr lang="en-US" sz="2200" b="0" i="1">
+                                <a:rPr lang="en-US" sz="1760" b="0" i="1">
                                   <a:latin typeface="Cambria Math" panose="02040503050406030204" pitchFamily="18" charset="0"/>
                                   <a:ea typeface="Cambria Math" panose="02040503050406030204" pitchFamily="18" charset="0"/>
                                 </a:rPr>
@@ -6561,14 +7045,14 @@
                         </m:e>
                       </m:func>
                       <m:r>
-                        <a:rPr lang="en-US" sz="2200" b="0" i="1">
+                        <a:rPr lang="en-US" sz="1760" b="0" i="1">
                           <a:latin typeface="Cambria Math" panose="02040503050406030204" pitchFamily="18" charset="0"/>
                           <a:ea typeface="Cambria Math" panose="02040503050406030204" pitchFamily="18" charset="0"/>
                         </a:rPr>
                         <m:t>+</m:t>
                       </m:r>
                       <m:r>
-                        <a:rPr lang="en-US" sz="2200" b="0" i="1">
+                        <a:rPr lang="en-US" sz="1760" b="0" i="1">
                           <a:latin typeface="Cambria Math" panose="02040503050406030204" pitchFamily="18" charset="0"/>
                           <a:ea typeface="Cambria Math" panose="02040503050406030204" pitchFamily="18" charset="0"/>
                         </a:rPr>
@@ -6577,7 +7061,7 @@
                       <m:func>
                         <m:funcPr>
                           <m:ctrlPr>
-                            <a:rPr lang="en-US" sz="2200" b="0" i="1">
+                            <a:rPr lang="en-US" sz="1760" b="0" i="1">
                               <a:latin typeface="Cambria Math" panose="02040503050406030204" pitchFamily="18" charset="0"/>
                               <a:ea typeface="Cambria Math" panose="02040503050406030204" pitchFamily="18" charset="0"/>
                             </a:rPr>
@@ -6588,7 +7072,7 @@
                             <m:rPr>
                               <m:sty m:val="p"/>
                             </m:rPr>
-                            <a:rPr lang="en-US" sz="2200" b="0" i="0">
+                            <a:rPr lang="en-US" sz="1760" b="0" i="0">
                               <a:latin typeface="Cambria Math" panose="02040503050406030204" pitchFamily="18" charset="0"/>
                               <a:ea typeface="Cambria Math" panose="02040503050406030204" pitchFamily="18" charset="0"/>
                             </a:rPr>
@@ -6599,7 +7083,7 @@
                           <m:d>
                             <m:dPr>
                               <m:ctrlPr>
-                                <a:rPr lang="en-US" sz="2200" i="1">
+                                <a:rPr lang="en-US" sz="1760" i="1">
                                   <a:latin typeface="Cambria Math" panose="02040503050406030204" pitchFamily="18" charset="0"/>
                                   <a:ea typeface="Cambria Math" panose="02040503050406030204" pitchFamily="18" charset="0"/>
                                 </a:rPr>
@@ -6607,14 +7091,14 @@
                             </m:dPr>
                             <m:e>
                               <m:r>
-                                <a:rPr lang="en-US" sz="2200" i="1">
+                                <a:rPr lang="en-US" sz="1760" i="1">
                                   <a:latin typeface="Cambria Math" panose="02040503050406030204" pitchFamily="18" charset="0"/>
                                   <a:ea typeface="Cambria Math" panose="02040503050406030204" pitchFamily="18" charset="0"/>
                                 </a:rPr>
                                 <m:t>𝜔</m:t>
                               </m:r>
                               <m:r>
-                                <a:rPr lang="en-US" sz="2200" i="1">
+                                <a:rPr lang="en-US" sz="1760" i="1">
                                   <a:latin typeface="Cambria Math" panose="02040503050406030204" pitchFamily="18" charset="0"/>
                                   <a:ea typeface="Cambria Math" panose="02040503050406030204" pitchFamily="18" charset="0"/>
                                 </a:rPr>
@@ -6627,7 +7111,7 @@
                     </m:oMath>
                   </m:oMathPara>
                 </a14:m>
-                <a:endParaRPr lang="en-US" sz="2200"/>
+                <a:endParaRPr lang="en-US" sz="1760"/>
               </a:p>
               <a:p>
                 <a:pPr marL="0" indent="0">
@@ -6642,14 +7126,14 @@
                       <m:sSup>
                         <m:sSupPr>
                           <m:ctrlPr>
-                            <a:rPr lang="en-US" sz="2200" i="1">
+                            <a:rPr lang="en-US" sz="1760" i="1">
                               <a:latin typeface="Cambria Math" panose="02040503050406030204" pitchFamily="18" charset="0"/>
                             </a:rPr>
                           </m:ctrlPr>
                         </m:sSupPr>
                         <m:e>
                           <m:r>
-                            <a:rPr lang="en-US" sz="2200" i="1">
+                            <a:rPr lang="en-US" sz="1760" i="1">
                               <a:latin typeface="Cambria Math" panose="02040503050406030204" pitchFamily="18" charset="0"/>
                             </a:rPr>
                             <m:t>𝑒</m:t>
@@ -6657,26 +7141,26 @@
                         </m:e>
                         <m:sup>
                           <m:r>
-                            <a:rPr lang="en-US" sz="2200" b="0" i="1">
+                            <a:rPr lang="en-US" sz="1760" b="0" i="1">
                               <a:latin typeface="Cambria Math" panose="02040503050406030204" pitchFamily="18" charset="0"/>
                             </a:rPr>
                             <m:t>−</m:t>
                           </m:r>
                           <m:r>
-                            <a:rPr lang="en-US" sz="2200" i="1">
+                            <a:rPr lang="en-US" sz="1760" i="1">
                               <a:latin typeface="Cambria Math" panose="02040503050406030204" pitchFamily="18" charset="0"/>
                             </a:rPr>
                             <m:t>𝑗</m:t>
                           </m:r>
                           <m:r>
-                            <a:rPr lang="en-US" sz="2200" i="1">
+                            <a:rPr lang="en-US" sz="1760" i="1">
                               <a:latin typeface="Cambria Math" panose="02040503050406030204" pitchFamily="18" charset="0"/>
                               <a:ea typeface="Cambria Math" panose="02040503050406030204" pitchFamily="18" charset="0"/>
                             </a:rPr>
                             <m:t>𝜔</m:t>
                           </m:r>
                           <m:r>
-                            <a:rPr lang="en-US" sz="2200" i="1">
+                            <a:rPr lang="en-US" sz="1760" i="1">
                               <a:latin typeface="Cambria Math" panose="02040503050406030204" pitchFamily="18" charset="0"/>
                               <a:ea typeface="Cambria Math" panose="02040503050406030204" pitchFamily="18" charset="0"/>
                             </a:rPr>
@@ -6685,7 +7169,7 @@
                         </m:sup>
                       </m:sSup>
                       <m:r>
-                        <a:rPr lang="en-US" sz="2200" i="1">
+                        <a:rPr lang="en-US" sz="1760" i="1">
                           <a:latin typeface="Cambria Math" panose="02040503050406030204" pitchFamily="18" charset="0"/>
                         </a:rPr>
                         <m:t>=</m:t>
@@ -6693,7 +7177,7 @@
                       <m:func>
                         <m:funcPr>
                           <m:ctrlPr>
-                            <a:rPr lang="en-US" sz="2200" i="1">
+                            <a:rPr lang="en-US" sz="1760" i="1">
                               <a:latin typeface="Cambria Math" panose="02040503050406030204" pitchFamily="18" charset="0"/>
                             </a:rPr>
                           </m:ctrlPr>
@@ -6703,7 +7187,7 @@
                             <m:rPr>
                               <m:sty m:val="p"/>
                             </m:rPr>
-                            <a:rPr lang="en-US" sz="2200">
+                            <a:rPr lang="en-US" sz="1760">
                               <a:latin typeface="Cambria Math" panose="02040503050406030204" pitchFamily="18" charset="0"/>
                             </a:rPr>
                             <m:t>cos</m:t>
@@ -6713,21 +7197,21 @@
                           <m:d>
                             <m:dPr>
                               <m:ctrlPr>
-                                <a:rPr lang="en-US" sz="2200" i="1">
+                                <a:rPr lang="en-US" sz="1760" i="1">
                                   <a:latin typeface="Cambria Math" panose="02040503050406030204" pitchFamily="18" charset="0"/>
                                 </a:rPr>
                               </m:ctrlPr>
                             </m:dPr>
                             <m:e>
                               <m:r>
-                                <a:rPr lang="en-US" sz="2200" i="1">
+                                <a:rPr lang="en-US" sz="1760" i="1">
                                   <a:latin typeface="Cambria Math" panose="02040503050406030204" pitchFamily="18" charset="0"/>
                                   <a:ea typeface="Cambria Math" panose="02040503050406030204" pitchFamily="18" charset="0"/>
                                 </a:rPr>
                                 <m:t>𝜔</m:t>
                               </m:r>
                               <m:r>
-                                <a:rPr lang="en-US" sz="2200" i="1">
+                                <a:rPr lang="en-US" sz="1760" i="1">
                                   <a:latin typeface="Cambria Math" panose="02040503050406030204" pitchFamily="18" charset="0"/>
                                   <a:ea typeface="Cambria Math" panose="02040503050406030204" pitchFamily="18" charset="0"/>
                                 </a:rPr>
@@ -6738,14 +7222,14 @@
                         </m:e>
                       </m:func>
                       <m:r>
-                        <a:rPr lang="en-US" sz="2200" b="0" i="1">
+                        <a:rPr lang="en-US" sz="1760" b="0" i="1">
                           <a:latin typeface="Cambria Math" panose="02040503050406030204" pitchFamily="18" charset="0"/>
                           <a:ea typeface="Cambria Math" panose="02040503050406030204" pitchFamily="18" charset="0"/>
                         </a:rPr>
                         <m:t>−</m:t>
                       </m:r>
                       <m:r>
-                        <a:rPr lang="en-US" sz="2200" i="1">
+                        <a:rPr lang="en-US" sz="1760" i="1">
                           <a:latin typeface="Cambria Math" panose="02040503050406030204" pitchFamily="18" charset="0"/>
                           <a:ea typeface="Cambria Math" panose="02040503050406030204" pitchFamily="18" charset="0"/>
                         </a:rPr>
@@ -6754,7 +7238,7 @@
                       <m:func>
                         <m:funcPr>
                           <m:ctrlPr>
-                            <a:rPr lang="en-US" sz="2200" i="1">
+                            <a:rPr lang="en-US" sz="1760" i="1">
                               <a:latin typeface="Cambria Math" panose="02040503050406030204" pitchFamily="18" charset="0"/>
                               <a:ea typeface="Cambria Math" panose="02040503050406030204" pitchFamily="18" charset="0"/>
                             </a:rPr>
@@ -6765,7 +7249,7 @@
                             <m:rPr>
                               <m:sty m:val="p"/>
                             </m:rPr>
-                            <a:rPr lang="en-US" sz="2200">
+                            <a:rPr lang="en-US" sz="1760">
                               <a:latin typeface="Cambria Math" panose="02040503050406030204" pitchFamily="18" charset="0"/>
                               <a:ea typeface="Cambria Math" panose="02040503050406030204" pitchFamily="18" charset="0"/>
                             </a:rPr>
@@ -6776,7 +7260,7 @@
                           <m:d>
                             <m:dPr>
                               <m:ctrlPr>
-                                <a:rPr lang="en-US" sz="2200" i="1">
+                                <a:rPr lang="en-US" sz="1760" i="1">
                                   <a:latin typeface="Cambria Math" panose="02040503050406030204" pitchFamily="18" charset="0"/>
                                   <a:ea typeface="Cambria Math" panose="02040503050406030204" pitchFamily="18" charset="0"/>
                                 </a:rPr>
@@ -6784,14 +7268,14 @@
                             </m:dPr>
                             <m:e>
                               <m:r>
-                                <a:rPr lang="en-US" sz="2200" i="1">
+                                <a:rPr lang="en-US" sz="1760" i="1">
                                   <a:latin typeface="Cambria Math" panose="02040503050406030204" pitchFamily="18" charset="0"/>
                                   <a:ea typeface="Cambria Math" panose="02040503050406030204" pitchFamily="18" charset="0"/>
                                 </a:rPr>
                                 <m:t>𝜔</m:t>
                               </m:r>
                               <m:r>
-                                <a:rPr lang="en-US" sz="2200" i="1">
+                                <a:rPr lang="en-US" sz="1760" i="1">
                                   <a:latin typeface="Cambria Math" panose="02040503050406030204" pitchFamily="18" charset="0"/>
                                   <a:ea typeface="Cambria Math" panose="02040503050406030204" pitchFamily="18" charset="0"/>
                                 </a:rPr>
@@ -6804,11 +7288,11 @@
                     </m:oMath>
                   </m:oMathPara>
                 </a14:m>
-                <a:endParaRPr lang="en-US" sz="2200"/>
+                <a:endParaRPr lang="en-US" sz="1760"/>
               </a:p>
               <a:p>
                 <a:r>
-                  <a:rPr lang="en-US" sz="2200"/>
+                  <a:rPr lang="en-US" sz="1760"/>
                   <a:t>From these two equations: </a:t>
                 </a:r>
               </a:p>
@@ -6825,7 +7309,7 @@
                       <m:func>
                         <m:funcPr>
                           <m:ctrlPr>
-                            <a:rPr lang="en-US" sz="2200" b="0" i="1">
+                            <a:rPr lang="en-US" sz="1760" b="0" i="1">
                               <a:latin typeface="Cambria Math" panose="02040503050406030204" pitchFamily="18" charset="0"/>
                             </a:rPr>
                           </m:ctrlPr>
@@ -6835,7 +7319,7 @@
                             <m:rPr>
                               <m:sty m:val="p"/>
                             </m:rPr>
-                            <a:rPr lang="en-US" sz="2200" b="0" i="0">
+                            <a:rPr lang="en-US" sz="1760" b="0" i="0">
                               <a:latin typeface="Cambria Math" panose="02040503050406030204" pitchFamily="18" charset="0"/>
                             </a:rPr>
                             <m:t>cos</m:t>
@@ -6845,21 +7329,21 @@
                           <m:d>
                             <m:dPr>
                               <m:ctrlPr>
-                                <a:rPr lang="en-US" sz="2200" b="0" i="1">
+                                <a:rPr lang="en-US" sz="1760" b="0" i="1">
                                   <a:latin typeface="Cambria Math" panose="02040503050406030204" pitchFamily="18" charset="0"/>
                                 </a:rPr>
                               </m:ctrlPr>
                             </m:dPr>
                             <m:e>
                               <m:r>
-                                <a:rPr lang="en-US" sz="2200" b="0" i="1">
+                                <a:rPr lang="en-US" sz="1760" b="0" i="1">
                                   <a:latin typeface="Cambria Math" panose="02040503050406030204" pitchFamily="18" charset="0"/>
                                   <a:ea typeface="Cambria Math" panose="02040503050406030204" pitchFamily="18" charset="0"/>
                                 </a:rPr>
                                 <m:t>𝜔</m:t>
                               </m:r>
                               <m:r>
-                                <a:rPr lang="en-US" sz="2200" b="0" i="1">
+                                <a:rPr lang="en-US" sz="1760" b="0" i="1">
                                   <a:latin typeface="Cambria Math" panose="02040503050406030204" pitchFamily="18" charset="0"/>
                                   <a:ea typeface="Cambria Math" panose="02040503050406030204" pitchFamily="18" charset="0"/>
                                 </a:rPr>
@@ -6870,7 +7354,7 @@
                         </m:e>
                       </m:func>
                       <m:r>
-                        <a:rPr lang="en-US" sz="2200" b="0" i="1">
+                        <a:rPr lang="en-US" sz="1760" b="0" i="1">
                           <a:latin typeface="Cambria Math" panose="02040503050406030204" pitchFamily="18" charset="0"/>
                           <a:ea typeface="Cambria Math" panose="02040503050406030204" pitchFamily="18" charset="0"/>
                         </a:rPr>
@@ -6879,7 +7363,7 @@
                       <m:f>
                         <m:fPr>
                           <m:ctrlPr>
-                            <a:rPr lang="en-US" sz="2200" b="0" i="1">
+                            <a:rPr lang="en-US" sz="1760" b="0" i="1">
                               <a:latin typeface="Cambria Math" panose="02040503050406030204" pitchFamily="18" charset="0"/>
                               <a:ea typeface="Cambria Math" panose="02040503050406030204" pitchFamily="18" charset="0"/>
                             </a:rPr>
@@ -6887,7 +7371,7 @@
                         </m:fPr>
                         <m:num>
                           <m:r>
-                            <a:rPr lang="en-US" sz="2200" b="0" i="1">
+                            <a:rPr lang="en-US" sz="1760" b="0" i="1">
                               <a:latin typeface="Cambria Math" panose="02040503050406030204" pitchFamily="18" charset="0"/>
                               <a:ea typeface="Cambria Math" panose="02040503050406030204" pitchFamily="18" charset="0"/>
                             </a:rPr>
@@ -6896,7 +7380,7 @@
                         </m:num>
                         <m:den>
                           <m:r>
-                            <a:rPr lang="en-US" sz="2200" b="0" i="1">
+                            <a:rPr lang="en-US" sz="1760" b="0" i="1">
                               <a:latin typeface="Cambria Math" panose="02040503050406030204" pitchFamily="18" charset="0"/>
                               <a:ea typeface="Cambria Math" panose="02040503050406030204" pitchFamily="18" charset="0"/>
                             </a:rPr>
@@ -6907,7 +7391,7 @@
                       <m:d>
                         <m:dPr>
                           <m:ctrlPr>
-                            <a:rPr lang="en-US" sz="2200" b="0" i="1">
+                            <a:rPr lang="en-US" sz="1760" b="0" i="1">
                               <a:latin typeface="Cambria Math" panose="02040503050406030204" pitchFamily="18" charset="0"/>
                               <a:ea typeface="Cambria Math" panose="02040503050406030204" pitchFamily="18" charset="0"/>
                             </a:rPr>
@@ -6917,14 +7401,14 @@
                           <m:sSup>
                             <m:sSupPr>
                               <m:ctrlPr>
-                                <a:rPr lang="en-US" sz="2200" i="1">
+                                <a:rPr lang="en-US" sz="1760" i="1">
                                   <a:latin typeface="Cambria Math" panose="02040503050406030204" pitchFamily="18" charset="0"/>
                                 </a:rPr>
                               </m:ctrlPr>
                             </m:sSupPr>
                             <m:e>
                               <m:r>
-                                <a:rPr lang="en-US" sz="2200" i="1">
+                                <a:rPr lang="en-US" sz="1760" i="1">
                                   <a:latin typeface="Cambria Math" panose="02040503050406030204" pitchFamily="18" charset="0"/>
                                 </a:rPr>
                                 <m:t>𝑒</m:t>
@@ -6932,20 +7416,20 @@
                             </m:e>
                             <m:sup>
                               <m:r>
-                                <a:rPr lang="en-US" sz="2200" i="1">
+                                <a:rPr lang="en-US" sz="1760" i="1">
                                   <a:latin typeface="Cambria Math" panose="02040503050406030204" pitchFamily="18" charset="0"/>
                                 </a:rPr>
                                 <m:t>𝑗</m:t>
                               </m:r>
                               <m:r>
-                                <a:rPr lang="en-US" sz="2200" i="1">
+                                <a:rPr lang="en-US" sz="1760" i="1">
                                   <a:latin typeface="Cambria Math" panose="02040503050406030204" pitchFamily="18" charset="0"/>
                                   <a:ea typeface="Cambria Math" panose="02040503050406030204" pitchFamily="18" charset="0"/>
                                 </a:rPr>
                                 <m:t>𝜔</m:t>
                               </m:r>
                               <m:r>
-                                <a:rPr lang="en-US" sz="2200" i="1">
+                                <a:rPr lang="en-US" sz="1760" i="1">
                                   <a:latin typeface="Cambria Math" panose="02040503050406030204" pitchFamily="18" charset="0"/>
                                   <a:ea typeface="Cambria Math" panose="02040503050406030204" pitchFamily="18" charset="0"/>
                                 </a:rPr>
@@ -6954,7 +7438,7 @@
                             </m:sup>
                           </m:sSup>
                           <m:r>
-                            <a:rPr lang="en-US" sz="2200" b="0" i="1">
+                            <a:rPr lang="en-US" sz="1760" b="0" i="1">
                               <a:latin typeface="Cambria Math" panose="02040503050406030204" pitchFamily="18" charset="0"/>
                               <a:ea typeface="Cambria Math" panose="02040503050406030204" pitchFamily="18" charset="0"/>
                             </a:rPr>
@@ -6963,14 +7447,14 @@
                           <m:sSup>
                             <m:sSupPr>
                               <m:ctrlPr>
-                                <a:rPr lang="en-US" sz="2200" i="1">
+                                <a:rPr lang="en-US" sz="1760" i="1">
                                   <a:latin typeface="Cambria Math" panose="02040503050406030204" pitchFamily="18" charset="0"/>
                                 </a:rPr>
                               </m:ctrlPr>
                             </m:sSupPr>
                             <m:e>
                               <m:r>
-                                <a:rPr lang="en-US" sz="2200" i="1">
+                                <a:rPr lang="en-US" sz="1760" i="1">
                                   <a:latin typeface="Cambria Math" panose="02040503050406030204" pitchFamily="18" charset="0"/>
                                 </a:rPr>
                                 <m:t>𝑒</m:t>
@@ -6978,26 +7462,26 @@
                             </m:e>
                             <m:sup>
                               <m:r>
-                                <a:rPr lang="en-US" sz="2200" i="1">
+                                <a:rPr lang="en-US" sz="1760" i="1">
                                   <a:latin typeface="Cambria Math" panose="02040503050406030204" pitchFamily="18" charset="0"/>
                                 </a:rPr>
                                 <m:t>−</m:t>
                               </m:r>
                               <m:r>
-                                <a:rPr lang="en-US" sz="2200" i="1">
+                                <a:rPr lang="en-US" sz="1760" i="1">
                                   <a:latin typeface="Cambria Math" panose="02040503050406030204" pitchFamily="18" charset="0"/>
                                 </a:rPr>
                                 <m:t>𝑗</m:t>
                               </m:r>
                               <m:r>
-                                <a:rPr lang="en-US" sz="2200" i="1">
+                                <a:rPr lang="en-US" sz="1760" i="1">
                                   <a:latin typeface="Cambria Math" panose="02040503050406030204" pitchFamily="18" charset="0"/>
                                   <a:ea typeface="Cambria Math" panose="02040503050406030204" pitchFamily="18" charset="0"/>
                                 </a:rPr>
                                 <m:t>𝜔</m:t>
                               </m:r>
                               <m:r>
-                                <a:rPr lang="en-US" sz="2200" i="1">
+                                <a:rPr lang="en-US" sz="1760" i="1">
                                   <a:latin typeface="Cambria Math" panose="02040503050406030204" pitchFamily="18" charset="0"/>
                                   <a:ea typeface="Cambria Math" panose="02040503050406030204" pitchFamily="18" charset="0"/>
                                 </a:rPr>
@@ -7010,13 +7494,13 @@
                     </m:oMath>
                   </m:oMathPara>
                 </a14:m>
-                <a:endParaRPr lang="en-US" sz="2200"/>
+                <a:endParaRPr lang="en-US" sz="1760"/>
               </a:p>
               <a:p>
                 <a:pPr marL="0" indent="0">
                   <a:buNone/>
                 </a:pPr>
-                <a:endParaRPr lang="en-US" sz="2200"/>
+                <a:endParaRPr lang="en-US" sz="1760"/>
               </a:p>
               <a:p>
                 <a:pPr marL="0" indent="0">
@@ -7031,7 +7515,7 @@
                       <m:func>
                         <m:funcPr>
                           <m:ctrlPr>
-                            <a:rPr lang="en-US" sz="2200" i="1">
+                            <a:rPr lang="en-US" sz="1760" i="1">
                               <a:latin typeface="Cambria Math" panose="02040503050406030204" pitchFamily="18" charset="0"/>
                             </a:rPr>
                           </m:ctrlPr>
@@ -7041,7 +7525,7 @@
                             <m:rPr>
                               <m:sty m:val="p"/>
                             </m:rPr>
-                            <a:rPr lang="en-US" sz="2200" b="0" i="0">
+                            <a:rPr lang="en-US" sz="1760" b="0" i="0">
                               <a:latin typeface="Cambria Math" panose="02040503050406030204" pitchFamily="18" charset="0"/>
                             </a:rPr>
                             <m:t>sin</m:t>
@@ -7051,21 +7535,21 @@
                           <m:d>
                             <m:dPr>
                               <m:ctrlPr>
-                                <a:rPr lang="en-US" sz="2200" i="1">
+                                <a:rPr lang="en-US" sz="1760" i="1">
                                   <a:latin typeface="Cambria Math" panose="02040503050406030204" pitchFamily="18" charset="0"/>
                                 </a:rPr>
                               </m:ctrlPr>
                             </m:dPr>
                             <m:e>
                               <m:r>
-                                <a:rPr lang="en-US" sz="2200" i="1">
+                                <a:rPr lang="en-US" sz="1760" i="1">
                                   <a:latin typeface="Cambria Math" panose="02040503050406030204" pitchFamily="18" charset="0"/>
                                   <a:ea typeface="Cambria Math" panose="02040503050406030204" pitchFamily="18" charset="0"/>
                                 </a:rPr>
                                 <m:t>𝜔</m:t>
                               </m:r>
                               <m:r>
-                                <a:rPr lang="en-US" sz="2200" i="1">
+                                <a:rPr lang="en-US" sz="1760" i="1">
                                   <a:latin typeface="Cambria Math" panose="02040503050406030204" pitchFamily="18" charset="0"/>
                                   <a:ea typeface="Cambria Math" panose="02040503050406030204" pitchFamily="18" charset="0"/>
                                 </a:rPr>
@@ -7076,7 +7560,7 @@
                         </m:e>
                       </m:func>
                       <m:r>
-                        <a:rPr lang="en-US" sz="2200" i="1">
+                        <a:rPr lang="en-US" sz="1760" i="1">
                           <a:latin typeface="Cambria Math" panose="02040503050406030204" pitchFamily="18" charset="0"/>
                           <a:ea typeface="Cambria Math" panose="02040503050406030204" pitchFamily="18" charset="0"/>
                         </a:rPr>
@@ -7085,7 +7569,7 @@
                       <m:f>
                         <m:fPr>
                           <m:ctrlPr>
-                            <a:rPr lang="en-US" sz="2200" i="1">
+                            <a:rPr lang="en-US" sz="1760" i="1">
                               <a:latin typeface="Cambria Math" panose="02040503050406030204" pitchFamily="18" charset="0"/>
                               <a:ea typeface="Cambria Math" panose="02040503050406030204" pitchFamily="18" charset="0"/>
                             </a:rPr>
@@ -7093,7 +7577,7 @@
                         </m:fPr>
                         <m:num>
                           <m:r>
-                            <a:rPr lang="en-US" sz="2200" i="1">
+                            <a:rPr lang="en-US" sz="1760" i="1">
                               <a:latin typeface="Cambria Math" panose="02040503050406030204" pitchFamily="18" charset="0"/>
                               <a:ea typeface="Cambria Math" panose="02040503050406030204" pitchFamily="18" charset="0"/>
                             </a:rPr>
@@ -7102,14 +7586,14 @@
                         </m:num>
                         <m:den>
                           <m:r>
-                            <a:rPr lang="en-US" sz="2200" i="1">
+                            <a:rPr lang="en-US" sz="1760" i="1">
                               <a:latin typeface="Cambria Math" panose="02040503050406030204" pitchFamily="18" charset="0"/>
                               <a:ea typeface="Cambria Math" panose="02040503050406030204" pitchFamily="18" charset="0"/>
                             </a:rPr>
                             <m:t>2</m:t>
                           </m:r>
                           <m:r>
-                            <a:rPr lang="en-US" sz="2200" b="0" i="1">
+                            <a:rPr lang="en-US" sz="1760" b="0" i="1">
                               <a:latin typeface="Cambria Math" panose="02040503050406030204" pitchFamily="18" charset="0"/>
                               <a:ea typeface="Cambria Math" panose="02040503050406030204" pitchFamily="18" charset="0"/>
                             </a:rPr>
@@ -7120,7 +7604,7 @@
                       <m:d>
                         <m:dPr>
                           <m:ctrlPr>
-                            <a:rPr lang="en-US" sz="2200" i="1">
+                            <a:rPr lang="en-US" sz="1760" i="1">
                               <a:latin typeface="Cambria Math" panose="02040503050406030204" pitchFamily="18" charset="0"/>
                               <a:ea typeface="Cambria Math" panose="02040503050406030204" pitchFamily="18" charset="0"/>
                             </a:rPr>
@@ -7130,14 +7614,14 @@
                           <m:sSup>
                             <m:sSupPr>
                               <m:ctrlPr>
-                                <a:rPr lang="en-US" sz="2200" i="1">
+                                <a:rPr lang="en-US" sz="1760" i="1">
                                   <a:latin typeface="Cambria Math" panose="02040503050406030204" pitchFamily="18" charset="0"/>
                                 </a:rPr>
                               </m:ctrlPr>
                             </m:sSupPr>
                             <m:e>
                               <m:r>
-                                <a:rPr lang="en-US" sz="2200" i="1">
+                                <a:rPr lang="en-US" sz="1760" i="1">
                                   <a:latin typeface="Cambria Math" panose="02040503050406030204" pitchFamily="18" charset="0"/>
                                 </a:rPr>
                                 <m:t>𝑒</m:t>
@@ -7145,20 +7629,20 @@
                             </m:e>
                             <m:sup>
                               <m:r>
-                                <a:rPr lang="en-US" sz="2200" i="1">
+                                <a:rPr lang="en-US" sz="1760" i="1">
                                   <a:latin typeface="Cambria Math" panose="02040503050406030204" pitchFamily="18" charset="0"/>
                                 </a:rPr>
                                 <m:t>𝑗</m:t>
                               </m:r>
                               <m:r>
-                                <a:rPr lang="en-US" sz="2200" i="1">
+                                <a:rPr lang="en-US" sz="1760" i="1">
                                   <a:latin typeface="Cambria Math" panose="02040503050406030204" pitchFamily="18" charset="0"/>
                                   <a:ea typeface="Cambria Math" panose="02040503050406030204" pitchFamily="18" charset="0"/>
                                 </a:rPr>
                                 <m:t>𝜔</m:t>
                               </m:r>
                               <m:r>
-                                <a:rPr lang="en-US" sz="2200" i="1">
+                                <a:rPr lang="en-US" sz="1760" i="1">
                                   <a:latin typeface="Cambria Math" panose="02040503050406030204" pitchFamily="18" charset="0"/>
                                   <a:ea typeface="Cambria Math" panose="02040503050406030204" pitchFamily="18" charset="0"/>
                                 </a:rPr>
@@ -7167,7 +7651,7 @@
                             </m:sup>
                           </m:sSup>
                           <m:r>
-                            <a:rPr lang="en-US" sz="2200" b="0" i="1">
+                            <a:rPr lang="en-US" sz="1760" b="0" i="1">
                               <a:latin typeface="Cambria Math" panose="02040503050406030204" pitchFamily="18" charset="0"/>
                               <a:ea typeface="Cambria Math" panose="02040503050406030204" pitchFamily="18" charset="0"/>
                             </a:rPr>
@@ -7176,14 +7660,14 @@
                           <m:sSup>
                             <m:sSupPr>
                               <m:ctrlPr>
-                                <a:rPr lang="en-US" sz="2200" i="1">
+                                <a:rPr lang="en-US" sz="1760" i="1">
                                   <a:latin typeface="Cambria Math" panose="02040503050406030204" pitchFamily="18" charset="0"/>
                                 </a:rPr>
                               </m:ctrlPr>
                             </m:sSupPr>
                             <m:e>
                               <m:r>
-                                <a:rPr lang="en-US" sz="2200" i="1">
+                                <a:rPr lang="en-US" sz="1760" i="1">
                                   <a:latin typeface="Cambria Math" panose="02040503050406030204" pitchFamily="18" charset="0"/>
                                 </a:rPr>
                                 <m:t>𝑒</m:t>
@@ -7191,26 +7675,26 @@
                             </m:e>
                             <m:sup>
                               <m:r>
-                                <a:rPr lang="en-US" sz="2200" i="1">
+                                <a:rPr lang="en-US" sz="1760" i="1">
                                   <a:latin typeface="Cambria Math" panose="02040503050406030204" pitchFamily="18" charset="0"/>
                                 </a:rPr>
                                 <m:t>−</m:t>
                               </m:r>
                               <m:r>
-                                <a:rPr lang="en-US" sz="2200" i="1">
+                                <a:rPr lang="en-US" sz="1760" i="1">
                                   <a:latin typeface="Cambria Math" panose="02040503050406030204" pitchFamily="18" charset="0"/>
                                 </a:rPr>
                                 <m:t>𝑗</m:t>
                               </m:r>
                               <m:r>
-                                <a:rPr lang="en-US" sz="2200" i="1">
+                                <a:rPr lang="en-US" sz="1760" i="1">
                                   <a:latin typeface="Cambria Math" panose="02040503050406030204" pitchFamily="18" charset="0"/>
                                   <a:ea typeface="Cambria Math" panose="02040503050406030204" pitchFamily="18" charset="0"/>
                                 </a:rPr>
                                 <m:t>𝜔</m:t>
                               </m:r>
                               <m:r>
-                                <a:rPr lang="en-US" sz="2200" i="1">
+                                <a:rPr lang="en-US" sz="1760" i="1">
                                   <a:latin typeface="Cambria Math" panose="02040503050406030204" pitchFamily="18" charset="0"/>
                                   <a:ea typeface="Cambria Math" panose="02040503050406030204" pitchFamily="18" charset="0"/>
                                 </a:rPr>
@@ -7223,13 +7707,13 @@
                     </m:oMath>
                   </m:oMathPara>
                 </a14:m>
-                <a:endParaRPr lang="en-US" sz="2200"/>
+                <a:endParaRPr lang="en-US" sz="1760"/>
               </a:p>
               <a:p>
                 <a:pPr marL="0" indent="0">
                   <a:buNone/>
                 </a:pPr>
-                <a:endParaRPr lang="en-US" sz="2200"/>
+                <a:endParaRPr lang="en-US" sz="1760"/>
               </a:p>
             </p:txBody>
           </p:sp>
@@ -7309,7 +7793,7 @@
               <a:lstStyle/>
               <a:p>
                 <a:r>
-                  <a:rPr lang="en-US" sz="2400"/>
+                  <a:rPr lang="en-US" sz="1920"/>
                   <a:t>Also, </a:t>
                 </a:r>
               </a:p>
@@ -7326,7 +7810,7 @@
                       <m:func>
                         <m:funcPr>
                           <m:ctrlPr>
-                            <a:rPr lang="en-US" sz="2400" i="1">
+                            <a:rPr lang="en-US" sz="1920" i="1">
                               <a:latin typeface="Cambria Math" panose="02040503050406030204" pitchFamily="18" charset="0"/>
                             </a:rPr>
                           </m:ctrlPr>
@@ -7336,7 +7820,7 @@
                             <m:rPr>
                               <m:sty m:val="p"/>
                             </m:rPr>
-                            <a:rPr lang="en-US" sz="2400">
+                            <a:rPr lang="en-US" sz="1920">
                               <a:latin typeface="Cambria Math" panose="02040503050406030204" pitchFamily="18" charset="0"/>
                             </a:rPr>
                             <m:t>cos</m:t>
@@ -7346,21 +7830,21 @@
                           <m:d>
                             <m:dPr>
                               <m:ctrlPr>
-                                <a:rPr lang="en-US" sz="2400" i="1">
+                                <a:rPr lang="en-US" sz="1920" i="1">
                                   <a:latin typeface="Cambria Math" panose="02040503050406030204" pitchFamily="18" charset="0"/>
                                 </a:rPr>
                               </m:ctrlPr>
                             </m:dPr>
                             <m:e>
                               <m:r>
-                                <a:rPr lang="en-US" sz="2400" i="1">
+                                <a:rPr lang="en-US" sz="1920" i="1">
                                   <a:latin typeface="Cambria Math" panose="02040503050406030204" pitchFamily="18" charset="0"/>
                                   <a:ea typeface="Cambria Math" panose="02040503050406030204" pitchFamily="18" charset="0"/>
                                 </a:rPr>
                                 <m:t>𝜔</m:t>
                               </m:r>
                               <m:r>
-                                <a:rPr lang="en-US" sz="2400" i="1">
+                                <a:rPr lang="en-US" sz="1920" i="1">
                                   <a:latin typeface="Cambria Math" panose="02040503050406030204" pitchFamily="18" charset="0"/>
                                   <a:ea typeface="Cambria Math" panose="02040503050406030204" pitchFamily="18" charset="0"/>
                                 </a:rPr>
@@ -7371,21 +7855,21 @@
                         </m:e>
                       </m:func>
                       <m:r>
-                        <a:rPr lang="en-US" sz="2400" i="1">
+                        <a:rPr lang="en-US" sz="1920" i="1">
                           <a:latin typeface="Cambria Math" panose="02040503050406030204" pitchFamily="18" charset="0"/>
                           <a:ea typeface="Cambria Math" panose="02040503050406030204" pitchFamily="18" charset="0"/>
                         </a:rPr>
                         <m:t>=</m:t>
                       </m:r>
                       <m:r>
-                        <a:rPr lang="en-US" sz="2400" b="0" i="1">
+                        <a:rPr lang="en-US" sz="1920" b="0" i="1">
                           <a:latin typeface="Cambria Math" panose="02040503050406030204" pitchFamily="18" charset="0"/>
                           <a:ea typeface="Cambria Math" panose="02040503050406030204" pitchFamily="18" charset="0"/>
                         </a:rPr>
                         <m:t>2</m:t>
                       </m:r>
                       <m:r>
-                        <a:rPr lang="en-US" sz="2400" b="0" i="1">
+                        <a:rPr lang="en-US" sz="1920" b="0" i="1">
                           <a:latin typeface="Cambria Math" panose="02040503050406030204" pitchFamily="18" charset="0"/>
                           <a:ea typeface="Cambria Math" panose="02040503050406030204" pitchFamily="18" charset="0"/>
                         </a:rPr>
@@ -7396,7 +7880,7 @@
                           <m:begChr m:val="{"/>
                           <m:endChr m:val="}"/>
                           <m:ctrlPr>
-                            <a:rPr lang="en-US" sz="2400" b="0" i="1">
+                            <a:rPr lang="en-US" sz="1920" b="0" i="1">
                               <a:latin typeface="Cambria Math" panose="02040503050406030204" pitchFamily="18" charset="0"/>
                               <a:ea typeface="Cambria Math" panose="02040503050406030204" pitchFamily="18" charset="0"/>
                             </a:rPr>
@@ -7406,14 +7890,14 @@
                           <m:sSup>
                             <m:sSupPr>
                               <m:ctrlPr>
-                                <a:rPr lang="en-US" sz="2400" i="1">
+                                <a:rPr lang="en-US" sz="1920" i="1">
                                   <a:latin typeface="Cambria Math" panose="02040503050406030204" pitchFamily="18" charset="0"/>
                                 </a:rPr>
                               </m:ctrlPr>
                             </m:sSupPr>
                             <m:e>
                               <m:r>
-                                <a:rPr lang="en-US" sz="2400" i="1">
+                                <a:rPr lang="en-US" sz="1920" i="1">
                                   <a:latin typeface="Cambria Math" panose="02040503050406030204" pitchFamily="18" charset="0"/>
                                 </a:rPr>
                                 <m:t>𝑒</m:t>
@@ -7421,20 +7905,20 @@
                             </m:e>
                             <m:sup>
                               <m:r>
-                                <a:rPr lang="en-US" sz="2400" i="1">
+                                <a:rPr lang="en-US" sz="1920" i="1">
                                   <a:latin typeface="Cambria Math" panose="02040503050406030204" pitchFamily="18" charset="0"/>
                                 </a:rPr>
                                 <m:t>𝑗</m:t>
                               </m:r>
                               <m:r>
-                                <a:rPr lang="en-US" sz="2400" i="1">
+                                <a:rPr lang="en-US" sz="1920" i="1">
                                   <a:latin typeface="Cambria Math" panose="02040503050406030204" pitchFamily="18" charset="0"/>
                                   <a:ea typeface="Cambria Math" panose="02040503050406030204" pitchFamily="18" charset="0"/>
                                 </a:rPr>
                                 <m:t>𝜔</m:t>
                               </m:r>
                               <m:r>
-                                <a:rPr lang="en-US" sz="2400" i="1">
+                                <a:rPr lang="en-US" sz="1920" i="1">
                                   <a:latin typeface="Cambria Math" panose="02040503050406030204" pitchFamily="18" charset="0"/>
                                   <a:ea typeface="Cambria Math" panose="02040503050406030204" pitchFamily="18" charset="0"/>
                                 </a:rPr>
@@ -7447,7 +7931,7 @@
                     </m:oMath>
                   </m:oMathPara>
                 </a14:m>
-                <a:endParaRPr lang="en-US" sz="2400"/>
+                <a:endParaRPr lang="en-US" sz="1920"/>
               </a:p>
               <a:p>
                 <a:pPr marL="0" indent="0">
@@ -7462,7 +7946,7 @@
                       <m:func>
                         <m:funcPr>
                           <m:ctrlPr>
-                            <a:rPr lang="en-US" sz="2400" b="0" i="1">
+                            <a:rPr lang="en-US" sz="1920" b="0" i="1">
                               <a:latin typeface="Cambria Math" panose="02040503050406030204" pitchFamily="18" charset="0"/>
                               <a:ea typeface="Cambria Math" panose="02040503050406030204" pitchFamily="18" charset="0"/>
                             </a:rPr>
@@ -7473,7 +7957,7 @@
                             <m:rPr>
                               <m:sty m:val="p"/>
                             </m:rPr>
-                            <a:rPr lang="en-US" sz="2400" b="0" i="0">
+                            <a:rPr lang="en-US" sz="1920" b="0" i="0">
                               <a:latin typeface="Cambria Math" panose="02040503050406030204" pitchFamily="18" charset="0"/>
                               <a:ea typeface="Cambria Math" panose="02040503050406030204" pitchFamily="18" charset="0"/>
                             </a:rPr>
@@ -7482,28 +7966,28 @@
                         </m:fName>
                         <m:e>
                           <m:r>
-                            <a:rPr lang="en-US" sz="2400" b="0" i="1">
+                            <a:rPr lang="en-US" sz="1920" b="0" i="1">
                               <a:latin typeface="Cambria Math" panose="02040503050406030204" pitchFamily="18" charset="0"/>
                               <a:ea typeface="Cambria Math" panose="02040503050406030204" pitchFamily="18" charset="0"/>
                             </a:rPr>
                             <m:t>(</m:t>
                           </m:r>
                           <m:r>
-                            <a:rPr lang="en-US" sz="2400" b="0" i="1">
+                            <a:rPr lang="en-US" sz="1920" b="0" i="1">
                               <a:latin typeface="Cambria Math" panose="02040503050406030204" pitchFamily="18" charset="0"/>
                               <a:ea typeface="Cambria Math" panose="02040503050406030204" pitchFamily="18" charset="0"/>
                             </a:rPr>
                             <m:t>𝜔</m:t>
                           </m:r>
                           <m:r>
-                            <a:rPr lang="en-US" sz="2400" b="0" i="1">
+                            <a:rPr lang="en-US" sz="1920" b="0" i="1">
                               <a:latin typeface="Cambria Math" panose="02040503050406030204" pitchFamily="18" charset="0"/>
                               <a:ea typeface="Cambria Math" panose="02040503050406030204" pitchFamily="18" charset="0"/>
                             </a:rPr>
                             <m:t>𝑡</m:t>
                           </m:r>
                           <m:r>
-                            <a:rPr lang="en-US" sz="2400" b="0" i="1">
+                            <a:rPr lang="en-US" sz="1920" b="0" i="1">
                               <a:latin typeface="Cambria Math" panose="02040503050406030204" pitchFamily="18" charset="0"/>
                               <a:ea typeface="Cambria Math" panose="02040503050406030204" pitchFamily="18" charset="0"/>
                             </a:rPr>
@@ -7512,28 +7996,28 @@
                         </m:e>
                       </m:func>
                       <m:r>
-                        <a:rPr lang="en-US" sz="2400" i="1">
+                        <a:rPr lang="en-US" sz="1920" i="1">
                           <a:latin typeface="Cambria Math" panose="02040503050406030204" pitchFamily="18" charset="0"/>
                           <a:ea typeface="Cambria Math" panose="02040503050406030204" pitchFamily="18" charset="0"/>
                         </a:rPr>
                         <m:t>=</m:t>
                       </m:r>
                       <m:r>
-                        <a:rPr lang="en-US" sz="2400" b="0" i="1">
+                        <a:rPr lang="en-US" sz="1920" b="0" i="1">
                           <a:latin typeface="Cambria Math" panose="02040503050406030204" pitchFamily="18" charset="0"/>
                           <a:ea typeface="Cambria Math" panose="02040503050406030204" pitchFamily="18" charset="0"/>
                         </a:rPr>
                         <m:t>−</m:t>
                       </m:r>
                       <m:r>
-                        <a:rPr lang="en-US" sz="2400" i="1">
+                        <a:rPr lang="en-US" sz="1920" i="1">
                           <a:latin typeface="Cambria Math" panose="02040503050406030204" pitchFamily="18" charset="0"/>
                           <a:ea typeface="Cambria Math" panose="02040503050406030204" pitchFamily="18" charset="0"/>
                         </a:rPr>
                         <m:t>2</m:t>
                       </m:r>
                       <m:r>
-                        <a:rPr lang="en-US" sz="2400" b="0" i="1">
+                        <a:rPr lang="en-US" sz="1920" b="0" i="1">
                           <a:latin typeface="Cambria Math" panose="02040503050406030204" pitchFamily="18" charset="0"/>
                           <a:ea typeface="Cambria Math" panose="02040503050406030204" pitchFamily="18" charset="0"/>
                         </a:rPr>
@@ -7544,7 +8028,7 @@
                           <m:begChr m:val="{"/>
                           <m:endChr m:val="}"/>
                           <m:ctrlPr>
-                            <a:rPr lang="en-US" sz="2400" i="1">
+                            <a:rPr lang="en-US" sz="1920" i="1">
                               <a:latin typeface="Cambria Math" panose="02040503050406030204" pitchFamily="18" charset="0"/>
                               <a:ea typeface="Cambria Math" panose="02040503050406030204" pitchFamily="18" charset="0"/>
                             </a:rPr>
@@ -7554,14 +8038,14 @@
                           <m:sSup>
                             <m:sSupPr>
                               <m:ctrlPr>
-                                <a:rPr lang="en-US" sz="2400" i="1">
+                                <a:rPr lang="en-US" sz="1920" i="1">
                                   <a:latin typeface="Cambria Math" panose="02040503050406030204" pitchFamily="18" charset="0"/>
                                 </a:rPr>
                               </m:ctrlPr>
                             </m:sSupPr>
                             <m:e>
                               <m:r>
-                                <a:rPr lang="en-US" sz="2400" i="1">
+                                <a:rPr lang="en-US" sz="1920" i="1">
                                   <a:latin typeface="Cambria Math" panose="02040503050406030204" pitchFamily="18" charset="0"/>
                                 </a:rPr>
                                 <m:t>𝑒</m:t>
@@ -7569,20 +8053,20 @@
                             </m:e>
                             <m:sup>
                               <m:r>
-                                <a:rPr lang="en-US" sz="2400" i="1">
+                                <a:rPr lang="en-US" sz="1920" i="1">
                                   <a:latin typeface="Cambria Math" panose="02040503050406030204" pitchFamily="18" charset="0"/>
                                 </a:rPr>
                                 <m:t>𝑗</m:t>
                               </m:r>
                               <m:r>
-                                <a:rPr lang="en-US" sz="2400" i="1">
+                                <a:rPr lang="en-US" sz="1920" i="1">
                                   <a:latin typeface="Cambria Math" panose="02040503050406030204" pitchFamily="18" charset="0"/>
                                   <a:ea typeface="Cambria Math" panose="02040503050406030204" pitchFamily="18" charset="0"/>
                                 </a:rPr>
                                 <m:t>𝜔</m:t>
                               </m:r>
                               <m:r>
-                                <a:rPr lang="en-US" sz="2400" i="1">
+                                <a:rPr lang="en-US" sz="1920" i="1">
                                   <a:latin typeface="Cambria Math" panose="02040503050406030204" pitchFamily="18" charset="0"/>
                                   <a:ea typeface="Cambria Math" panose="02040503050406030204" pitchFamily="18" charset="0"/>
                                 </a:rPr>
@@ -7595,11 +8079,11 @@
                     </m:oMath>
                   </m:oMathPara>
                 </a14:m>
-                <a:endParaRPr lang="en-US" sz="2400"/>
+                <a:endParaRPr lang="en-US" sz="1920"/>
               </a:p>
               <a:p>
                 <a:r>
-                  <a:rPr lang="en-US" sz="2400"/>
+                  <a:rPr lang="en-US" sz="1920"/>
                   <a:t>If displayed in a complex plane, </a:t>
                 </a:r>
                 <a14:m>
@@ -7607,14 +8091,14 @@
                     <m:sSup>
                       <m:sSupPr>
                         <m:ctrlPr>
-                          <a:rPr lang="en-US" sz="2400" i="1">
+                          <a:rPr lang="en-US" sz="1920" i="1">
                             <a:latin typeface="Cambria Math" panose="02040503050406030204" pitchFamily="18" charset="0"/>
                           </a:rPr>
                         </m:ctrlPr>
                       </m:sSupPr>
                       <m:e>
                         <m:r>
-                          <a:rPr lang="en-US" sz="2400" i="1">
+                          <a:rPr lang="en-US" sz="1920" i="1">
                             <a:latin typeface="Cambria Math" panose="02040503050406030204" pitchFamily="18" charset="0"/>
                           </a:rPr>
                           <m:t>𝑒</m:t>
@@ -7622,20 +8106,20 @@
                       </m:e>
                       <m:sup>
                         <m:r>
-                          <a:rPr lang="en-US" sz="2400" i="1">
+                          <a:rPr lang="en-US" sz="1920" i="1">
                             <a:latin typeface="Cambria Math" panose="02040503050406030204" pitchFamily="18" charset="0"/>
                           </a:rPr>
                           <m:t>𝑗</m:t>
                         </m:r>
                         <m:r>
-                          <a:rPr lang="en-US" sz="2400" i="1">
+                          <a:rPr lang="en-US" sz="1920" i="1">
                             <a:latin typeface="Cambria Math" panose="02040503050406030204" pitchFamily="18" charset="0"/>
                             <a:ea typeface="Cambria Math" panose="02040503050406030204" pitchFamily="18" charset="0"/>
                           </a:rPr>
                           <m:t>𝜔</m:t>
                         </m:r>
                         <m:r>
-                          <a:rPr lang="en-US" sz="2400" i="1">
+                          <a:rPr lang="en-US" sz="1920" i="1">
                             <a:latin typeface="Cambria Math" panose="02040503050406030204" pitchFamily="18" charset="0"/>
                             <a:ea typeface="Cambria Math" panose="02040503050406030204" pitchFamily="18" charset="0"/>
                           </a:rPr>
@@ -7646,13 +8130,13 @@
                   </m:oMath>
                 </a14:m>
                 <a:r>
-                  <a:rPr lang="en-US" sz="2400"/>
+                  <a:rPr lang="en-US" sz="1920"/>
                   <a:t> is a rotating phasor</a:t>
                 </a:r>
               </a:p>
               <a:p>
                 <a:r>
-                  <a:rPr lang="en-US" sz="2400"/>
+                  <a:rPr lang="en-US" sz="1920"/>
                   <a:t>For illustration, see </a:t>
                 </a:r>
               </a:p>
@@ -7661,13 +8145,13 @@
                   <a:buNone/>
                 </a:pPr>
                 <a:r>
-                  <a:rPr lang="en-US" sz="2400">
+                  <a:rPr lang="en-US" sz="1920">
                     <a:hlinkClick r:id="rId3"/>
                   </a:rPr>
                   <a:t>http://spfirst.gatech.edu/chapters/02sines/demos/phasors/index.html</a:t>
                 </a:r>
                 <a:r>
-                  <a:rPr lang="en-US" sz="2400"/>
+                  <a:rPr lang="en-US" sz="1920"/>
                   <a:t> </a:t>
                 </a:r>
               </a:p>
@@ -7720,47 +8204,202 @@
       </mc:AlternateContent>
       <p:sp>
         <p:nvSpPr>
-          <p:cNvPr id="5" name="Slide Number Placeholder 4">
-            <a:extLst>
-              <a:ext uri="{FF2B5EF4-FFF2-40B4-BE49-F238E27FC236}">
-                <a16:creationId xmlns:a16="http://schemas.microsoft.com/office/drawing/2014/main" id="{0D397F3B-426C-422D-BC88-50C88584BA79}"/>
-              </a:ext>
-            </a:extLst>
-          </p:cNvPr>
+          <p:cNvPr id="11" name="DSPIRA 1"/>
           <p:cNvSpPr>
             <a:spLocks noGrp="1"/>
           </p:cNvSpPr>
-          <p:nvPr>
-            <p:ph type="sldNum" sz="quarter" idx="12"/>
-          </p:nvPr>
+          <p:nvPr/>
         </p:nvSpPr>
         <p:spPr>
           <a:xfrm>
-            <a:off x="8610600" y="6152426"/>
-            <a:ext cx="2743200" cy="365125"/>
+            <a:off x="0" y="0"/>
+            <a:ext cx="12192000" cy="342900"/>
           </a:xfrm>
+          <a:prstGeom prst="rect">
+            <a:avLst/>
+          </a:prstGeom>
+          <a:solidFill>
+            <a:srgbClr val="FFFFFF"/>
+          </a:solidFill>
+          <a:ln w="0">
+            <a:noFill/>
+          </a:ln>
+        </p:spPr>
+      </p:sp>
+      <p:sp>
+        <p:nvSpPr>
+          <p:cNvPr id="12" name="DSPIRA 2"/>
+          <p:cNvSpPr>
+            <a:spLocks noGrp="1"/>
+          </p:cNvSpPr>
+          <p:nvPr/>
+        </p:nvSpPr>
+        <p:spPr>
+          <a:xfrm>
+            <a:off x="0" y="7200900"/>
+            <a:ext cx="12192000" cy="342900"/>
+          </a:xfrm>
+          <a:prstGeom prst="rect">
+            <a:avLst/>
+          </a:prstGeom>
+          <a:solidFill>
+            <a:srgbClr val="FFFFFF"/>
+          </a:solidFill>
+          <a:ln w="0">
+            <a:noFill/>
+          </a:ln>
+        </p:spPr>
+      </p:sp>
+      <p:sp>
+        <p:nvSpPr>
+          <p:cNvPr id="13" name="DSPIRA 3"/>
+          <p:cNvSpPr>
+            <a:spLocks noGrp="1"/>
+          </p:cNvSpPr>
+          <p:nvPr/>
+        </p:nvSpPr>
+        <p:spPr>
+          <a:xfrm>
+            <a:off x="228600" y="76200"/>
+            <a:ext cx="4762500" cy="228600"/>
+          </a:xfrm>
+          <a:prstGeom prst="rect">
+            <a:avLst/>
+          </a:prstGeom>
+          <a:noFill/>
+          <a:ln w="0">
+            <a:noFill/>
+          </a:ln>
         </p:spPr>
         <p:txBody>
           <a:bodyPr>
-            <a:normAutofit/>
+            <a:noAutofit/>
           </a:bodyPr>
           <a:lstStyle/>
           <a:p>
             <a:pPr>
-              <a:spcAft>
-                <a:spcPts val="600"/>
-              </a:spcAft>
+              <a:defRPr sz="1200" b="1">
+                <a:solidFill>
+                  <a:srgbClr val="002855"/>
+                </a:solidFill>
+                <a:latin typeface="Arial"/>
+                <a:ea typeface="Arial"/>
+                <a:cs typeface="Arial"/>
+              </a:defRPr>
             </a:pPr>
-            <a:fld id="{6CB4759B-89EF-486F-A495-36988C5D6AB8}" type="slidenum">
-              <a:rPr lang="en-US" smtClean="0"/>
-              <a:pPr>
-                <a:spcAft>
-                  <a:spcPts val="600"/>
-                </a:spcAft>
-              </a:pPr>
-              <a:t>5</a:t>
-            </a:fld>
-            <a:endParaRPr lang="en-US"/>
+            <a:r>
+              <a:rPr sz="1200" b="1">
+                <a:solidFill>
+                  <a:srgbClr val="002855"/>
+                </a:solidFill>
+                <a:latin typeface="Arial"/>
+                <a:ea typeface="Arial"/>
+                <a:cs typeface="Arial"/>
+              </a:rPr>
+              <a:t>WVU DSPIRA</a:t>
+            </a:r>
+          </a:p>
+        </p:txBody>
+      </p:sp>
+      <p:sp>
+        <p:nvSpPr>
+          <p:cNvPr id="14" name="DSPIRA 4"/>
+          <p:cNvSpPr>
+            <a:spLocks noGrp="1"/>
+          </p:cNvSpPr>
+          <p:nvPr/>
+        </p:nvSpPr>
+        <p:spPr>
+          <a:xfrm>
+            <a:off x="228600" y="7277100"/>
+            <a:ext cx="6667500" cy="228600"/>
+          </a:xfrm>
+          <a:prstGeom prst="rect">
+            <a:avLst/>
+          </a:prstGeom>
+          <a:noFill/>
+          <a:ln w="0">
+            <a:noFill/>
+          </a:ln>
+        </p:spPr>
+        <p:txBody>
+          <a:bodyPr>
+            <a:noAutofit/>
+          </a:bodyPr>
+          <a:lstStyle/>
+          <a:p>
+            <a:pPr>
+              <a:defRPr sz="900" b="0">
+                <a:solidFill>
+                  <a:srgbClr val="002855"/>
+                </a:solidFill>
+                <a:latin typeface="Arial"/>
+                <a:ea typeface="Arial"/>
+                <a:cs typeface="Arial"/>
+              </a:defRPr>
+            </a:pPr>
+            <a:r>
+              <a:rPr sz="900" b="0">
+                <a:solidFill>
+                  <a:srgbClr val="002855"/>
+                </a:solidFill>
+                <a:latin typeface="Arial"/>
+                <a:ea typeface="Arial"/>
+                <a:cs typeface="Arial"/>
+              </a:rPr>
+              <a:t>wvurail.org/dspira</a:t>
+            </a:r>
+          </a:p>
+        </p:txBody>
+      </p:sp>
+      <p:sp>
+        <p:nvSpPr>
+          <p:cNvPr id="15" name="DSPIRA 5"/>
+          <p:cNvSpPr>
+            <a:spLocks noGrp="1"/>
+          </p:cNvSpPr>
+          <p:nvPr/>
+        </p:nvSpPr>
+        <p:spPr>
+          <a:xfrm>
+            <a:off x="11191875" y="7277100"/>
+            <a:ext cx="762000" cy="228600"/>
+          </a:xfrm>
+          <a:prstGeom prst="rect">
+            <a:avLst/>
+          </a:prstGeom>
+          <a:noFill/>
+          <a:ln w="0">
+            <a:noFill/>
+          </a:ln>
+        </p:spPr>
+        <p:txBody>
+          <a:bodyPr>
+            <a:noAutofit/>
+          </a:bodyPr>
+          <a:lstStyle/>
+          <a:p>
+            <a:pPr>
+              <a:defRPr sz="900" b="0">
+                <a:solidFill>
+                  <a:srgbClr val="002855"/>
+                </a:solidFill>
+                <a:latin typeface="Arial"/>
+                <a:ea typeface="Arial"/>
+                <a:cs typeface="Arial"/>
+              </a:defRPr>
+            </a:pPr>
+            <a:r>
+              <a:rPr sz="900" b="0">
+                <a:solidFill>
+                  <a:srgbClr val="002855"/>
+                </a:solidFill>
+                <a:latin typeface="Arial"/>
+                <a:ea typeface="Arial"/>
+                <a:cs typeface="Arial"/>
+              </a:rPr>
+              <a:t>5 of 7</a:t>
+            </a:r>
           </a:p>
         </p:txBody>
       </p:sp>
@@ -7827,7 +8466,7 @@
         </p:nvSpPr>
         <p:spPr>
           <a:xfrm>
-            <a:off x="0" y="0"/>
+            <a:off x="0" y="342900"/>
             <a:ext cx="4059050" cy="6858000"/>
           </a:xfrm>
           <a:prstGeom prst="rect">
@@ -7877,7 +8516,7 @@
               <a:tabLst/>
               <a:defRPr/>
             </a:pPr>
-            <a:endParaRPr kumimoji="0" lang="en-US" sz="1800" b="0" i="0" u="none" strike="noStrike" kern="1200" cap="none" spc="0" normalizeH="0" baseline="0" noProof="0">
+            <a:endParaRPr kumimoji="0" lang="en-US" sz="1440" b="0" i="0" u="none" strike="noStrike" kern="1200" cap="none" spc="0" normalizeH="0" baseline="0" noProof="0">
               <a:ln>
                 <a:noFill/>
               </a:ln>
@@ -7887,7 +8526,7 @@
               <a:effectLst/>
               <a:uLnTx/>
               <a:uFillTx/>
-              <a:latin typeface="Calibri" panose="020F0502020204030204"/>
+              <a:latin typeface="Arial" panose="020F0502020204030204"/>
               <a:ea typeface="+mn-ea"/>
               <a:cs typeface="+mn-cs"/>
             </a:endParaRPr>
@@ -7919,7 +8558,7 @@
         </p:nvCxnSpPr>
         <p:spPr>
           <a:xfrm>
-            <a:off x="8129871" y="1412488"/>
+            <a:off x="8129871" y="1755388"/>
             <a:ext cx="0" cy="3657600"/>
           </a:xfrm>
           <a:prstGeom prst="line">
@@ -7967,7 +8606,7 @@
         </p:nvSpPr>
         <p:spPr>
           <a:xfrm>
-            <a:off x="838200" y="1412488"/>
+            <a:off x="838200" y="1755388"/>
             <a:ext cx="2899189" cy="4363844"/>
           </a:xfrm>
         </p:spPr>
@@ -7978,7 +8617,7 @@
           <a:lstStyle/>
           <a:p>
             <a:r>
-              <a:rPr lang="en-US" sz="4000">
+              <a:rPr lang="en-US" sz="3200">
                 <a:solidFill>
                   <a:srgbClr val="FFFFFF"/>
                 </a:solidFill>
@@ -8019,7 +8658,7 @@
               <a:lstStyle/>
               <a:p>
                 <a:r>
-                  <a:rPr lang="en-US" sz="2000" dirty="0"/>
+                  <a:rPr lang="en-US" sz="1600" dirty="0"/>
                   <a:t>On a single period a real values function can be represented as a series of complex exponential functions</a:t>
                 </a:r>
               </a:p>
@@ -8028,7 +8667,7 @@
                   <a:buNone/>
                 </a:pPr>
                 <a:r>
-                  <a:rPr lang="en-US" sz="2000" dirty="0"/>
+                  <a:rPr lang="en-US" sz="1600" dirty="0"/>
                   <a:t> </a:t>
                 </a:r>
               </a:p>
@@ -8043,7 +8682,7 @@
                     </m:oMathParaPr>
                     <m:oMath xmlns:m="http://schemas.openxmlformats.org/officeDocument/2006/math">
                       <m:r>
-                        <a:rPr lang="en-US" sz="2000" b="0" i="1">
+                        <a:rPr lang="en-US" sz="1600" b="0" i="1">
                           <a:latin typeface="Cambria Math" panose="02040503050406030204" pitchFamily="18" charset="0"/>
                         </a:rPr>
                         <m:t>𝑥</m:t>
@@ -8051,14 +8690,14 @@
                       <m:d>
                         <m:dPr>
                           <m:ctrlPr>
-                            <a:rPr lang="en-US" sz="2000" b="0" i="1">
+                            <a:rPr lang="en-US" sz="1600" b="0" i="1">
                               <a:latin typeface="Cambria Math" panose="02040503050406030204" pitchFamily="18" charset="0"/>
                             </a:rPr>
                           </m:ctrlPr>
                         </m:dPr>
                         <m:e>
                           <m:r>
-                            <a:rPr lang="en-US" sz="2000" b="0" i="1">
+                            <a:rPr lang="en-US" sz="1600" b="0" i="1">
                               <a:latin typeface="Cambria Math" panose="02040503050406030204" pitchFamily="18" charset="0"/>
                             </a:rPr>
                             <m:t>𝑡</m:t>
@@ -8066,7 +8705,7 @@
                         </m:e>
                       </m:d>
                       <m:r>
-                        <a:rPr lang="en-US" sz="2000" b="0" i="1">
+                        <a:rPr lang="en-US" sz="1600" b="0" i="1">
                           <a:latin typeface="Cambria Math" panose="02040503050406030204" pitchFamily="18" charset="0"/>
                         </a:rPr>
                         <m:t>=</m:t>
@@ -8075,7 +8714,7 @@
                         <m:naryPr>
                           <m:chr m:val="∑"/>
                           <m:ctrlPr>
-                            <a:rPr lang="en-US" sz="2000" b="0" i="1">
+                            <a:rPr lang="en-US" sz="1600" b="0" i="1">
                               <a:latin typeface="Cambria Math" panose="02040503050406030204" pitchFamily="18" charset="0"/>
                             </a:rPr>
                           </m:ctrlPr>
@@ -8085,13 +8724,13 @@
                             <m:rPr>
                               <m:brk m:alnAt="23"/>
                             </m:rPr>
-                            <a:rPr lang="en-US" sz="2000" b="0" i="1">
+                            <a:rPr lang="en-US" sz="1600" b="0" i="1">
                               <a:latin typeface="Cambria Math" panose="02040503050406030204" pitchFamily="18" charset="0"/>
                             </a:rPr>
                             <m:t>𝑘</m:t>
                           </m:r>
                           <m:r>
-                            <a:rPr lang="en-US" sz="2000" b="0" i="1">
+                            <a:rPr lang="en-US" sz="1600" b="0" i="1">
                               <a:latin typeface="Cambria Math" panose="02040503050406030204" pitchFamily="18" charset="0"/>
                             </a:rPr>
                             <m:t>=−∞</m:t>
@@ -8099,13 +8738,13 @@
                         </m:sub>
                         <m:sup>
                           <m:r>
-                            <a:rPr lang="en-US" sz="2000" b="0" i="1">
+                            <a:rPr lang="en-US" sz="1600" b="0" i="1">
                               <a:latin typeface="Cambria Math" panose="02040503050406030204" pitchFamily="18" charset="0"/>
                             </a:rPr>
                             <m:t>+</m:t>
                           </m:r>
                           <m:r>
-                            <a:rPr lang="en-US" sz="2000" b="0" i="1">
+                            <a:rPr lang="en-US" sz="1600" b="0" i="1">
                               <a:latin typeface="Cambria Math" panose="02040503050406030204" pitchFamily="18" charset="0"/>
                               <a:ea typeface="Cambria Math" panose="02040503050406030204" pitchFamily="18" charset="0"/>
                             </a:rPr>
@@ -8116,14 +8755,14 @@
                           <m:sSub>
                             <m:sSubPr>
                               <m:ctrlPr>
-                                <a:rPr lang="en-US" sz="2000" b="0" i="1">
+                                <a:rPr lang="en-US" sz="1600" b="0" i="1">
                                   <a:latin typeface="Cambria Math" panose="02040503050406030204" pitchFamily="18" charset="0"/>
                                 </a:rPr>
                               </m:ctrlPr>
                             </m:sSubPr>
                             <m:e>
                               <m:r>
-                                <a:rPr lang="en-US" sz="2000" b="0" i="1">
+                                <a:rPr lang="en-US" sz="1600" b="0" i="1">
                                   <a:latin typeface="Cambria Math" panose="02040503050406030204" pitchFamily="18" charset="0"/>
                                 </a:rPr>
                                 <m:t>𝑎</m:t>
@@ -8131,7 +8770,7 @@
                             </m:e>
                             <m:sub>
                               <m:r>
-                                <a:rPr lang="en-US" sz="2000" b="0" i="1">
+                                <a:rPr lang="en-US" sz="1600" b="0" i="1">
                                   <a:latin typeface="Cambria Math" panose="02040503050406030204" pitchFamily="18" charset="0"/>
                                 </a:rPr>
                                 <m:t>𝑘</m:t>
@@ -8141,14 +8780,14 @@
                           <m:sSup>
                             <m:sSupPr>
                               <m:ctrlPr>
-                                <a:rPr lang="en-US" sz="2000" b="0" i="1">
+                                <a:rPr lang="en-US" sz="1600" b="0" i="1">
                                   <a:latin typeface="Cambria Math" panose="02040503050406030204" pitchFamily="18" charset="0"/>
                                 </a:rPr>
                               </m:ctrlPr>
                             </m:sSupPr>
                             <m:e>
                               <m:r>
-                                <a:rPr lang="en-US" sz="2000" b="0" i="1">
+                                <a:rPr lang="en-US" sz="1600" b="0" i="1">
                                   <a:latin typeface="Cambria Math" panose="02040503050406030204" pitchFamily="18" charset="0"/>
                                 </a:rPr>
                                 <m:t>𝑒</m:t>
@@ -8156,7 +8795,7 @@
                             </m:e>
                             <m:sup>
                               <m:r>
-                                <a:rPr lang="en-US" sz="2000" b="0" i="1">
+                                <a:rPr lang="en-US" sz="1600" b="0" i="1">
                                   <a:latin typeface="Cambria Math" panose="02040503050406030204" pitchFamily="18" charset="0"/>
                                 </a:rPr>
                                 <m:t>𝑗</m:t>
@@ -8164,14 +8803,14 @@
                               <m:sSub>
                                 <m:sSubPr>
                                   <m:ctrlPr>
-                                    <a:rPr lang="en-US" sz="2000" b="0" i="1">
+                                    <a:rPr lang="en-US" sz="1600" b="0" i="1">
                                       <a:latin typeface="Cambria Math" panose="02040503050406030204" pitchFamily="18" charset="0"/>
                                     </a:rPr>
                                   </m:ctrlPr>
                                 </m:sSubPr>
                                 <m:e>
                                   <m:r>
-                                    <a:rPr lang="en-US" sz="2000" b="0" i="1">
+                                    <a:rPr lang="en-US" sz="1600" b="0" i="1">
                                       <a:latin typeface="Cambria Math" panose="02040503050406030204" pitchFamily="18" charset="0"/>
                                       <a:ea typeface="Cambria Math" panose="02040503050406030204" pitchFamily="18" charset="0"/>
                                     </a:rPr>
@@ -8180,7 +8819,7 @@
                                 </m:e>
                                 <m:sub>
                                   <m:r>
-                                    <a:rPr lang="en-US" sz="2000" b="0" i="1">
+                                    <a:rPr lang="en-US" sz="1600" b="0" i="1">
                                       <a:latin typeface="Cambria Math" panose="02040503050406030204" pitchFamily="18" charset="0"/>
                                     </a:rPr>
                                     <m:t>0</m:t>
@@ -8188,7 +8827,7 @@
                                 </m:sub>
                               </m:sSub>
                               <m:r>
-                                <a:rPr lang="en-US" sz="2000" b="0" i="1">
+                                <a:rPr lang="en-US" sz="1600" b="0" i="1">
                                   <a:latin typeface="Cambria Math" panose="02040503050406030204" pitchFamily="18" charset="0"/>
                                 </a:rPr>
                                 <m:t>𝑘𝑡</m:t>
@@ -8200,13 +8839,13 @@
                     </m:oMath>
                   </m:oMathPara>
                 </a14:m>
-                <a:endParaRPr lang="en-US" sz="2000" dirty="0"/>
+                <a:endParaRPr lang="en-US" sz="1600" dirty="0"/>
               </a:p>
               <a:p>
                 <a:pPr marL="0" indent="0">
                   <a:buNone/>
                 </a:pPr>
-                <a:endParaRPr lang="en-US" sz="2000" dirty="0"/>
+                <a:endParaRPr lang="en-US" sz="1600" dirty="0"/>
               </a:p>
               <a:p>
                 <a:pPr marL="0" indent="0">
@@ -8221,14 +8860,14 @@
                       <m:sSub>
                         <m:sSubPr>
                           <m:ctrlPr>
-                            <a:rPr lang="en-US" sz="2000" i="1">
+                            <a:rPr lang="en-US" sz="1600" i="1">
                               <a:latin typeface="Cambria Math" panose="02040503050406030204" pitchFamily="18" charset="0"/>
                             </a:rPr>
                           </m:ctrlPr>
                         </m:sSubPr>
                         <m:e>
                           <m:r>
-                            <a:rPr lang="en-US" sz="2000" b="0" i="1">
+                            <a:rPr lang="en-US" sz="1600" b="0" i="1">
                               <a:latin typeface="Cambria Math" panose="02040503050406030204" pitchFamily="18" charset="0"/>
                             </a:rPr>
                             <m:t>𝑎</m:t>
@@ -8236,7 +8875,7 @@
                         </m:e>
                         <m:sub>
                           <m:r>
-                            <a:rPr lang="en-US" sz="2000" b="0" i="1">
+                            <a:rPr lang="en-US" sz="1600" b="0" i="1">
                               <a:latin typeface="Cambria Math" panose="02040503050406030204" pitchFamily="18" charset="0"/>
                             </a:rPr>
                             <m:t>𝑘</m:t>
@@ -8244,7 +8883,7 @@
                         </m:sub>
                       </m:sSub>
                       <m:r>
-                        <a:rPr lang="en-US" sz="2000" i="1">
+                        <a:rPr lang="en-US" sz="1600" i="1">
                           <a:latin typeface="Cambria Math" panose="02040503050406030204" pitchFamily="18" charset="0"/>
                         </a:rPr>
                         <m:t>=</m:t>
@@ -8252,14 +8891,14 @@
                       <m:f>
                         <m:fPr>
                           <m:ctrlPr>
-                            <a:rPr lang="en-US" sz="2000" i="1">
+                            <a:rPr lang="en-US" sz="1600" i="1">
                               <a:latin typeface="Cambria Math" panose="02040503050406030204" pitchFamily="18" charset="0"/>
                             </a:rPr>
                           </m:ctrlPr>
                         </m:fPr>
                         <m:num>
                           <m:r>
-                            <a:rPr lang="en-US" sz="2000" i="1">
+                            <a:rPr lang="en-US" sz="1600" i="1">
                               <a:latin typeface="Cambria Math" panose="02040503050406030204" pitchFamily="18" charset="0"/>
                             </a:rPr>
                             <m:t>1</m:t>
@@ -8269,14 +8908,14 @@
                           <m:sSub>
                             <m:sSubPr>
                               <m:ctrlPr>
-                                <a:rPr lang="en-US" sz="2000" i="1">
+                                <a:rPr lang="en-US" sz="1600" i="1">
                                   <a:latin typeface="Cambria Math" panose="02040503050406030204" pitchFamily="18" charset="0"/>
                                 </a:rPr>
                               </m:ctrlPr>
                             </m:sSubPr>
                             <m:e>
                               <m:r>
-                                <a:rPr lang="en-US" sz="2000" i="1">
+                                <a:rPr lang="en-US" sz="1600" i="1">
                                   <a:latin typeface="Cambria Math" panose="02040503050406030204" pitchFamily="18" charset="0"/>
                                 </a:rPr>
                                 <m:t>𝑇</m:t>
@@ -8284,7 +8923,7 @@
                             </m:e>
                             <m:sub>
                               <m:r>
-                                <a:rPr lang="en-US" sz="2000" i="1">
+                                <a:rPr lang="en-US" sz="1600" i="1">
                                   <a:latin typeface="Cambria Math" panose="02040503050406030204" pitchFamily="18" charset="0"/>
                                 </a:rPr>
                                 <m:t>0</m:t>
@@ -8297,7 +8936,7 @@
                         <m:naryPr>
                           <m:limLoc m:val="undOvr"/>
                           <m:ctrlPr>
-                            <a:rPr lang="en-US" sz="2000" i="1">
+                            <a:rPr lang="en-US" sz="1600" i="1">
                               <a:latin typeface="Cambria Math" panose="02040503050406030204" pitchFamily="18" charset="0"/>
                             </a:rPr>
                           </m:ctrlPr>
@@ -8306,14 +8945,14 @@
                           <m:sSub>
                             <m:sSubPr>
                               <m:ctrlPr>
-                                <a:rPr lang="en-US" sz="2000" i="1">
+                                <a:rPr lang="en-US" sz="1600" i="1">
                                   <a:latin typeface="Cambria Math" panose="02040503050406030204" pitchFamily="18" charset="0"/>
                                 </a:rPr>
                               </m:ctrlPr>
                             </m:sSubPr>
                             <m:e>
                               <m:r>
-                                <a:rPr lang="en-US" sz="2000" i="1">
+                                <a:rPr lang="en-US" sz="1600" i="1">
                                   <a:latin typeface="Cambria Math" panose="02040503050406030204" pitchFamily="18" charset="0"/>
                                 </a:rPr>
                                 <m:t>𝑡</m:t>
@@ -8321,7 +8960,7 @@
                             </m:e>
                             <m:sub>
                               <m:r>
-                                <a:rPr lang="en-US" sz="2000" i="1">
+                                <a:rPr lang="en-US" sz="1600" i="1">
                                   <a:latin typeface="Cambria Math" panose="02040503050406030204" pitchFamily="18" charset="0"/>
                                 </a:rPr>
                                 <m:t>0</m:t>
@@ -8333,14 +8972,14 @@
                           <m:sSub>
                             <m:sSubPr>
                               <m:ctrlPr>
-                                <a:rPr lang="en-US" sz="2000" i="1">
+                                <a:rPr lang="en-US" sz="1600" i="1">
                                   <a:latin typeface="Cambria Math" panose="02040503050406030204" pitchFamily="18" charset="0"/>
                                 </a:rPr>
                               </m:ctrlPr>
                             </m:sSubPr>
                             <m:e>
                               <m:r>
-                                <a:rPr lang="en-US" sz="2000" i="1">
+                                <a:rPr lang="en-US" sz="1600" i="1">
                                   <a:latin typeface="Cambria Math" panose="02040503050406030204" pitchFamily="18" charset="0"/>
                                 </a:rPr>
                                 <m:t>𝑡</m:t>
@@ -8348,7 +8987,7 @@
                             </m:e>
                             <m:sub>
                               <m:r>
-                                <a:rPr lang="en-US" sz="2000" i="1">
+                                <a:rPr lang="en-US" sz="1600" i="1">
                                   <a:latin typeface="Cambria Math" panose="02040503050406030204" pitchFamily="18" charset="0"/>
                                 </a:rPr>
                                 <m:t>0</m:t>
@@ -8356,7 +8995,7 @@
                             </m:sub>
                           </m:sSub>
                           <m:r>
-                            <a:rPr lang="en-US" sz="2000" i="1">
+                            <a:rPr lang="en-US" sz="1600" i="1">
                               <a:latin typeface="Cambria Math" panose="02040503050406030204" pitchFamily="18" charset="0"/>
                             </a:rPr>
                             <m:t>+</m:t>
@@ -8364,14 +9003,14 @@
                           <m:sSub>
                             <m:sSubPr>
                               <m:ctrlPr>
-                                <a:rPr lang="en-US" sz="2000" i="1">
+                                <a:rPr lang="en-US" sz="1600" i="1">
                                   <a:latin typeface="Cambria Math" panose="02040503050406030204" pitchFamily="18" charset="0"/>
                                 </a:rPr>
                               </m:ctrlPr>
                             </m:sSubPr>
                             <m:e>
                               <m:r>
-                                <a:rPr lang="en-US" sz="2000" i="1">
+                                <a:rPr lang="en-US" sz="1600" i="1">
                                   <a:latin typeface="Cambria Math" panose="02040503050406030204" pitchFamily="18" charset="0"/>
                                 </a:rPr>
                                 <m:t>𝑇</m:t>
@@ -8379,7 +9018,7 @@
                             </m:e>
                             <m:sub>
                               <m:r>
-                                <a:rPr lang="en-US" sz="2000" i="1">
+                                <a:rPr lang="en-US" sz="1600" i="1">
                                   <a:latin typeface="Cambria Math" panose="02040503050406030204" pitchFamily="18" charset="0"/>
                                 </a:rPr>
                                 <m:t>0</m:t>
@@ -8389,7 +9028,7 @@
                         </m:sup>
                         <m:e>
                           <m:r>
-                            <a:rPr lang="en-US" sz="2000" i="1">
+                            <a:rPr lang="en-US" sz="1600" i="1">
                               <a:latin typeface="Cambria Math" panose="02040503050406030204" pitchFamily="18" charset="0"/>
                             </a:rPr>
                             <m:t>𝑥</m:t>
@@ -8397,14 +9036,14 @@
                           <m:d>
                             <m:dPr>
                               <m:ctrlPr>
-                                <a:rPr lang="en-US" sz="2000" i="1">
+                                <a:rPr lang="en-US" sz="1600" i="1">
                                   <a:latin typeface="Cambria Math" panose="02040503050406030204" pitchFamily="18" charset="0"/>
                                 </a:rPr>
                               </m:ctrlPr>
                             </m:dPr>
                             <m:e>
                               <m:r>
-                                <a:rPr lang="en-US" sz="2000" i="1">
+                                <a:rPr lang="en-US" sz="1600" i="1">
                                   <a:latin typeface="Cambria Math" panose="02040503050406030204" pitchFamily="18" charset="0"/>
                                 </a:rPr>
                                 <m:t>𝑡</m:t>
@@ -8414,14 +9053,14 @@
                           <m:sSup>
                             <m:sSupPr>
                               <m:ctrlPr>
-                                <a:rPr lang="en-US" sz="2000" i="1">
+                                <a:rPr lang="en-US" sz="1600" i="1">
                                   <a:latin typeface="Cambria Math" panose="02040503050406030204" pitchFamily="18" charset="0"/>
                                 </a:rPr>
                               </m:ctrlPr>
                             </m:sSupPr>
                             <m:e>
                               <m:r>
-                                <a:rPr lang="en-US" sz="2000" i="1">
+                                <a:rPr lang="en-US" sz="1600" i="1">
                                   <a:latin typeface="Cambria Math" panose="02040503050406030204" pitchFamily="18" charset="0"/>
                                 </a:rPr>
                                 <m:t>𝑒</m:t>
@@ -8429,13 +9068,13 @@
                             </m:e>
                             <m:sup>
                               <m:r>
-                                <a:rPr lang="en-US" sz="2000" b="0" i="1">
+                                <a:rPr lang="en-US" sz="1600" b="0" i="1">
                                   <a:latin typeface="Cambria Math" panose="02040503050406030204" pitchFamily="18" charset="0"/>
                                 </a:rPr>
                                 <m:t>−</m:t>
                               </m:r>
                               <m:r>
-                                <a:rPr lang="en-US" sz="2000" i="1">
+                                <a:rPr lang="en-US" sz="1600" i="1">
                                   <a:latin typeface="Cambria Math" panose="02040503050406030204" pitchFamily="18" charset="0"/>
                                 </a:rPr>
                                 <m:t>𝑗</m:t>
@@ -8443,14 +9082,14 @@
                               <m:sSub>
                                 <m:sSubPr>
                                   <m:ctrlPr>
-                                    <a:rPr lang="en-US" sz="2000" i="1">
+                                    <a:rPr lang="en-US" sz="1600" i="1">
                                       <a:latin typeface="Cambria Math" panose="02040503050406030204" pitchFamily="18" charset="0"/>
                                     </a:rPr>
                                   </m:ctrlPr>
                                 </m:sSubPr>
                                 <m:e>
                                   <m:r>
-                                    <a:rPr lang="en-US" sz="2000" i="1">
+                                    <a:rPr lang="en-US" sz="1600" i="1">
                                       <a:latin typeface="Cambria Math" panose="02040503050406030204" pitchFamily="18" charset="0"/>
                                       <a:ea typeface="Cambria Math" panose="02040503050406030204" pitchFamily="18" charset="0"/>
                                     </a:rPr>
@@ -8459,7 +9098,7 @@
                                 </m:e>
                                 <m:sub>
                                   <m:r>
-                                    <a:rPr lang="en-US" sz="2000" i="1">
+                                    <a:rPr lang="en-US" sz="1600" i="1">
                                       <a:latin typeface="Cambria Math" panose="02040503050406030204" pitchFamily="18" charset="0"/>
                                     </a:rPr>
                                     <m:t>0</m:t>
@@ -8467,7 +9106,7 @@
                                 </m:sub>
                               </m:sSub>
                               <m:r>
-                                <a:rPr lang="en-US" sz="2000" i="1">
+                                <a:rPr lang="en-US" sz="1600" i="1">
                                   <a:latin typeface="Cambria Math" panose="02040503050406030204" pitchFamily="18" charset="0"/>
                                 </a:rPr>
                                 <m:t>𝑘𝑡</m:t>
@@ -8475,7 +9114,7 @@
                             </m:sup>
                           </m:sSup>
                           <m:r>
-                            <a:rPr lang="en-US" sz="2000" i="1">
+                            <a:rPr lang="en-US" sz="1600" i="1">
                               <a:latin typeface="Cambria Math" panose="02040503050406030204" pitchFamily="18" charset="0"/>
                             </a:rPr>
                             <m:t>𝑑𝑡</m:t>
@@ -8485,10 +9124,10 @@
                     </m:oMath>
                   </m:oMathPara>
                 </a14:m>
-                <a:endParaRPr lang="en-US" sz="2000" dirty="0"/>
+                <a:endParaRPr lang="en-US" sz="1600" dirty="0"/>
               </a:p>
               <a:p>
-                <a:endParaRPr lang="en-US" sz="2000" dirty="0"/>
+                <a:endParaRPr lang="en-US" sz="1600" dirty="0"/>
               </a:p>
             </p:txBody>
           </p:sp>
@@ -8572,14 +9211,14 @@
                     <m:sSub>
                       <m:sSubPr>
                         <m:ctrlPr>
-                          <a:rPr lang="en-US" sz="2000" i="1">
+                          <a:rPr lang="en-US" sz="1600" i="1">
                             <a:latin typeface="Cambria Math" panose="02040503050406030204" pitchFamily="18" charset="0"/>
                           </a:rPr>
                         </m:ctrlPr>
                       </m:sSubPr>
                       <m:e>
                         <m:r>
-                          <a:rPr lang="en-US" sz="2000" i="1">
+                          <a:rPr lang="en-US" sz="1600" i="1">
                             <a:latin typeface="Cambria Math" panose="02040503050406030204" pitchFamily="18" charset="0"/>
                           </a:rPr>
                           <m:t>𝑎</m:t>
@@ -8587,7 +9226,7 @@
                       </m:e>
                       <m:sub>
                         <m:r>
-                          <a:rPr lang="en-US" sz="2000" i="1">
+                          <a:rPr lang="en-US" sz="1600" i="1">
                             <a:latin typeface="Cambria Math" panose="02040503050406030204" pitchFamily="18" charset="0"/>
                           </a:rPr>
                           <m:t>𝑘</m:t>
@@ -8597,15 +9236,15 @@
                   </m:oMath>
                 </a14:m>
                 <a:r>
-                  <a:rPr lang="en-US" sz="2000" dirty="0"/>
+                  <a:rPr lang="en-US" sz="1600" dirty="0"/>
                   <a:t> tell us how much the k-</a:t>
                 </a:r>
                 <a:r>
-                  <a:rPr lang="en-US" sz="2000" dirty="0" err="1"/>
+                  <a:rPr lang="en-US" sz="1600" dirty="0" err="1"/>
                   <a:t>th</a:t>
                 </a:r>
                 <a:r>
-                  <a:rPr lang="en-US" sz="2000" dirty="0"/>
+                  <a:rPr lang="en-US" sz="1600" dirty="0"/>
                   <a:t> discrete frequency contributes to signal’s representation</a:t>
                 </a:r>
               </a:p>
@@ -8615,14 +9254,14 @@
                     <m:sSub>
                       <m:sSubPr>
                         <m:ctrlPr>
-                          <a:rPr lang="en-US" sz="2000" i="1">
+                          <a:rPr lang="en-US" sz="1600" i="1">
                             <a:latin typeface="Cambria Math" panose="02040503050406030204" pitchFamily="18" charset="0"/>
                           </a:rPr>
                         </m:ctrlPr>
                       </m:sSubPr>
                       <m:e>
                         <m:r>
-                          <a:rPr lang="en-US" sz="2000" i="1">
+                          <a:rPr lang="en-US" sz="1600" i="1">
                             <a:latin typeface="Cambria Math" panose="02040503050406030204" pitchFamily="18" charset="0"/>
                           </a:rPr>
                           <m:t>𝑎</m:t>
@@ -8630,7 +9269,7 @@
                       </m:e>
                       <m:sub>
                         <m:r>
-                          <a:rPr lang="en-US" sz="2000" i="1">
+                          <a:rPr lang="en-US" sz="1600" i="1">
                             <a:latin typeface="Cambria Math" panose="02040503050406030204" pitchFamily="18" charset="0"/>
                           </a:rPr>
                           <m:t>𝑘</m:t>
@@ -8640,7 +9279,7 @@
                   </m:oMath>
                 </a14:m>
                 <a:r>
-                  <a:rPr lang="en-US" sz="2000" dirty="0"/>
+                  <a:rPr lang="en-US" sz="1600" dirty="0"/>
                   <a:t>, </a:t>
                 </a:r>
                 <a14:m>
@@ -8648,14 +9287,14 @@
                     <m:sSub>
                       <m:sSubPr>
                         <m:ctrlPr>
-                          <a:rPr lang="en-US" sz="2000" i="1">
+                          <a:rPr lang="en-US" sz="1600" i="1">
                             <a:latin typeface="Cambria Math" panose="02040503050406030204" pitchFamily="18" charset="0"/>
                           </a:rPr>
                         </m:ctrlPr>
                       </m:sSubPr>
                       <m:e>
                         <m:r>
-                          <a:rPr lang="en-US" sz="2000" i="1">
+                          <a:rPr lang="en-US" sz="1600" i="1">
                             <a:latin typeface="Cambria Math" panose="02040503050406030204" pitchFamily="18" charset="0"/>
                           </a:rPr>
                           <m:t>𝑏</m:t>
@@ -8663,7 +9302,7 @@
                       </m:e>
                       <m:sub>
                         <m:r>
-                          <a:rPr lang="en-US" sz="2000" i="1">
+                          <a:rPr lang="en-US" sz="1600" i="1">
                             <a:latin typeface="Cambria Math" panose="02040503050406030204" pitchFamily="18" charset="0"/>
                           </a:rPr>
                           <m:t>𝑘</m:t>
@@ -8673,7 +9312,7 @@
                   </m:oMath>
                 </a14:m>
                 <a:r>
-                  <a:rPr lang="en-US" sz="2000" dirty="0"/>
+                  <a:rPr lang="en-US" sz="1600" dirty="0"/>
                   <a:t>, and </a:t>
                 </a:r>
                 <a14:m>
@@ -8681,14 +9320,14 @@
                     <m:sSub>
                       <m:sSubPr>
                         <m:ctrlPr>
-                          <a:rPr lang="en-US" sz="2000" i="1">
+                          <a:rPr lang="en-US" sz="1600" i="1">
                             <a:latin typeface="Cambria Math" panose="02040503050406030204" pitchFamily="18" charset="0"/>
                           </a:rPr>
                         </m:ctrlPr>
                       </m:sSubPr>
                       <m:e>
                         <m:r>
-                          <a:rPr lang="en-US" sz="2000" i="1">
+                          <a:rPr lang="en-US" sz="1600" i="1">
                             <a:latin typeface="Cambria Math" panose="02040503050406030204" pitchFamily="18" charset="0"/>
                           </a:rPr>
                           <m:t>𝑐</m:t>
@@ -8696,7 +9335,7 @@
                       </m:e>
                       <m:sub>
                         <m:r>
-                          <a:rPr lang="en-US" sz="2000" i="1">
+                          <a:rPr lang="en-US" sz="1600" i="1">
                             <a:latin typeface="Cambria Math" panose="02040503050406030204" pitchFamily="18" charset="0"/>
                           </a:rPr>
                           <m:t>𝑘</m:t>
@@ -8706,7 +9345,7 @@
                   </m:oMath>
                 </a14:m>
                 <a:r>
-                  <a:rPr lang="en-US" sz="2000" dirty="0"/>
+                  <a:rPr lang="en-US" sz="1600" dirty="0"/>
                   <a:t> are related </a:t>
                 </a:r>
               </a:p>
@@ -8723,14 +9362,14 @@
                       <m:sSub>
                         <m:sSubPr>
                           <m:ctrlPr>
-                            <a:rPr lang="en-US" sz="2000" i="1">
+                            <a:rPr lang="en-US" sz="1600" i="1">
                               <a:latin typeface="Cambria Math" panose="02040503050406030204" pitchFamily="18" charset="0"/>
                             </a:rPr>
                           </m:ctrlPr>
                         </m:sSubPr>
                         <m:e>
                           <m:r>
-                            <a:rPr lang="en-US" sz="2000" b="0" i="1">
+                            <a:rPr lang="en-US" sz="1600" b="0" i="1">
                               <a:latin typeface="Cambria Math" panose="02040503050406030204" pitchFamily="18" charset="0"/>
                             </a:rPr>
                             <m:t>𝑎</m:t>
@@ -8738,7 +9377,7 @@
                         </m:e>
                         <m:sub>
                           <m:r>
-                            <a:rPr lang="en-US" sz="2000" b="0" i="1">
+                            <a:rPr lang="en-US" sz="1600" b="0" i="1">
                               <a:latin typeface="Cambria Math" panose="02040503050406030204" pitchFamily="18" charset="0"/>
                             </a:rPr>
                             <m:t>0</m:t>
@@ -8746,7 +9385,7 @@
                         </m:sub>
                       </m:sSub>
                       <m:r>
-                        <a:rPr lang="en-US" sz="2000" b="0" i="1">
+                        <a:rPr lang="en-US" sz="1600" b="0" i="1">
                           <a:latin typeface="Cambria Math" panose="02040503050406030204" pitchFamily="18" charset="0"/>
                         </a:rPr>
                         <m:t>=</m:t>
@@ -8754,14 +9393,14 @@
                       <m:sSub>
                         <m:sSubPr>
                           <m:ctrlPr>
-                            <a:rPr lang="en-US" sz="2000" b="0" i="1">
+                            <a:rPr lang="en-US" sz="1600" b="0" i="1">
                               <a:latin typeface="Cambria Math" panose="02040503050406030204" pitchFamily="18" charset="0"/>
                             </a:rPr>
                           </m:ctrlPr>
                         </m:sSubPr>
                         <m:e>
                           <m:r>
-                            <a:rPr lang="en-US" sz="2000" b="0" i="1">
+                            <a:rPr lang="en-US" sz="1600" b="0" i="1">
                               <a:latin typeface="Cambria Math" panose="02040503050406030204" pitchFamily="18" charset="0"/>
                             </a:rPr>
                             <m:t>𝑏</m:t>
@@ -8769,7 +9408,7 @@
                         </m:e>
                         <m:sub>
                           <m:r>
-                            <a:rPr lang="en-US" sz="2000" b="0" i="1">
+                            <a:rPr lang="en-US" sz="1600" b="0" i="1">
                               <a:latin typeface="Cambria Math" panose="02040503050406030204" pitchFamily="18" charset="0"/>
                             </a:rPr>
                             <m:t>0</m:t>
@@ -8779,7 +9418,7 @@
                     </m:oMath>
                   </m:oMathPara>
                 </a14:m>
-                <a:endParaRPr lang="en-US" sz="2000" dirty="0"/>
+                <a:endParaRPr lang="en-US" sz="1600" dirty="0"/>
               </a:p>
               <a:p>
                 <a:pPr marL="0" indent="0">
@@ -8794,14 +9433,14 @@
                       <m:sSub>
                         <m:sSubPr>
                           <m:ctrlPr>
-                            <a:rPr lang="en-US" sz="2000" i="1">
+                            <a:rPr lang="en-US" sz="1600" i="1">
                               <a:latin typeface="Cambria Math" panose="02040503050406030204" pitchFamily="18" charset="0"/>
                             </a:rPr>
                           </m:ctrlPr>
                         </m:sSubPr>
                         <m:e>
                           <m:r>
-                            <a:rPr lang="en-US" sz="2000" b="0" i="1">
+                            <a:rPr lang="en-US" sz="1600" b="0" i="1">
                               <a:latin typeface="Cambria Math" panose="02040503050406030204" pitchFamily="18" charset="0"/>
                             </a:rPr>
                             <m:t>𝑏</m:t>
@@ -8809,7 +9448,7 @@
                         </m:e>
                         <m:sub>
                           <m:r>
-                            <a:rPr lang="en-US" sz="2000" b="0" i="1">
+                            <a:rPr lang="en-US" sz="1600" b="0" i="1">
                               <a:latin typeface="Cambria Math" panose="02040503050406030204" pitchFamily="18" charset="0"/>
                             </a:rPr>
                             <m:t>𝑘</m:t>
@@ -8817,13 +9456,13 @@
                         </m:sub>
                       </m:sSub>
                       <m:r>
-                        <a:rPr lang="en-US" sz="2000" b="0" i="1">
+                        <a:rPr lang="en-US" sz="1600" b="0" i="1">
                           <a:latin typeface="Cambria Math" panose="02040503050406030204" pitchFamily="18" charset="0"/>
                         </a:rPr>
                         <m:t>=2</m:t>
                       </m:r>
                       <m:r>
-                        <a:rPr lang="en-US" sz="2000" b="0" i="1">
+                        <a:rPr lang="en-US" sz="1600" b="0" i="1">
                           <a:latin typeface="Cambria Math" panose="02040503050406030204" pitchFamily="18" charset="0"/>
                         </a:rPr>
                         <m:t>𝑅𝑒</m:t>
@@ -8833,7 +9472,7 @@
                           <m:begChr m:val="{"/>
                           <m:endChr m:val="}"/>
                           <m:ctrlPr>
-                            <a:rPr lang="en-US" sz="2000" b="0" i="1">
+                            <a:rPr lang="en-US" sz="1600" b="0" i="1">
                               <a:latin typeface="Cambria Math" panose="02040503050406030204" pitchFamily="18" charset="0"/>
                             </a:rPr>
                           </m:ctrlPr>
@@ -8842,14 +9481,14 @@
                           <m:sSub>
                             <m:sSubPr>
                               <m:ctrlPr>
-                                <a:rPr lang="en-US" sz="2000" b="0" i="1">
+                                <a:rPr lang="en-US" sz="1600" b="0" i="1">
                                   <a:latin typeface="Cambria Math" panose="02040503050406030204" pitchFamily="18" charset="0"/>
                                 </a:rPr>
                               </m:ctrlPr>
                             </m:sSubPr>
                             <m:e>
                               <m:r>
-                                <a:rPr lang="en-US" sz="2000" b="0" i="1">
+                                <a:rPr lang="en-US" sz="1600" b="0" i="1">
                                   <a:latin typeface="Cambria Math" panose="02040503050406030204" pitchFamily="18" charset="0"/>
                                 </a:rPr>
                                 <m:t>𝑎</m:t>
@@ -8857,7 +9496,7 @@
                             </m:e>
                             <m:sub>
                               <m:r>
-                                <a:rPr lang="en-US" sz="2000" b="0" i="1">
+                                <a:rPr lang="en-US" sz="1600" b="0" i="1">
                                   <a:latin typeface="Cambria Math" panose="02040503050406030204" pitchFamily="18" charset="0"/>
                                 </a:rPr>
                                 <m:t>𝑘</m:t>
@@ -8869,7 +9508,7 @@
                     </m:oMath>
                   </m:oMathPara>
                 </a14:m>
-                <a:endParaRPr lang="en-US" sz="2000" dirty="0"/>
+                <a:endParaRPr lang="en-US" sz="1600" dirty="0"/>
               </a:p>
               <a:p>
                 <a:pPr marL="0" indent="0">
@@ -8884,14 +9523,14 @@
                       <m:sSub>
                         <m:sSubPr>
                           <m:ctrlPr>
-                            <a:rPr lang="en-US" sz="2000" i="1">
+                            <a:rPr lang="en-US" sz="1600" i="1">
                               <a:latin typeface="Cambria Math" panose="02040503050406030204" pitchFamily="18" charset="0"/>
                             </a:rPr>
                           </m:ctrlPr>
                         </m:sSubPr>
                         <m:e>
                           <m:r>
-                            <a:rPr lang="en-US" sz="2000" b="0" i="1">
+                            <a:rPr lang="en-US" sz="1600" b="0" i="1">
                               <a:latin typeface="Cambria Math" panose="02040503050406030204" pitchFamily="18" charset="0"/>
                             </a:rPr>
                             <m:t>𝑐</m:t>
@@ -8899,7 +9538,7 @@
                         </m:e>
                         <m:sub>
                           <m:r>
-                            <a:rPr lang="en-US" sz="2000" b="0" i="1">
+                            <a:rPr lang="en-US" sz="1600" b="0" i="1">
                               <a:latin typeface="Cambria Math" panose="02040503050406030204" pitchFamily="18" charset="0"/>
                             </a:rPr>
                             <m:t>𝑘</m:t>
@@ -8907,13 +9546,13 @@
                         </m:sub>
                       </m:sSub>
                       <m:r>
-                        <a:rPr lang="en-US" sz="2000" b="0" i="1">
+                        <a:rPr lang="en-US" sz="1600" b="0" i="1">
                           <a:latin typeface="Cambria Math" panose="02040503050406030204" pitchFamily="18" charset="0"/>
                         </a:rPr>
                         <m:t>=−2</m:t>
                       </m:r>
                       <m:r>
-                        <a:rPr lang="en-US" sz="2000" b="0" i="1">
+                        <a:rPr lang="en-US" sz="1600" b="0" i="1">
                           <a:latin typeface="Cambria Math" panose="02040503050406030204" pitchFamily="18" charset="0"/>
                         </a:rPr>
                         <m:t>𝐼𝑚</m:t>
@@ -8923,7 +9562,7 @@
                           <m:begChr m:val="{"/>
                           <m:endChr m:val="}"/>
                           <m:ctrlPr>
-                            <a:rPr lang="en-US" sz="2000" b="0" i="1">
+                            <a:rPr lang="en-US" sz="1600" b="0" i="1">
                               <a:latin typeface="Cambria Math" panose="02040503050406030204" pitchFamily="18" charset="0"/>
                             </a:rPr>
                           </m:ctrlPr>
@@ -8932,14 +9571,14 @@
                           <m:sSub>
                             <m:sSubPr>
                               <m:ctrlPr>
-                                <a:rPr lang="en-US" sz="2000" b="0" i="1">
+                                <a:rPr lang="en-US" sz="1600" b="0" i="1">
                                   <a:latin typeface="Cambria Math" panose="02040503050406030204" pitchFamily="18" charset="0"/>
                                 </a:rPr>
                               </m:ctrlPr>
                             </m:sSubPr>
                             <m:e>
                               <m:r>
-                                <a:rPr lang="en-US" sz="2000" b="0" i="1">
+                                <a:rPr lang="en-US" sz="1600" b="0" i="1">
                                   <a:latin typeface="Cambria Math" panose="02040503050406030204" pitchFamily="18" charset="0"/>
                                 </a:rPr>
                                 <m:t>𝑎</m:t>
@@ -8947,7 +9586,7 @@
                             </m:e>
                             <m:sub>
                               <m:r>
-                                <a:rPr lang="en-US" sz="2000" b="0" i="1">
+                                <a:rPr lang="en-US" sz="1600" b="0" i="1">
                                   <a:latin typeface="Cambria Math" panose="02040503050406030204" pitchFamily="18" charset="0"/>
                                 </a:rPr>
                                 <m:t>𝑘</m:t>
@@ -8959,11 +9598,11 @@
                     </m:oMath>
                   </m:oMathPara>
                 </a14:m>
-                <a:endParaRPr lang="en-US" sz="2000" dirty="0"/>
+                <a:endParaRPr lang="en-US" sz="1600" dirty="0"/>
               </a:p>
               <a:p>
                 <a:r>
-                  <a:rPr lang="en-US" sz="2000" dirty="0"/>
+                  <a:rPr lang="en-US" sz="1600" dirty="0"/>
                   <a:t>Fast Fourier Transform (FFT) is based on complex exponentials</a:t>
                 </a:r>
               </a:p>
@@ -8971,7 +9610,7 @@
                 <a:pPr marL="0" indent="0">
                   <a:buNone/>
                 </a:pPr>
-                <a:endParaRPr lang="en-US" sz="2000" dirty="0"/>
+                <a:endParaRPr lang="en-US" sz="1600" dirty="0"/>
               </a:p>
             </p:txBody>
           </p:sp>
@@ -9022,47 +9661,202 @@
       </mc:AlternateContent>
       <p:sp>
         <p:nvSpPr>
-          <p:cNvPr id="5" name="Slide Number Placeholder 4">
-            <a:extLst>
-              <a:ext uri="{FF2B5EF4-FFF2-40B4-BE49-F238E27FC236}">
-                <a16:creationId xmlns:a16="http://schemas.microsoft.com/office/drawing/2014/main" id="{D0B1963B-13B5-4FDC-882E-02547DDE6A60}"/>
-              </a:ext>
-            </a:extLst>
-          </p:cNvPr>
+          <p:cNvPr id="13" name="DSPIRA 1"/>
           <p:cNvSpPr>
             <a:spLocks noGrp="1"/>
           </p:cNvSpPr>
-          <p:nvPr>
-            <p:ph type="sldNum" sz="quarter" idx="12"/>
-          </p:nvPr>
+          <p:nvPr/>
         </p:nvSpPr>
         <p:spPr>
           <a:xfrm>
-            <a:off x="9202366" y="6356350"/>
-            <a:ext cx="2151434" cy="365125"/>
+            <a:off x="0" y="0"/>
+            <a:ext cx="12192000" cy="342900"/>
           </a:xfrm>
+          <a:prstGeom prst="rect">
+            <a:avLst/>
+          </a:prstGeom>
+          <a:solidFill>
+            <a:srgbClr val="FFFFFF"/>
+          </a:solidFill>
+          <a:ln w="0">
+            <a:noFill/>
+          </a:ln>
+        </p:spPr>
+      </p:sp>
+      <p:sp>
+        <p:nvSpPr>
+          <p:cNvPr id="14" name="DSPIRA 2"/>
+          <p:cNvSpPr>
+            <a:spLocks noGrp="1"/>
+          </p:cNvSpPr>
+          <p:nvPr/>
+        </p:nvSpPr>
+        <p:spPr>
+          <a:xfrm>
+            <a:off x="0" y="7200900"/>
+            <a:ext cx="12192000" cy="342900"/>
+          </a:xfrm>
+          <a:prstGeom prst="rect">
+            <a:avLst/>
+          </a:prstGeom>
+          <a:solidFill>
+            <a:srgbClr val="FFFFFF"/>
+          </a:solidFill>
+          <a:ln w="0">
+            <a:noFill/>
+          </a:ln>
+        </p:spPr>
+      </p:sp>
+      <p:sp>
+        <p:nvSpPr>
+          <p:cNvPr id="15" name="DSPIRA 3"/>
+          <p:cNvSpPr>
+            <a:spLocks noGrp="1"/>
+          </p:cNvSpPr>
+          <p:nvPr/>
+        </p:nvSpPr>
+        <p:spPr>
+          <a:xfrm>
+            <a:off x="228600" y="76200"/>
+            <a:ext cx="4762500" cy="228600"/>
+          </a:xfrm>
+          <a:prstGeom prst="rect">
+            <a:avLst/>
+          </a:prstGeom>
+          <a:noFill/>
+          <a:ln w="0">
+            <a:noFill/>
+          </a:ln>
         </p:spPr>
         <p:txBody>
           <a:bodyPr>
-            <a:normAutofit/>
+            <a:noAutofit/>
           </a:bodyPr>
           <a:lstStyle/>
           <a:p>
             <a:pPr>
-              <a:spcAft>
-                <a:spcPts val="600"/>
-              </a:spcAft>
+              <a:defRPr sz="1200" b="1">
+                <a:solidFill>
+                  <a:srgbClr val="002855"/>
+                </a:solidFill>
+                <a:latin typeface="Arial"/>
+                <a:ea typeface="Arial"/>
+                <a:cs typeface="Arial"/>
+              </a:defRPr>
             </a:pPr>
-            <a:fld id="{6CB4759B-89EF-486F-A495-36988C5D6AB8}" type="slidenum">
-              <a:rPr lang="en-US" smtClean="0"/>
-              <a:pPr>
-                <a:spcAft>
-                  <a:spcPts val="600"/>
-                </a:spcAft>
-              </a:pPr>
-              <a:t>6</a:t>
-            </a:fld>
-            <a:endParaRPr lang="en-US"/>
+            <a:r>
+              <a:rPr sz="1200" b="1">
+                <a:solidFill>
+                  <a:srgbClr val="002855"/>
+                </a:solidFill>
+                <a:latin typeface="Arial"/>
+                <a:ea typeface="Arial"/>
+                <a:cs typeface="Arial"/>
+              </a:rPr>
+              <a:t>WVU DSPIRA</a:t>
+            </a:r>
+          </a:p>
+        </p:txBody>
+      </p:sp>
+      <p:sp>
+        <p:nvSpPr>
+          <p:cNvPr id="16" name="DSPIRA 4"/>
+          <p:cNvSpPr>
+            <a:spLocks noGrp="1"/>
+          </p:cNvSpPr>
+          <p:nvPr/>
+        </p:nvSpPr>
+        <p:spPr>
+          <a:xfrm>
+            <a:off x="228600" y="7277100"/>
+            <a:ext cx="6667500" cy="228600"/>
+          </a:xfrm>
+          <a:prstGeom prst="rect">
+            <a:avLst/>
+          </a:prstGeom>
+          <a:noFill/>
+          <a:ln w="0">
+            <a:noFill/>
+          </a:ln>
+        </p:spPr>
+        <p:txBody>
+          <a:bodyPr>
+            <a:noAutofit/>
+          </a:bodyPr>
+          <a:lstStyle/>
+          <a:p>
+            <a:pPr>
+              <a:defRPr sz="900" b="0">
+                <a:solidFill>
+                  <a:srgbClr val="002855"/>
+                </a:solidFill>
+                <a:latin typeface="Arial"/>
+                <a:ea typeface="Arial"/>
+                <a:cs typeface="Arial"/>
+              </a:defRPr>
+            </a:pPr>
+            <a:r>
+              <a:rPr sz="900" b="0">
+                <a:solidFill>
+                  <a:srgbClr val="002855"/>
+                </a:solidFill>
+                <a:latin typeface="Arial"/>
+                <a:ea typeface="Arial"/>
+                <a:cs typeface="Arial"/>
+              </a:rPr>
+              <a:t>wvurail.org/dspira</a:t>
+            </a:r>
+          </a:p>
+        </p:txBody>
+      </p:sp>
+      <p:sp>
+        <p:nvSpPr>
+          <p:cNvPr id="17" name="DSPIRA 5"/>
+          <p:cNvSpPr>
+            <a:spLocks noGrp="1"/>
+          </p:cNvSpPr>
+          <p:nvPr/>
+        </p:nvSpPr>
+        <p:spPr>
+          <a:xfrm>
+            <a:off x="11191875" y="7277100"/>
+            <a:ext cx="762000" cy="228600"/>
+          </a:xfrm>
+          <a:prstGeom prst="rect">
+            <a:avLst/>
+          </a:prstGeom>
+          <a:noFill/>
+          <a:ln w="0">
+            <a:noFill/>
+          </a:ln>
+        </p:spPr>
+        <p:txBody>
+          <a:bodyPr>
+            <a:noAutofit/>
+          </a:bodyPr>
+          <a:lstStyle/>
+          <a:p>
+            <a:pPr>
+              <a:defRPr sz="900" b="0">
+                <a:solidFill>
+                  <a:srgbClr val="002855"/>
+                </a:solidFill>
+                <a:latin typeface="Arial"/>
+                <a:ea typeface="Arial"/>
+                <a:cs typeface="Arial"/>
+              </a:defRPr>
+            </a:pPr>
+            <a:r>
+              <a:rPr sz="900" b="0">
+                <a:solidFill>
+                  <a:srgbClr val="002855"/>
+                </a:solidFill>
+                <a:latin typeface="Arial"/>
+                <a:ea typeface="Arial"/>
+                <a:cs typeface="Arial"/>
+              </a:rPr>
+              <a:t>6 of 7</a:t>
+            </a:r>
           </a:p>
         </p:txBody>
       </p:sp>
@@ -9145,7 +9939,7 @@
         </p:blipFill>
         <p:spPr>
           <a:xfrm>
-            <a:off x="6641431" y="816337"/>
+            <a:off x="6641431" y="1159237"/>
             <a:ext cx="5225327" cy="5225327"/>
           </a:xfrm>
           <a:prstGeom prst="rect">
@@ -9184,7 +9978,7 @@
         </p:blipFill>
         <p:spPr>
           <a:xfrm>
-            <a:off x="838201" y="2743201"/>
+            <a:off x="838201" y="3086101"/>
             <a:ext cx="1371600" cy="1371600"/>
           </a:xfrm>
           <a:prstGeom prst="rect">
@@ -9210,7 +10004,7 @@
         </p:nvSpPr>
         <p:spPr>
           <a:xfrm>
-            <a:off x="2370667" y="2187743"/>
+            <a:off x="2370667" y="2530643"/>
             <a:ext cx="5293449" cy="2482515"/>
           </a:xfrm>
         </p:spPr>
@@ -9221,11 +10015,11 @@
           <a:lstStyle/>
           <a:p>
             <a:r>
-              <a:rPr lang="en-US" sz="5600" kern="1200">
+              <a:rPr lang="en-US" sz="4480" kern="1200">
                 <a:solidFill>
                   <a:schemeClr val="tx1"/>
                 </a:solidFill>
-                <a:latin typeface="+mj-lt"/>
+                <a:latin typeface="Arial"/>
                 <a:ea typeface="+mj-ea"/>
                 <a:cs typeface="+mj-cs"/>
               </a:rPr>
@@ -9236,47 +10030,202 @@
       </p:sp>
       <p:sp>
         <p:nvSpPr>
-          <p:cNvPr id="3" name="Slide Number Placeholder 2">
-            <a:extLst>
-              <a:ext uri="{FF2B5EF4-FFF2-40B4-BE49-F238E27FC236}">
-                <a16:creationId xmlns:a16="http://schemas.microsoft.com/office/drawing/2014/main" id="{F43486EE-8F72-494E-B510-C99B3E1D062A}"/>
-              </a:ext>
-            </a:extLst>
-          </p:cNvPr>
+          <p:cNvPr id="10" name="DSPIRA 1"/>
           <p:cNvSpPr>
             <a:spLocks noGrp="1"/>
           </p:cNvSpPr>
-          <p:nvPr>
-            <p:ph type="sldNum" sz="quarter" idx="12"/>
-          </p:nvPr>
+          <p:nvPr/>
         </p:nvSpPr>
         <p:spPr>
           <a:xfrm>
-            <a:off x="9123558" y="6356350"/>
-            <a:ext cx="2743200" cy="365125"/>
+            <a:off x="0" y="0"/>
+            <a:ext cx="12192000" cy="342900"/>
           </a:xfrm>
+          <a:prstGeom prst="rect">
+            <a:avLst/>
+          </a:prstGeom>
+          <a:solidFill>
+            <a:srgbClr val="FFFFFF"/>
+          </a:solidFill>
+          <a:ln w="0">
+            <a:noFill/>
+          </a:ln>
+        </p:spPr>
+      </p:sp>
+      <p:sp>
+        <p:nvSpPr>
+          <p:cNvPr id="11" name="DSPIRA 2"/>
+          <p:cNvSpPr>
+            <a:spLocks noGrp="1"/>
+          </p:cNvSpPr>
+          <p:nvPr/>
+        </p:nvSpPr>
+        <p:spPr>
+          <a:xfrm>
+            <a:off x="0" y="7200900"/>
+            <a:ext cx="12192000" cy="342900"/>
+          </a:xfrm>
+          <a:prstGeom prst="rect">
+            <a:avLst/>
+          </a:prstGeom>
+          <a:solidFill>
+            <a:srgbClr val="FFFFFF"/>
+          </a:solidFill>
+          <a:ln w="0">
+            <a:noFill/>
+          </a:ln>
+        </p:spPr>
+      </p:sp>
+      <p:sp>
+        <p:nvSpPr>
+          <p:cNvPr id="12" name="DSPIRA 3"/>
+          <p:cNvSpPr>
+            <a:spLocks noGrp="1"/>
+          </p:cNvSpPr>
+          <p:nvPr/>
+        </p:nvSpPr>
+        <p:spPr>
+          <a:xfrm>
+            <a:off x="228600" y="76200"/>
+            <a:ext cx="4762500" cy="228600"/>
+          </a:xfrm>
+          <a:prstGeom prst="rect">
+            <a:avLst/>
+          </a:prstGeom>
+          <a:noFill/>
+          <a:ln w="0">
+            <a:noFill/>
+          </a:ln>
         </p:spPr>
         <p:txBody>
-          <a:bodyPr vert="horz" lIns="91440" tIns="45720" rIns="91440" bIns="45720" rtlCol="0" anchor="ctr">
-            <a:normAutofit/>
+          <a:bodyPr>
+            <a:noAutofit/>
           </a:bodyPr>
           <a:lstStyle/>
           <a:p>
             <a:pPr>
-              <a:spcAft>
-                <a:spcPts val="600"/>
-              </a:spcAft>
+              <a:defRPr sz="1200" b="1">
+                <a:solidFill>
+                  <a:srgbClr val="002855"/>
+                </a:solidFill>
+                <a:latin typeface="Arial"/>
+                <a:ea typeface="Arial"/>
+                <a:cs typeface="Arial"/>
+              </a:defRPr>
             </a:pPr>
-            <a:fld id="{6CB4759B-89EF-486F-A495-36988C5D6AB8}" type="slidenum">
-              <a:rPr lang="en-US" smtClean="0"/>
-              <a:pPr>
-                <a:spcAft>
-                  <a:spcPts val="600"/>
-                </a:spcAft>
-              </a:pPr>
-              <a:t>7</a:t>
-            </a:fld>
-            <a:endParaRPr lang="en-US"/>
+            <a:r>
+              <a:rPr sz="1200" b="1">
+                <a:solidFill>
+                  <a:srgbClr val="002855"/>
+                </a:solidFill>
+                <a:latin typeface="Arial"/>
+                <a:ea typeface="Arial"/>
+                <a:cs typeface="Arial"/>
+              </a:rPr>
+              <a:t>WVU DSPIRA</a:t>
+            </a:r>
+          </a:p>
+        </p:txBody>
+      </p:sp>
+      <p:sp>
+        <p:nvSpPr>
+          <p:cNvPr id="13" name="DSPIRA 4"/>
+          <p:cNvSpPr>
+            <a:spLocks noGrp="1"/>
+          </p:cNvSpPr>
+          <p:nvPr/>
+        </p:nvSpPr>
+        <p:spPr>
+          <a:xfrm>
+            <a:off x="228600" y="7277100"/>
+            <a:ext cx="6667500" cy="228600"/>
+          </a:xfrm>
+          <a:prstGeom prst="rect">
+            <a:avLst/>
+          </a:prstGeom>
+          <a:noFill/>
+          <a:ln w="0">
+            <a:noFill/>
+          </a:ln>
+        </p:spPr>
+        <p:txBody>
+          <a:bodyPr>
+            <a:noAutofit/>
+          </a:bodyPr>
+          <a:lstStyle/>
+          <a:p>
+            <a:pPr>
+              <a:defRPr sz="900" b="0">
+                <a:solidFill>
+                  <a:srgbClr val="002855"/>
+                </a:solidFill>
+                <a:latin typeface="Arial"/>
+                <a:ea typeface="Arial"/>
+                <a:cs typeface="Arial"/>
+              </a:defRPr>
+            </a:pPr>
+            <a:r>
+              <a:rPr sz="900" b="0">
+                <a:solidFill>
+                  <a:srgbClr val="002855"/>
+                </a:solidFill>
+                <a:latin typeface="Arial"/>
+                <a:ea typeface="Arial"/>
+                <a:cs typeface="Arial"/>
+              </a:rPr>
+              <a:t>wvurail.org/dspira</a:t>
+            </a:r>
+          </a:p>
+        </p:txBody>
+      </p:sp>
+      <p:sp>
+        <p:nvSpPr>
+          <p:cNvPr id="14" name="DSPIRA 5"/>
+          <p:cNvSpPr>
+            <a:spLocks noGrp="1"/>
+          </p:cNvSpPr>
+          <p:nvPr/>
+        </p:nvSpPr>
+        <p:spPr>
+          <a:xfrm>
+            <a:off x="11191875" y="7277100"/>
+            <a:ext cx="762000" cy="228600"/>
+          </a:xfrm>
+          <a:prstGeom prst="rect">
+            <a:avLst/>
+          </a:prstGeom>
+          <a:noFill/>
+          <a:ln w="0">
+            <a:noFill/>
+          </a:ln>
+        </p:spPr>
+        <p:txBody>
+          <a:bodyPr>
+            <a:noAutofit/>
+          </a:bodyPr>
+          <a:lstStyle/>
+          <a:p>
+            <a:pPr>
+              <a:defRPr sz="900" b="0">
+                <a:solidFill>
+                  <a:srgbClr val="002855"/>
+                </a:solidFill>
+                <a:latin typeface="Arial"/>
+                <a:ea typeface="Arial"/>
+                <a:cs typeface="Arial"/>
+              </a:defRPr>
+            </a:pPr>
+            <a:r>
+              <a:rPr sz="900" b="0">
+                <a:solidFill>
+                  <a:srgbClr val="002855"/>
+                </a:solidFill>
+                <a:latin typeface="Arial"/>
+                <a:ea typeface="Arial"/>
+                <a:cs typeface="Arial"/>
+              </a:rPr>
+              <a:t>7 of 7</a:t>
+            </a:r>
           </a:p>
         </p:txBody>
       </p:sp>
@@ -9336,7 +10285,7 @@
     </a:clrScheme>
     <a:fontScheme name="Office">
       <a:majorFont>
-        <a:latin typeface="Calibri Light" panose="020F0302020204030204"/>
+        <a:latin typeface="Arial" panose="020F0302020204030204"/>
         <a:ea typeface=""/>
         <a:cs typeface=""/>
         <a:font script="Jpan" typeface="游ゴシック Light"/>
@@ -9388,7 +10337,7 @@
         <a:font script="Tfng" typeface="Ebrima"/>
       </a:majorFont>
       <a:minorFont>
-        <a:latin typeface="Calibri" panose="020F0502020204030204"/>
+        <a:latin typeface="Arial" panose="020F0502020204030204"/>
         <a:ea typeface=""/>
         <a:cs typeface=""/>
         <a:font script="Jpan" typeface="游ゴシック"/>
@@ -9631,7 +10580,7 @@
     </a:clrScheme>
     <a:fontScheme name="Office">
       <a:majorFont>
-        <a:latin typeface="Calibri Light" panose="020F0302020204030204"/>
+        <a:latin typeface="Arial" panose="020F0302020204030204"/>
         <a:ea typeface=""/>
         <a:cs typeface=""/>
         <a:font script="Jpan" typeface="游ゴシック Light"/>
@@ -9683,7 +10632,7 @@
         <a:font script="Tfng" typeface="Ebrima"/>
       </a:majorFont>
       <a:minorFont>
-        <a:latin typeface="Calibri" panose="020F0502020204030204"/>
+        <a:latin typeface="Arial" panose="020F0502020204030204"/>
         <a:ea typeface=""/>
         <a:cs typeface=""/>
         <a:font script="Jpan" typeface="游ゴシック"/>
@@ -9881,183 +10830,4 @@
     </a:ext>
   </a:extLst>
 </a:theme>
-</file>
-
-<file path=customXml/item1.xml><?xml version="1.0" encoding="utf-8"?>
-<ct:contentTypeSchema xmlns:ct="http://schemas.microsoft.com/office/2006/metadata/contentType" xmlns:ma="http://schemas.microsoft.com/office/2006/metadata/properties/metaAttributes" ct:_="" ma:_="" ma:contentTypeName="Document" ma:contentTypeID="0x01010016C36F108F9F92488C988DDF36346911" ma:contentTypeVersion="5" ma:contentTypeDescription="Create a new document." ma:contentTypeScope="" ma:versionID="c417924321fef32731141cd966ef6f94">
-  <xsd:schema xmlns:xsd="http://www.w3.org/2001/XMLSchema" xmlns:xs="http://www.w3.org/2001/XMLSchema" xmlns:p="http://schemas.microsoft.com/office/2006/metadata/properties" xmlns:ns2="1bb24863-89de-455f-aabf-4424925aa312" targetNamespace="http://schemas.microsoft.com/office/2006/metadata/properties" ma:root="true" ma:fieldsID="a7d3b2212d350eb904df17fc79fef4f4" ns2:_="">
-    <xsd:import namespace="1bb24863-89de-455f-aabf-4424925aa312"/>
-    <xsd:element name="properties">
-      <xsd:complexType>
-        <xsd:sequence>
-          <xsd:element name="documentManagement">
-            <xsd:complexType>
-              <xsd:all>
-                <xsd:element ref="ns2:MediaServiceMetadata" minOccurs="0"/>
-                <xsd:element ref="ns2:MediaServiceFastMetadata" minOccurs="0"/>
-                <xsd:element ref="ns2:MediaServiceAutoTags" minOccurs="0"/>
-                <xsd:element ref="ns2:MediaServiceOCR" minOccurs="0"/>
-                <xsd:element ref="ns2:MediaServiceDateTaken" minOccurs="0"/>
-              </xsd:all>
-            </xsd:complexType>
-          </xsd:element>
-        </xsd:sequence>
-      </xsd:complexType>
-    </xsd:element>
-  </xsd:schema>
-  <xsd:schema xmlns:xsd="http://www.w3.org/2001/XMLSchema" xmlns:xs="http://www.w3.org/2001/XMLSchema" xmlns:dms="http://schemas.microsoft.com/office/2006/documentManagement/types" xmlns:pc="http://schemas.microsoft.com/office/infopath/2007/PartnerControls" targetNamespace="1bb24863-89de-455f-aabf-4424925aa312" elementFormDefault="qualified">
-    <xsd:import namespace="http://schemas.microsoft.com/office/2006/documentManagement/types"/>
-    <xsd:import namespace="http://schemas.microsoft.com/office/infopath/2007/PartnerControls"/>
-    <xsd:element name="MediaServiceMetadata" ma:index="8" nillable="true" ma:displayName="MediaServiceMetadata" ma:hidden="true" ma:internalName="MediaServiceMetadata" ma:readOnly="true">
-      <xsd:simpleType>
-        <xsd:restriction base="dms:Note"/>
-      </xsd:simpleType>
-    </xsd:element>
-    <xsd:element name="MediaServiceFastMetadata" ma:index="9" nillable="true" ma:displayName="MediaServiceFastMetadata" ma:hidden="true" ma:internalName="MediaServiceFastMetadata" ma:readOnly="true">
-      <xsd:simpleType>
-        <xsd:restriction base="dms:Note"/>
-      </xsd:simpleType>
-    </xsd:element>
-    <xsd:element name="MediaServiceAutoTags" ma:index="10" nillable="true" ma:displayName="MediaServiceAutoTags" ma:internalName="MediaServiceAutoTags" ma:readOnly="true">
-      <xsd:simpleType>
-        <xsd:restriction base="dms:Text"/>
-      </xsd:simpleType>
-    </xsd:element>
-    <xsd:element name="MediaServiceOCR" ma:index="11" nillable="true" ma:displayName="MediaServiceOCR" ma:internalName="MediaServiceOCR" ma:readOnly="true">
-      <xsd:simpleType>
-        <xsd:restriction base="dms:Note">
-          <xsd:maxLength value="255"/>
-        </xsd:restriction>
-      </xsd:simpleType>
-    </xsd:element>
-    <xsd:element name="MediaServiceDateTaken" ma:index="12" nillable="true" ma:displayName="MediaServiceDateTaken" ma:hidden="true" ma:internalName="MediaServiceDateTaken" ma:readOnly="true">
-      <xsd:simpleType>
-        <xsd:restriction base="dms:Text"/>
-      </xsd:simpleType>
-    </xsd:element>
-  </xsd:schema>
-  <xsd:schema xmlns="http://schemas.openxmlformats.org/package/2006/metadata/core-properties" xmlns:xsd="http://www.w3.org/2001/XMLSchema" xmlns:xsi="http://www.w3.org/2001/XMLSchema-instance" xmlns:dc="http://purl.org/dc/elements/1.1/" xmlns:dcterms="http://purl.org/dc/terms/" xmlns:odoc="http://schemas.microsoft.com/internal/obd" targetNamespace="http://schemas.openxmlformats.org/package/2006/metadata/core-properties" elementFormDefault="qualified" attributeFormDefault="unqualified" blockDefault="#all">
-    <xsd:import namespace="http://purl.org/dc/elements/1.1/" schemaLocation="http://dublincore.org/schemas/xmls/qdc/2003/04/02/dc.xsd"/>
-    <xsd:import namespace="http://purl.org/dc/terms/" schemaLocation="http://dublincore.org/schemas/xmls/qdc/2003/04/02/dcterms.xsd"/>
-    <xsd:element name="coreProperties" type="CT_coreProperties"/>
-    <xsd:complexType name="CT_coreProperties">
-      <xsd:all>
-        <xsd:element ref="dc:creator" minOccurs="0" maxOccurs="1"/>
-        <xsd:element ref="dcterms:created" minOccurs="0" maxOccurs="1"/>
-        <xsd:element ref="dc:identifier" minOccurs="0" maxOccurs="1"/>
-        <xsd:element name="contentType" minOccurs="0" maxOccurs="1" type="xsd:string" ma:index="0" ma:displayName="Content Type"/>
-        <xsd:element ref="dc:title" minOccurs="0" maxOccurs="1" ma:index="4" ma:displayName="Title"/>
-        <xsd:element ref="dc:subject" minOccurs="0" maxOccurs="1"/>
-        <xsd:element ref="dc:description" minOccurs="0" maxOccurs="1"/>
-        <xsd:element name="keywords" minOccurs="0" maxOccurs="1" type="xsd:string"/>
-        <xsd:element ref="dc:language" minOccurs="0" maxOccurs="1"/>
-        <xsd:element name="category" minOccurs="0" maxOccurs="1" type="xsd:string"/>
-        <xsd:element name="version" minOccurs="0" maxOccurs="1" type="xsd:string"/>
-        <xsd:element name="revision" minOccurs="0" maxOccurs="1" type="xsd:string">
-          <xsd:annotation>
-            <xsd:documentation>
-                        This value indicates the number of saves or revisions. The application is responsible for updating this value after each revision.
-                    </xsd:documentation>
-          </xsd:annotation>
-        </xsd:element>
-        <xsd:element name="lastModifiedBy" minOccurs="0" maxOccurs="1" type="xsd:string"/>
-        <xsd:element ref="dcterms:modified" minOccurs="0" maxOccurs="1"/>
-        <xsd:element name="contentStatus" minOccurs="0" maxOccurs="1" type="xsd:string"/>
-      </xsd:all>
-    </xsd:complexType>
-  </xsd:schema>
-  <xs:schema xmlns:pc="http://schemas.microsoft.com/office/infopath/2007/PartnerControls" xmlns:xs="http://www.w3.org/2001/XMLSchema" targetNamespace="http://schemas.microsoft.com/office/infopath/2007/PartnerControls" elementFormDefault="qualified" attributeFormDefault="unqualified">
-    <xs:element name="Person">
-      <xs:complexType>
-        <xs:sequence>
-          <xs:element ref="pc:DisplayName" minOccurs="0"/>
-          <xs:element ref="pc:AccountId" minOccurs="0"/>
-          <xs:element ref="pc:AccountType" minOccurs="0"/>
-        </xs:sequence>
-      </xs:complexType>
-    </xs:element>
-    <xs:element name="DisplayName" type="xs:string"/>
-    <xs:element name="AccountId" type="xs:string"/>
-    <xs:element name="AccountType" type="xs:string"/>
-    <xs:element name="BDCAssociatedEntity">
-      <xs:complexType>
-        <xs:sequence>
-          <xs:element ref="pc:BDCEntity" minOccurs="0" maxOccurs="unbounded"/>
-        </xs:sequence>
-        <xs:attribute ref="pc:EntityNamespace"/>
-        <xs:attribute ref="pc:EntityName"/>
-        <xs:attribute ref="pc:SystemInstanceName"/>
-        <xs:attribute ref="pc:AssociationName"/>
-      </xs:complexType>
-    </xs:element>
-    <xs:attribute name="EntityNamespace" type="xs:string"/>
-    <xs:attribute name="EntityName" type="xs:string"/>
-    <xs:attribute name="SystemInstanceName" type="xs:string"/>
-    <xs:attribute name="AssociationName" type="xs:string"/>
-    <xs:element name="BDCEntity">
-      <xs:complexType>
-        <xs:sequence>
-          <xs:element ref="pc:EntityDisplayName" minOccurs="0"/>
-          <xs:element ref="pc:EntityInstanceReference" minOccurs="0"/>
-          <xs:element ref="pc:EntityId1" minOccurs="0"/>
-          <xs:element ref="pc:EntityId2" minOccurs="0"/>
-          <xs:element ref="pc:EntityId3" minOccurs="0"/>
-          <xs:element ref="pc:EntityId4" minOccurs="0"/>
-          <xs:element ref="pc:EntityId5" minOccurs="0"/>
-        </xs:sequence>
-      </xs:complexType>
-    </xs:element>
-    <xs:element name="EntityDisplayName" type="xs:string"/>
-    <xs:element name="EntityInstanceReference" type="xs:string"/>
-    <xs:element name="EntityId1" type="xs:string"/>
-    <xs:element name="EntityId2" type="xs:string"/>
-    <xs:element name="EntityId3" type="xs:string"/>
-    <xs:element name="EntityId4" type="xs:string"/>
-    <xs:element name="EntityId5" type="xs:string"/>
-    <xs:element name="Terms">
-      <xs:complexType>
-        <xs:sequence>
-          <xs:element ref="pc:TermInfo" minOccurs="0" maxOccurs="unbounded"/>
-        </xs:sequence>
-      </xs:complexType>
-    </xs:element>
-    <xs:element name="TermInfo">
-      <xs:complexType>
-        <xs:sequence>
-          <xs:element ref="pc:TermName" minOccurs="0"/>
-          <xs:element ref="pc:TermId" minOccurs="0"/>
-        </xs:sequence>
-      </xs:complexType>
-    </xs:element>
-    <xs:element name="TermName" type="xs:string"/>
-    <xs:element name="TermId" type="xs:string"/>
-  </xs:schema>
-</ct:contentTypeSchema>
-</file>
-
-<file path=customXml/item2.xml><?xml version="1.0" encoding="utf-8"?>
-<?mso-contentType ?>
-<FormTemplates xmlns="http://schemas.microsoft.com/sharepoint/v3/contenttype/forms">
-  <Display>DocumentLibraryForm</Display>
-  <Edit>DocumentLibraryForm</Edit>
-  <New>DocumentLibraryForm</New>
-</FormTemplates>
-</file>
-
-<file path=customXml/item3.xml><?xml version="1.0" encoding="utf-8"?>
-<p:properties xmlns:p="http://schemas.microsoft.com/office/2006/metadata/properties" xmlns:xsi="http://www.w3.org/2001/XMLSchema-instance" xmlns:pc="http://schemas.microsoft.com/office/infopath/2007/PartnerControls">
-  <documentManagement/>
-</p:properties>
-</file>
-
-<file path=customXml/itemProps1.xml><?xml version="1.0" encoding="utf-8"?>
-<ds:datastoreItem xmlns:ds="http://schemas.openxmlformats.org/officeDocument/2006/customXml" ds:itemID="{5EA7D27E-4B05-4D22-AD97-6C014BF38290}"/>
-</file>
-
-<file path=customXml/itemProps2.xml><?xml version="1.0" encoding="utf-8"?>
-<ds:datastoreItem xmlns:ds="http://schemas.openxmlformats.org/officeDocument/2006/customXml" ds:itemID="{A29E571B-A306-45F6-8A51-A4ABCC68D86B}"/>
-</file>
-
-<file path=customXml/itemProps3.xml><?xml version="1.0" encoding="utf-8"?>
-<ds:datastoreItem xmlns:ds="http://schemas.openxmlformats.org/officeDocument/2006/customXml" ds:itemID="{BAB7F77E-F07E-4F31-83F1-0CCC6AC9FE43}"/>
 </file>
--- a/assets/lessons/lectures/digital-signal-processing/fourier-series-2018.pptx
+++ b/assets/lessons/lectures/digital-signal-processing/fourier-series-2018.pptx
@@ -3728,30 +3728,6 @@
       </p:sp>
       <p:sp>
         <p:nvSpPr>
-          <p:cNvPr id="29" name="DSPIRA 1"/>
-          <p:cNvSpPr>
-            <a:spLocks noGrp="1"/>
-          </p:cNvSpPr>
-          <p:nvPr/>
-        </p:nvSpPr>
-        <p:spPr>
-          <a:xfrm>
-            <a:off x="0" y="0"/>
-            <a:ext cx="12192000" cy="342900"/>
-          </a:xfrm>
-          <a:prstGeom prst="rect">
-            <a:avLst/>
-          </a:prstGeom>
-          <a:solidFill>
-            <a:srgbClr val="FFFFFF"/>
-          </a:solidFill>
-          <a:ln w="0">
-            <a:noFill/>
-          </a:ln>
-        </p:spPr>
-      </p:sp>
-      <p:sp>
-        <p:nvSpPr>
           <p:cNvPr id="30" name="DSPIRA 2"/>
           <p:cNvSpPr>
             <a:spLocks noGrp="1"/>
@@ -3773,57 +3749,6 @@
             <a:noFill/>
           </a:ln>
         </p:spPr>
-      </p:sp>
-      <p:sp>
-        <p:nvSpPr>
-          <p:cNvPr id="31" name="DSPIRA 3"/>
-          <p:cNvSpPr>
-            <a:spLocks noGrp="1"/>
-          </p:cNvSpPr>
-          <p:nvPr/>
-        </p:nvSpPr>
-        <p:spPr>
-          <a:xfrm>
-            <a:off x="228600" y="76200"/>
-            <a:ext cx="4762500" cy="228600"/>
-          </a:xfrm>
-          <a:prstGeom prst="rect">
-            <a:avLst/>
-          </a:prstGeom>
-          <a:noFill/>
-          <a:ln w="0">
-            <a:noFill/>
-          </a:ln>
-        </p:spPr>
-        <p:txBody>
-          <a:bodyPr>
-            <a:noAutofit/>
-          </a:bodyPr>
-          <a:lstStyle/>
-          <a:p>
-            <a:pPr>
-              <a:defRPr sz="1200" b="1">
-                <a:solidFill>
-                  <a:srgbClr val="002855"/>
-                </a:solidFill>
-                <a:latin typeface="Arial"/>
-                <a:ea typeface="Arial"/>
-                <a:cs typeface="Arial"/>
-              </a:defRPr>
-            </a:pPr>
-            <a:r>
-              <a:rPr sz="1200" b="1">
-                <a:solidFill>
-                  <a:srgbClr val="002855"/>
-                </a:solidFill>
-                <a:latin typeface="Arial"/>
-                <a:ea typeface="Arial"/>
-                <a:cs typeface="Arial"/>
-              </a:rPr>
-              <a:t>WVU DSPIRA</a:t>
-            </a:r>
-          </a:p>
-        </p:txBody>
       </p:sp>
       <p:sp>
         <p:nvSpPr>
@@ -3923,6 +3848,156 @@
                 <a:cs typeface="Arial"/>
               </a:rPr>
               <a:t>1 of 7</a:t>
+            </a:r>
+          </a:p>
+        </p:txBody>
+      </p:sp>
+      <p:sp>
+        <p:nvSpPr>
+          <p:cNvPr id="34" name="WVU DSPIRA navy band"/>
+          <p:cNvSpPr>
+            <a:spLocks noGrp="1"/>
+          </p:cNvSpPr>
+          <p:nvPr/>
+        </p:nvSpPr>
+        <p:spPr>
+          <a:xfrm>
+            <a:off x="0" y="0"/>
+            <a:ext cx="12192000" cy="323850"/>
+          </a:xfrm>
+          <a:prstGeom prst="rect">
+            <a:avLst/>
+          </a:prstGeom>
+          <a:solidFill>
+            <a:srgbClr val="002855"/>
+          </a:solidFill>
+          <a:ln w="0">
+            <a:noFill/>
+          </a:ln>
+        </p:spPr>
+      </p:sp>
+      <p:sp>
+        <p:nvSpPr>
+          <p:cNvPr id="35" name="WVU DSPIRA gold rule"/>
+          <p:cNvSpPr>
+            <a:spLocks noGrp="1"/>
+          </p:cNvSpPr>
+          <p:nvPr/>
+        </p:nvSpPr>
+        <p:spPr>
+          <a:xfrm>
+            <a:off x="0" y="323850"/>
+            <a:ext cx="12192000" cy="19050"/>
+          </a:xfrm>
+          <a:prstGeom prst="rect">
+            <a:avLst/>
+          </a:prstGeom>
+          <a:solidFill>
+            <a:srgbClr val="EEAA00"/>
+          </a:solidFill>
+          <a:ln w="0">
+            <a:noFill/>
+          </a:ln>
+        </p:spPr>
+      </p:sp>
+      <p:sp>
+        <p:nvSpPr>
+          <p:cNvPr id="36" name="WVU DSPIRA name"/>
+          <p:cNvSpPr>
+            <a:spLocks noGrp="1"/>
+          </p:cNvSpPr>
+          <p:nvPr/>
+        </p:nvSpPr>
+        <p:spPr>
+          <a:xfrm>
+            <a:off x="228600" y="19050"/>
+            <a:ext cx="2857500" cy="257175"/>
+          </a:xfrm>
+          <a:prstGeom prst="rect">
+            <a:avLst/>
+          </a:prstGeom>
+          <a:noFill/>
+          <a:ln w="0">
+            <a:noFill/>
+          </a:ln>
+        </p:spPr>
+        <p:txBody>
+          <a:bodyPr>
+            <a:noAutofit/>
+          </a:bodyPr>
+          <a:lstStyle/>
+          <a:p>
+            <a:pPr>
+              <a:defRPr sz="1600" b="1">
+                <a:solidFill>
+                  <a:srgbClr val="FFFFFF"/>
+                </a:solidFill>
+                <a:latin typeface="Arial"/>
+                <a:ea typeface="Arial"/>
+                <a:cs typeface="Arial"/>
+              </a:defRPr>
+            </a:pPr>
+            <a:r>
+              <a:rPr sz="1600" b="1">
+                <a:solidFill>
+                  <a:srgbClr val="FFFFFF"/>
+                </a:solidFill>
+                <a:latin typeface="Arial"/>
+                <a:ea typeface="Arial"/>
+                <a:cs typeface="Arial"/>
+              </a:rPr>
+              <a:t>WVU DSPIRA</a:t>
+            </a:r>
+          </a:p>
+        </p:txBody>
+      </p:sp>
+      <p:sp>
+        <p:nvSpPr>
+          <p:cNvPr id="37" name="WVU DSPIRA university"/>
+          <p:cNvSpPr>
+            <a:spLocks noGrp="1"/>
+          </p:cNvSpPr>
+          <p:nvPr/>
+        </p:nvSpPr>
+        <p:spPr>
+          <a:xfrm>
+            <a:off x="9334500" y="114300"/>
+            <a:ext cx="2628900" cy="171450"/>
+          </a:xfrm>
+          <a:prstGeom prst="rect">
+            <a:avLst/>
+          </a:prstGeom>
+          <a:noFill/>
+          <a:ln w="0">
+            <a:noFill/>
+          </a:ln>
+        </p:spPr>
+        <p:txBody>
+          <a:bodyPr>
+            <a:noAutofit/>
+          </a:bodyPr>
+          <a:lstStyle/>
+          <a:p>
+            <a:pPr algn="r">
+              <a:defRPr sz="900">
+                <a:solidFill>
+                  <a:srgbClr val="FFFFFF"/>
+                </a:solidFill>
+                <a:latin typeface="Arial"/>
+                <a:ea typeface="Arial"/>
+                <a:cs typeface="Arial"/>
+              </a:defRPr>
+            </a:pPr>
+            <a:r>
+              <a:rPr sz="900">
+                <a:solidFill>
+                  <a:srgbClr val="FFFFFF"/>
+                </a:solidFill>
+                <a:latin typeface="Arial"/>
+                <a:ea typeface="Arial"/>
+                <a:cs typeface="Arial"/>
+              </a:rPr>
+              <a:t>WEST VIRGINIA UNIVERSITY</a:t>
             </a:r>
           </a:p>
         </p:txBody>
@@ -4688,30 +4763,6 @@
       </p:sp>
       <p:sp>
         <p:nvSpPr>
-          <p:cNvPr id="14" name="DSPIRA 1"/>
-          <p:cNvSpPr>
-            <a:spLocks noGrp="1"/>
-          </p:cNvSpPr>
-          <p:nvPr/>
-        </p:nvSpPr>
-        <p:spPr>
-          <a:xfrm>
-            <a:off x="0" y="0"/>
-            <a:ext cx="12192000" cy="342900"/>
-          </a:xfrm>
-          <a:prstGeom prst="rect">
-            <a:avLst/>
-          </a:prstGeom>
-          <a:solidFill>
-            <a:srgbClr val="FFFFFF"/>
-          </a:solidFill>
-          <a:ln w="0">
-            <a:noFill/>
-          </a:ln>
-        </p:spPr>
-      </p:sp>
-      <p:sp>
-        <p:nvSpPr>
           <p:cNvPr id="15" name="DSPIRA 2"/>
           <p:cNvSpPr>
             <a:spLocks noGrp="1"/>
@@ -4733,57 +4784,6 @@
             <a:noFill/>
           </a:ln>
         </p:spPr>
-      </p:sp>
-      <p:sp>
-        <p:nvSpPr>
-          <p:cNvPr id="16" name="DSPIRA 3"/>
-          <p:cNvSpPr>
-            <a:spLocks noGrp="1"/>
-          </p:cNvSpPr>
-          <p:nvPr/>
-        </p:nvSpPr>
-        <p:spPr>
-          <a:xfrm>
-            <a:off x="228600" y="76200"/>
-            <a:ext cx="4762500" cy="228600"/>
-          </a:xfrm>
-          <a:prstGeom prst="rect">
-            <a:avLst/>
-          </a:prstGeom>
-          <a:noFill/>
-          <a:ln w="0">
-            <a:noFill/>
-          </a:ln>
-        </p:spPr>
-        <p:txBody>
-          <a:bodyPr>
-            <a:noAutofit/>
-          </a:bodyPr>
-          <a:lstStyle/>
-          <a:p>
-            <a:pPr>
-              <a:defRPr sz="1200" b="1">
-                <a:solidFill>
-                  <a:srgbClr val="002855"/>
-                </a:solidFill>
-                <a:latin typeface="Arial"/>
-                <a:ea typeface="Arial"/>
-                <a:cs typeface="Arial"/>
-              </a:defRPr>
-            </a:pPr>
-            <a:r>
-              <a:rPr sz="1200" b="1">
-                <a:solidFill>
-                  <a:srgbClr val="002855"/>
-                </a:solidFill>
-                <a:latin typeface="Arial"/>
-                <a:ea typeface="Arial"/>
-                <a:cs typeface="Arial"/>
-              </a:rPr>
-              <a:t>WVU DSPIRA</a:t>
-            </a:r>
-          </a:p>
-        </p:txBody>
       </p:sp>
       <p:sp>
         <p:nvSpPr>
@@ -4883,6 +4883,156 @@
                 <a:cs typeface="Arial"/>
               </a:rPr>
               <a:t>2 of 7</a:t>
+            </a:r>
+          </a:p>
+        </p:txBody>
+      </p:sp>
+      <p:sp>
+        <p:nvSpPr>
+          <p:cNvPr id="19" name="WVU DSPIRA navy band"/>
+          <p:cNvSpPr>
+            <a:spLocks noGrp="1"/>
+          </p:cNvSpPr>
+          <p:nvPr/>
+        </p:nvSpPr>
+        <p:spPr>
+          <a:xfrm>
+            <a:off x="0" y="0"/>
+            <a:ext cx="12192000" cy="323850"/>
+          </a:xfrm>
+          <a:prstGeom prst="rect">
+            <a:avLst/>
+          </a:prstGeom>
+          <a:solidFill>
+            <a:srgbClr val="002855"/>
+          </a:solidFill>
+          <a:ln w="0">
+            <a:noFill/>
+          </a:ln>
+        </p:spPr>
+      </p:sp>
+      <p:sp>
+        <p:nvSpPr>
+          <p:cNvPr id="20" name="WVU DSPIRA gold rule"/>
+          <p:cNvSpPr>
+            <a:spLocks noGrp="1"/>
+          </p:cNvSpPr>
+          <p:nvPr/>
+        </p:nvSpPr>
+        <p:spPr>
+          <a:xfrm>
+            <a:off x="0" y="323850"/>
+            <a:ext cx="12192000" cy="19050"/>
+          </a:xfrm>
+          <a:prstGeom prst="rect">
+            <a:avLst/>
+          </a:prstGeom>
+          <a:solidFill>
+            <a:srgbClr val="EEAA00"/>
+          </a:solidFill>
+          <a:ln w="0">
+            <a:noFill/>
+          </a:ln>
+        </p:spPr>
+      </p:sp>
+      <p:sp>
+        <p:nvSpPr>
+          <p:cNvPr id="21" name="WVU DSPIRA name"/>
+          <p:cNvSpPr>
+            <a:spLocks noGrp="1"/>
+          </p:cNvSpPr>
+          <p:nvPr/>
+        </p:nvSpPr>
+        <p:spPr>
+          <a:xfrm>
+            <a:off x="228600" y="19050"/>
+            <a:ext cx="2857500" cy="257175"/>
+          </a:xfrm>
+          <a:prstGeom prst="rect">
+            <a:avLst/>
+          </a:prstGeom>
+          <a:noFill/>
+          <a:ln w="0">
+            <a:noFill/>
+          </a:ln>
+        </p:spPr>
+        <p:txBody>
+          <a:bodyPr>
+            <a:noAutofit/>
+          </a:bodyPr>
+          <a:lstStyle/>
+          <a:p>
+            <a:pPr>
+              <a:defRPr sz="1600" b="1">
+                <a:solidFill>
+                  <a:srgbClr val="FFFFFF"/>
+                </a:solidFill>
+                <a:latin typeface="Arial"/>
+                <a:ea typeface="Arial"/>
+                <a:cs typeface="Arial"/>
+              </a:defRPr>
+            </a:pPr>
+            <a:r>
+              <a:rPr sz="1600" b="1">
+                <a:solidFill>
+                  <a:srgbClr val="FFFFFF"/>
+                </a:solidFill>
+                <a:latin typeface="Arial"/>
+                <a:ea typeface="Arial"/>
+                <a:cs typeface="Arial"/>
+              </a:rPr>
+              <a:t>WVU DSPIRA</a:t>
+            </a:r>
+          </a:p>
+        </p:txBody>
+      </p:sp>
+      <p:sp>
+        <p:nvSpPr>
+          <p:cNvPr id="22" name="WVU DSPIRA university"/>
+          <p:cNvSpPr>
+            <a:spLocks noGrp="1"/>
+          </p:cNvSpPr>
+          <p:nvPr/>
+        </p:nvSpPr>
+        <p:spPr>
+          <a:xfrm>
+            <a:off x="9334500" y="114300"/>
+            <a:ext cx="2628900" cy="171450"/>
+          </a:xfrm>
+          <a:prstGeom prst="rect">
+            <a:avLst/>
+          </a:prstGeom>
+          <a:noFill/>
+          <a:ln w="0">
+            <a:noFill/>
+          </a:ln>
+        </p:spPr>
+        <p:txBody>
+          <a:bodyPr>
+            <a:noAutofit/>
+          </a:bodyPr>
+          <a:lstStyle/>
+          <a:p>
+            <a:pPr algn="r">
+              <a:defRPr sz="900">
+                <a:solidFill>
+                  <a:srgbClr val="FFFFFF"/>
+                </a:solidFill>
+                <a:latin typeface="Arial"/>
+                <a:ea typeface="Arial"/>
+                <a:cs typeface="Arial"/>
+              </a:defRPr>
+            </a:pPr>
+            <a:r>
+              <a:rPr sz="900">
+                <a:solidFill>
+                  <a:srgbClr val="FFFFFF"/>
+                </a:solidFill>
+                <a:latin typeface="Arial"/>
+                <a:ea typeface="Arial"/>
+                <a:cs typeface="Arial"/>
+              </a:rPr>
+              <a:t>WEST VIRGINIA UNIVERSITY</a:t>
             </a:r>
           </a:p>
         </p:txBody>
@@ -6156,30 +6306,6 @@
       </p:pic>
       <p:sp>
         <p:nvSpPr>
-          <p:cNvPr id="8" name="DSPIRA 1"/>
-          <p:cNvSpPr>
-            <a:spLocks noGrp="1"/>
-          </p:cNvSpPr>
-          <p:nvPr/>
-        </p:nvSpPr>
-        <p:spPr>
-          <a:xfrm>
-            <a:off x="0" y="0"/>
-            <a:ext cx="12192000" cy="342900"/>
-          </a:xfrm>
-          <a:prstGeom prst="rect">
-            <a:avLst/>
-          </a:prstGeom>
-          <a:solidFill>
-            <a:srgbClr val="FFFFFF"/>
-          </a:solidFill>
-          <a:ln w="0">
-            <a:noFill/>
-          </a:ln>
-        </p:spPr>
-      </p:sp>
-      <p:sp>
-        <p:nvSpPr>
           <p:cNvPr id="9" name="DSPIRA 2"/>
           <p:cNvSpPr>
             <a:spLocks noGrp="1"/>
@@ -6201,57 +6327,6 @@
             <a:noFill/>
           </a:ln>
         </p:spPr>
-      </p:sp>
-      <p:sp>
-        <p:nvSpPr>
-          <p:cNvPr id="10" name="DSPIRA 3"/>
-          <p:cNvSpPr>
-            <a:spLocks noGrp="1"/>
-          </p:cNvSpPr>
-          <p:nvPr/>
-        </p:nvSpPr>
-        <p:spPr>
-          <a:xfrm>
-            <a:off x="228600" y="76200"/>
-            <a:ext cx="4762500" cy="228600"/>
-          </a:xfrm>
-          <a:prstGeom prst="rect">
-            <a:avLst/>
-          </a:prstGeom>
-          <a:noFill/>
-          <a:ln w="0">
-            <a:noFill/>
-          </a:ln>
-        </p:spPr>
-        <p:txBody>
-          <a:bodyPr>
-            <a:noAutofit/>
-          </a:bodyPr>
-          <a:lstStyle/>
-          <a:p>
-            <a:pPr>
-              <a:defRPr sz="1200" b="1">
-                <a:solidFill>
-                  <a:srgbClr val="002855"/>
-                </a:solidFill>
-                <a:latin typeface="Arial"/>
-                <a:ea typeface="Arial"/>
-                <a:cs typeface="Arial"/>
-              </a:defRPr>
-            </a:pPr>
-            <a:r>
-              <a:rPr sz="1200" b="1">
-                <a:solidFill>
-                  <a:srgbClr val="002855"/>
-                </a:solidFill>
-                <a:latin typeface="Arial"/>
-                <a:ea typeface="Arial"/>
-                <a:cs typeface="Arial"/>
-              </a:rPr>
-              <a:t>WVU DSPIRA</a:t>
-            </a:r>
-          </a:p>
-        </p:txBody>
       </p:sp>
       <p:sp>
         <p:nvSpPr>
@@ -6351,6 +6426,156 @@
                 <a:cs typeface="Arial"/>
               </a:rPr>
               <a:t>3 of 7</a:t>
+            </a:r>
+          </a:p>
+        </p:txBody>
+      </p:sp>
+      <p:sp>
+        <p:nvSpPr>
+          <p:cNvPr id="13" name="WVU DSPIRA navy band"/>
+          <p:cNvSpPr>
+            <a:spLocks noGrp="1"/>
+          </p:cNvSpPr>
+          <p:nvPr/>
+        </p:nvSpPr>
+        <p:spPr>
+          <a:xfrm>
+            <a:off x="0" y="0"/>
+            <a:ext cx="12192000" cy="323850"/>
+          </a:xfrm>
+          <a:prstGeom prst="rect">
+            <a:avLst/>
+          </a:prstGeom>
+          <a:solidFill>
+            <a:srgbClr val="002855"/>
+          </a:solidFill>
+          <a:ln w="0">
+            <a:noFill/>
+          </a:ln>
+        </p:spPr>
+      </p:sp>
+      <p:sp>
+        <p:nvSpPr>
+          <p:cNvPr id="14" name="WVU DSPIRA gold rule"/>
+          <p:cNvSpPr>
+            <a:spLocks noGrp="1"/>
+          </p:cNvSpPr>
+          <p:nvPr/>
+        </p:nvSpPr>
+        <p:spPr>
+          <a:xfrm>
+            <a:off x="0" y="323850"/>
+            <a:ext cx="12192000" cy="19050"/>
+          </a:xfrm>
+          <a:prstGeom prst="rect">
+            <a:avLst/>
+          </a:prstGeom>
+          <a:solidFill>
+            <a:srgbClr val="EEAA00"/>
+          </a:solidFill>
+          <a:ln w="0">
+            <a:noFill/>
+          </a:ln>
+        </p:spPr>
+      </p:sp>
+      <p:sp>
+        <p:nvSpPr>
+          <p:cNvPr id="15" name="WVU DSPIRA name"/>
+          <p:cNvSpPr>
+            <a:spLocks noGrp="1"/>
+          </p:cNvSpPr>
+          <p:nvPr/>
+        </p:nvSpPr>
+        <p:spPr>
+          <a:xfrm>
+            <a:off x="228600" y="19050"/>
+            <a:ext cx="2857500" cy="257175"/>
+          </a:xfrm>
+          <a:prstGeom prst="rect">
+            <a:avLst/>
+          </a:prstGeom>
+          <a:noFill/>
+          <a:ln w="0">
+            <a:noFill/>
+          </a:ln>
+        </p:spPr>
+        <p:txBody>
+          <a:bodyPr>
+            <a:noAutofit/>
+          </a:bodyPr>
+          <a:lstStyle/>
+          <a:p>
+            <a:pPr>
+              <a:defRPr sz="1600" b="1">
+                <a:solidFill>
+                  <a:srgbClr val="FFFFFF"/>
+                </a:solidFill>
+                <a:latin typeface="Arial"/>
+                <a:ea typeface="Arial"/>
+                <a:cs typeface="Arial"/>
+              </a:defRPr>
+            </a:pPr>
+            <a:r>
+              <a:rPr sz="1600" b="1">
+                <a:solidFill>
+                  <a:srgbClr val="FFFFFF"/>
+                </a:solidFill>
+                <a:latin typeface="Arial"/>
+                <a:ea typeface="Arial"/>
+                <a:cs typeface="Arial"/>
+              </a:rPr>
+              <a:t>WVU DSPIRA</a:t>
+            </a:r>
+          </a:p>
+        </p:txBody>
+      </p:sp>
+      <p:sp>
+        <p:nvSpPr>
+          <p:cNvPr id="16" name="WVU DSPIRA university"/>
+          <p:cNvSpPr>
+            <a:spLocks noGrp="1"/>
+          </p:cNvSpPr>
+          <p:nvPr/>
+        </p:nvSpPr>
+        <p:spPr>
+          <a:xfrm>
+            <a:off x="9334500" y="114300"/>
+            <a:ext cx="2628900" cy="171450"/>
+          </a:xfrm>
+          <a:prstGeom prst="rect">
+            <a:avLst/>
+          </a:prstGeom>
+          <a:noFill/>
+          <a:ln w="0">
+            <a:noFill/>
+          </a:ln>
+        </p:spPr>
+        <p:txBody>
+          <a:bodyPr>
+            <a:noAutofit/>
+          </a:bodyPr>
+          <a:lstStyle/>
+          <a:p>
+            <a:pPr algn="r">
+              <a:defRPr sz="900">
+                <a:solidFill>
+                  <a:srgbClr val="FFFFFF"/>
+                </a:solidFill>
+                <a:latin typeface="Arial"/>
+                <a:ea typeface="Arial"/>
+                <a:cs typeface="Arial"/>
+              </a:defRPr>
+            </a:pPr>
+            <a:r>
+              <a:rPr sz="900">
+                <a:solidFill>
+                  <a:srgbClr val="FFFFFF"/>
+                </a:solidFill>
+                <a:latin typeface="Arial"/>
+                <a:ea typeface="Arial"/>
+                <a:cs typeface="Arial"/>
+              </a:rPr>
+              <a:t>WEST VIRGINIA UNIVERSITY</a:t>
             </a:r>
           </a:p>
         </p:txBody>
@@ -6560,30 +6785,6 @@
       </p:sp>
       <p:sp>
         <p:nvSpPr>
-          <p:cNvPr id="12" name="DSPIRA 1"/>
-          <p:cNvSpPr>
-            <a:spLocks noGrp="1"/>
-          </p:cNvSpPr>
-          <p:nvPr/>
-        </p:nvSpPr>
-        <p:spPr>
-          <a:xfrm>
-            <a:off x="0" y="0"/>
-            <a:ext cx="12192000" cy="342900"/>
-          </a:xfrm>
-          <a:prstGeom prst="rect">
-            <a:avLst/>
-          </a:prstGeom>
-          <a:solidFill>
-            <a:srgbClr val="FFFFFF"/>
-          </a:solidFill>
-          <a:ln w="0">
-            <a:noFill/>
-          </a:ln>
-        </p:spPr>
-      </p:sp>
-      <p:sp>
-        <p:nvSpPr>
           <p:cNvPr id="13" name="DSPIRA 2"/>
           <p:cNvSpPr>
             <a:spLocks noGrp="1"/>
@@ -6605,57 +6806,6 @@
             <a:noFill/>
           </a:ln>
         </p:spPr>
-      </p:sp>
-      <p:sp>
-        <p:nvSpPr>
-          <p:cNvPr id="14" name="DSPIRA 3"/>
-          <p:cNvSpPr>
-            <a:spLocks noGrp="1"/>
-          </p:cNvSpPr>
-          <p:nvPr/>
-        </p:nvSpPr>
-        <p:spPr>
-          <a:xfrm>
-            <a:off x="228600" y="76200"/>
-            <a:ext cx="4762500" cy="228600"/>
-          </a:xfrm>
-          <a:prstGeom prst="rect">
-            <a:avLst/>
-          </a:prstGeom>
-          <a:noFill/>
-          <a:ln w="0">
-            <a:noFill/>
-          </a:ln>
-        </p:spPr>
-        <p:txBody>
-          <a:bodyPr>
-            <a:noAutofit/>
-          </a:bodyPr>
-          <a:lstStyle/>
-          <a:p>
-            <a:pPr>
-              <a:defRPr sz="1200" b="1">
-                <a:solidFill>
-                  <a:srgbClr val="002855"/>
-                </a:solidFill>
-                <a:latin typeface="Arial"/>
-                <a:ea typeface="Arial"/>
-                <a:cs typeface="Arial"/>
-              </a:defRPr>
-            </a:pPr>
-            <a:r>
-              <a:rPr sz="1200" b="1">
-                <a:solidFill>
-                  <a:srgbClr val="002855"/>
-                </a:solidFill>
-                <a:latin typeface="Arial"/>
-                <a:ea typeface="Arial"/>
-                <a:cs typeface="Arial"/>
-              </a:rPr>
-              <a:t>WVU DSPIRA</a:t>
-            </a:r>
-          </a:p>
-        </p:txBody>
       </p:sp>
       <p:sp>
         <p:nvSpPr>
@@ -6755,6 +6905,156 @@
                 <a:cs typeface="Arial"/>
               </a:rPr>
               <a:t>4 of 7</a:t>
+            </a:r>
+          </a:p>
+        </p:txBody>
+      </p:sp>
+      <p:sp>
+        <p:nvSpPr>
+          <p:cNvPr id="17" name="WVU DSPIRA navy band"/>
+          <p:cNvSpPr>
+            <a:spLocks noGrp="1"/>
+          </p:cNvSpPr>
+          <p:nvPr/>
+        </p:nvSpPr>
+        <p:spPr>
+          <a:xfrm>
+            <a:off x="0" y="0"/>
+            <a:ext cx="12192000" cy="323850"/>
+          </a:xfrm>
+          <a:prstGeom prst="rect">
+            <a:avLst/>
+          </a:prstGeom>
+          <a:solidFill>
+            <a:srgbClr val="002855"/>
+          </a:solidFill>
+          <a:ln w="0">
+            <a:noFill/>
+          </a:ln>
+        </p:spPr>
+      </p:sp>
+      <p:sp>
+        <p:nvSpPr>
+          <p:cNvPr id="18" name="WVU DSPIRA gold rule"/>
+          <p:cNvSpPr>
+            <a:spLocks noGrp="1"/>
+          </p:cNvSpPr>
+          <p:nvPr/>
+        </p:nvSpPr>
+        <p:spPr>
+          <a:xfrm>
+            <a:off x="0" y="323850"/>
+            <a:ext cx="12192000" cy="19050"/>
+          </a:xfrm>
+          <a:prstGeom prst="rect">
+            <a:avLst/>
+          </a:prstGeom>
+          <a:solidFill>
+            <a:srgbClr val="EEAA00"/>
+          </a:solidFill>
+          <a:ln w="0">
+            <a:noFill/>
+          </a:ln>
+        </p:spPr>
+      </p:sp>
+      <p:sp>
+        <p:nvSpPr>
+          <p:cNvPr id="19" name="WVU DSPIRA name"/>
+          <p:cNvSpPr>
+            <a:spLocks noGrp="1"/>
+          </p:cNvSpPr>
+          <p:nvPr/>
+        </p:nvSpPr>
+        <p:spPr>
+          <a:xfrm>
+            <a:off x="228600" y="19050"/>
+            <a:ext cx="2857500" cy="257175"/>
+          </a:xfrm>
+          <a:prstGeom prst="rect">
+            <a:avLst/>
+          </a:prstGeom>
+          <a:noFill/>
+          <a:ln w="0">
+            <a:noFill/>
+          </a:ln>
+        </p:spPr>
+        <p:txBody>
+          <a:bodyPr>
+            <a:noAutofit/>
+          </a:bodyPr>
+          <a:lstStyle/>
+          <a:p>
+            <a:pPr>
+              <a:defRPr sz="1600" b="1">
+                <a:solidFill>
+                  <a:srgbClr val="FFFFFF"/>
+                </a:solidFill>
+                <a:latin typeface="Arial"/>
+                <a:ea typeface="Arial"/>
+                <a:cs typeface="Arial"/>
+              </a:defRPr>
+            </a:pPr>
+            <a:r>
+              <a:rPr sz="1600" b="1">
+                <a:solidFill>
+                  <a:srgbClr val="FFFFFF"/>
+                </a:solidFill>
+                <a:latin typeface="Arial"/>
+                <a:ea typeface="Arial"/>
+                <a:cs typeface="Arial"/>
+              </a:rPr>
+              <a:t>WVU DSPIRA</a:t>
+            </a:r>
+          </a:p>
+        </p:txBody>
+      </p:sp>
+      <p:sp>
+        <p:nvSpPr>
+          <p:cNvPr id="20" name="WVU DSPIRA university"/>
+          <p:cNvSpPr>
+            <a:spLocks noGrp="1"/>
+          </p:cNvSpPr>
+          <p:nvPr/>
+        </p:nvSpPr>
+        <p:spPr>
+          <a:xfrm>
+            <a:off x="9334500" y="114300"/>
+            <a:ext cx="2628900" cy="171450"/>
+          </a:xfrm>
+          <a:prstGeom prst="rect">
+            <a:avLst/>
+          </a:prstGeom>
+          <a:noFill/>
+          <a:ln w="0">
+            <a:noFill/>
+          </a:ln>
+        </p:spPr>
+        <p:txBody>
+          <a:bodyPr>
+            <a:noAutofit/>
+          </a:bodyPr>
+          <a:lstStyle/>
+          <a:p>
+            <a:pPr algn="r">
+              <a:defRPr sz="900">
+                <a:solidFill>
+                  <a:srgbClr val="FFFFFF"/>
+                </a:solidFill>
+                <a:latin typeface="Arial"/>
+                <a:ea typeface="Arial"/>
+                <a:cs typeface="Arial"/>
+              </a:defRPr>
+            </a:pPr>
+            <a:r>
+              <a:rPr sz="900">
+                <a:solidFill>
+                  <a:srgbClr val="FFFFFF"/>
+                </a:solidFill>
+                <a:latin typeface="Arial"/>
+                <a:ea typeface="Arial"/>
+                <a:cs typeface="Arial"/>
+              </a:rPr>
+              <a:t>WEST VIRGINIA UNIVERSITY</a:t>
             </a:r>
           </a:p>
         </p:txBody>
@@ -8204,30 +8504,6 @@
       </mc:AlternateContent>
       <p:sp>
         <p:nvSpPr>
-          <p:cNvPr id="11" name="DSPIRA 1"/>
-          <p:cNvSpPr>
-            <a:spLocks noGrp="1"/>
-          </p:cNvSpPr>
-          <p:nvPr/>
-        </p:nvSpPr>
-        <p:spPr>
-          <a:xfrm>
-            <a:off x="0" y="0"/>
-            <a:ext cx="12192000" cy="342900"/>
-          </a:xfrm>
-          <a:prstGeom prst="rect">
-            <a:avLst/>
-          </a:prstGeom>
-          <a:solidFill>
-            <a:srgbClr val="FFFFFF"/>
-          </a:solidFill>
-          <a:ln w="0">
-            <a:noFill/>
-          </a:ln>
-        </p:spPr>
-      </p:sp>
-      <p:sp>
-        <p:nvSpPr>
           <p:cNvPr id="12" name="DSPIRA 2"/>
           <p:cNvSpPr>
             <a:spLocks noGrp="1"/>
@@ -8249,57 +8525,6 @@
             <a:noFill/>
           </a:ln>
         </p:spPr>
-      </p:sp>
-      <p:sp>
-        <p:nvSpPr>
-          <p:cNvPr id="13" name="DSPIRA 3"/>
-          <p:cNvSpPr>
-            <a:spLocks noGrp="1"/>
-          </p:cNvSpPr>
-          <p:nvPr/>
-        </p:nvSpPr>
-        <p:spPr>
-          <a:xfrm>
-            <a:off x="228600" y="76200"/>
-            <a:ext cx="4762500" cy="228600"/>
-          </a:xfrm>
-          <a:prstGeom prst="rect">
-            <a:avLst/>
-          </a:prstGeom>
-          <a:noFill/>
-          <a:ln w="0">
-            <a:noFill/>
-          </a:ln>
-        </p:spPr>
-        <p:txBody>
-          <a:bodyPr>
-            <a:noAutofit/>
-          </a:bodyPr>
-          <a:lstStyle/>
-          <a:p>
-            <a:pPr>
-              <a:defRPr sz="1200" b="1">
-                <a:solidFill>
-                  <a:srgbClr val="002855"/>
-                </a:solidFill>
-                <a:latin typeface="Arial"/>
-                <a:ea typeface="Arial"/>
-                <a:cs typeface="Arial"/>
-              </a:defRPr>
-            </a:pPr>
-            <a:r>
-              <a:rPr sz="1200" b="1">
-                <a:solidFill>
-                  <a:srgbClr val="002855"/>
-                </a:solidFill>
-                <a:latin typeface="Arial"/>
-                <a:ea typeface="Arial"/>
-                <a:cs typeface="Arial"/>
-              </a:rPr>
-              <a:t>WVU DSPIRA</a:t>
-            </a:r>
-          </a:p>
-        </p:txBody>
       </p:sp>
       <p:sp>
         <p:nvSpPr>
@@ -8399,6 +8624,156 @@
                 <a:cs typeface="Arial"/>
               </a:rPr>
               <a:t>5 of 7</a:t>
+            </a:r>
+          </a:p>
+        </p:txBody>
+      </p:sp>
+      <p:sp>
+        <p:nvSpPr>
+          <p:cNvPr id="16" name="WVU DSPIRA navy band"/>
+          <p:cNvSpPr>
+            <a:spLocks noGrp="1"/>
+          </p:cNvSpPr>
+          <p:nvPr/>
+        </p:nvSpPr>
+        <p:spPr>
+          <a:xfrm>
+            <a:off x="0" y="0"/>
+            <a:ext cx="12192000" cy="323850"/>
+          </a:xfrm>
+          <a:prstGeom prst="rect">
+            <a:avLst/>
+          </a:prstGeom>
+          <a:solidFill>
+            <a:srgbClr val="002855"/>
+          </a:solidFill>
+          <a:ln w="0">
+            <a:noFill/>
+          </a:ln>
+        </p:spPr>
+      </p:sp>
+      <p:sp>
+        <p:nvSpPr>
+          <p:cNvPr id="17" name="WVU DSPIRA gold rule"/>
+          <p:cNvSpPr>
+            <a:spLocks noGrp="1"/>
+          </p:cNvSpPr>
+          <p:nvPr/>
+        </p:nvSpPr>
+        <p:spPr>
+          <a:xfrm>
+            <a:off x="0" y="323850"/>
+            <a:ext cx="12192000" cy="19050"/>
+          </a:xfrm>
+          <a:prstGeom prst="rect">
+            <a:avLst/>
+          </a:prstGeom>
+          <a:solidFill>
+            <a:srgbClr val="EEAA00"/>
+          </a:solidFill>
+          <a:ln w="0">
+            <a:noFill/>
+          </a:ln>
+        </p:spPr>
+      </p:sp>
+      <p:sp>
+        <p:nvSpPr>
+          <p:cNvPr id="18" name="WVU DSPIRA name"/>
+          <p:cNvSpPr>
+            <a:spLocks noGrp="1"/>
+          </p:cNvSpPr>
+          <p:nvPr/>
+        </p:nvSpPr>
+        <p:spPr>
+          <a:xfrm>
+            <a:off x="228600" y="19050"/>
+            <a:ext cx="2857500" cy="257175"/>
+          </a:xfrm>
+          <a:prstGeom prst="rect">
+            <a:avLst/>
+          </a:prstGeom>
+          <a:noFill/>
+          <a:ln w="0">
+            <a:noFill/>
+          </a:ln>
+        </p:spPr>
+        <p:txBody>
+          <a:bodyPr>
+            <a:noAutofit/>
+          </a:bodyPr>
+          <a:lstStyle/>
+          <a:p>
+            <a:pPr>
+              <a:defRPr sz="1600" b="1">
+                <a:solidFill>
+                  <a:srgbClr val="FFFFFF"/>
+                </a:solidFill>
+                <a:latin typeface="Arial"/>
+                <a:ea typeface="Arial"/>
+                <a:cs typeface="Arial"/>
+              </a:defRPr>
+            </a:pPr>
+            <a:r>
+              <a:rPr sz="1600" b="1">
+                <a:solidFill>
+                  <a:srgbClr val="FFFFFF"/>
+                </a:solidFill>
+                <a:latin typeface="Arial"/>
+                <a:ea typeface="Arial"/>
+                <a:cs typeface="Arial"/>
+              </a:rPr>
+              <a:t>WVU DSPIRA</a:t>
+            </a:r>
+          </a:p>
+        </p:txBody>
+      </p:sp>
+      <p:sp>
+        <p:nvSpPr>
+          <p:cNvPr id="19" name="WVU DSPIRA university"/>
+          <p:cNvSpPr>
+            <a:spLocks noGrp="1"/>
+          </p:cNvSpPr>
+          <p:nvPr/>
+        </p:nvSpPr>
+        <p:spPr>
+          <a:xfrm>
+            <a:off x="9334500" y="114300"/>
+            <a:ext cx="2628900" cy="171450"/>
+          </a:xfrm>
+          <a:prstGeom prst="rect">
+            <a:avLst/>
+          </a:prstGeom>
+          <a:noFill/>
+          <a:ln w="0">
+            <a:noFill/>
+          </a:ln>
+        </p:spPr>
+        <p:txBody>
+          <a:bodyPr>
+            <a:noAutofit/>
+          </a:bodyPr>
+          <a:lstStyle/>
+          <a:p>
+            <a:pPr algn="r">
+              <a:defRPr sz="900">
+                <a:solidFill>
+                  <a:srgbClr val="FFFFFF"/>
+                </a:solidFill>
+                <a:latin typeface="Arial"/>
+                <a:ea typeface="Arial"/>
+                <a:cs typeface="Arial"/>
+              </a:defRPr>
+            </a:pPr>
+            <a:r>
+              <a:rPr sz="900">
+                <a:solidFill>
+                  <a:srgbClr val="FFFFFF"/>
+                </a:solidFill>
+                <a:latin typeface="Arial"/>
+                <a:ea typeface="Arial"/>
+                <a:cs typeface="Arial"/>
+              </a:rPr>
+              <a:t>WEST VIRGINIA UNIVERSITY</a:t>
             </a:r>
           </a:p>
         </p:txBody>
@@ -9661,30 +10036,6 @@
       </mc:AlternateContent>
       <p:sp>
         <p:nvSpPr>
-          <p:cNvPr id="13" name="DSPIRA 1"/>
-          <p:cNvSpPr>
-            <a:spLocks noGrp="1"/>
-          </p:cNvSpPr>
-          <p:nvPr/>
-        </p:nvSpPr>
-        <p:spPr>
-          <a:xfrm>
-            <a:off x="0" y="0"/>
-            <a:ext cx="12192000" cy="342900"/>
-          </a:xfrm>
-          <a:prstGeom prst="rect">
-            <a:avLst/>
-          </a:prstGeom>
-          <a:solidFill>
-            <a:srgbClr val="FFFFFF"/>
-          </a:solidFill>
-          <a:ln w="0">
-            <a:noFill/>
-          </a:ln>
-        </p:spPr>
-      </p:sp>
-      <p:sp>
-        <p:nvSpPr>
           <p:cNvPr id="14" name="DSPIRA 2"/>
           <p:cNvSpPr>
             <a:spLocks noGrp="1"/>
@@ -9706,57 +10057,6 @@
             <a:noFill/>
           </a:ln>
         </p:spPr>
-      </p:sp>
-      <p:sp>
-        <p:nvSpPr>
-          <p:cNvPr id="15" name="DSPIRA 3"/>
-          <p:cNvSpPr>
-            <a:spLocks noGrp="1"/>
-          </p:cNvSpPr>
-          <p:nvPr/>
-        </p:nvSpPr>
-        <p:spPr>
-          <a:xfrm>
-            <a:off x="228600" y="76200"/>
-            <a:ext cx="4762500" cy="228600"/>
-          </a:xfrm>
-          <a:prstGeom prst="rect">
-            <a:avLst/>
-          </a:prstGeom>
-          <a:noFill/>
-          <a:ln w="0">
-            <a:noFill/>
-          </a:ln>
-        </p:spPr>
-        <p:txBody>
-          <a:bodyPr>
-            <a:noAutofit/>
-          </a:bodyPr>
-          <a:lstStyle/>
-          <a:p>
-            <a:pPr>
-              <a:defRPr sz="1200" b="1">
-                <a:solidFill>
-                  <a:srgbClr val="002855"/>
-                </a:solidFill>
-                <a:latin typeface="Arial"/>
-                <a:ea typeface="Arial"/>
-                <a:cs typeface="Arial"/>
-              </a:defRPr>
-            </a:pPr>
-            <a:r>
-              <a:rPr sz="1200" b="1">
-                <a:solidFill>
-                  <a:srgbClr val="002855"/>
-                </a:solidFill>
-                <a:latin typeface="Arial"/>
-                <a:ea typeface="Arial"/>
-                <a:cs typeface="Arial"/>
-              </a:rPr>
-              <a:t>WVU DSPIRA</a:t>
-            </a:r>
-          </a:p>
-        </p:txBody>
       </p:sp>
       <p:sp>
         <p:nvSpPr>
@@ -9856,6 +10156,156 @@
                 <a:cs typeface="Arial"/>
               </a:rPr>
               <a:t>6 of 7</a:t>
+            </a:r>
+          </a:p>
+        </p:txBody>
+      </p:sp>
+      <p:sp>
+        <p:nvSpPr>
+          <p:cNvPr id="18" name="WVU DSPIRA navy band"/>
+          <p:cNvSpPr>
+            <a:spLocks noGrp="1"/>
+          </p:cNvSpPr>
+          <p:nvPr/>
+        </p:nvSpPr>
+        <p:spPr>
+          <a:xfrm>
+            <a:off x="0" y="0"/>
+            <a:ext cx="12192000" cy="323850"/>
+          </a:xfrm>
+          <a:prstGeom prst="rect">
+            <a:avLst/>
+          </a:prstGeom>
+          <a:solidFill>
+            <a:srgbClr val="002855"/>
+          </a:solidFill>
+          <a:ln w="0">
+            <a:noFill/>
+          </a:ln>
+        </p:spPr>
+      </p:sp>
+      <p:sp>
+        <p:nvSpPr>
+          <p:cNvPr id="19" name="WVU DSPIRA gold rule"/>
+          <p:cNvSpPr>
+            <a:spLocks noGrp="1"/>
+          </p:cNvSpPr>
+          <p:nvPr/>
+        </p:nvSpPr>
+        <p:spPr>
+          <a:xfrm>
+            <a:off x="0" y="323850"/>
+            <a:ext cx="12192000" cy="19050"/>
+          </a:xfrm>
+          <a:prstGeom prst="rect">
+            <a:avLst/>
+          </a:prstGeom>
+          <a:solidFill>
+            <a:srgbClr val="EEAA00"/>
+          </a:solidFill>
+          <a:ln w="0">
+            <a:noFill/>
+          </a:ln>
+        </p:spPr>
+      </p:sp>
+      <p:sp>
+        <p:nvSpPr>
+          <p:cNvPr id="20" name="WVU DSPIRA name"/>
+          <p:cNvSpPr>
+            <a:spLocks noGrp="1"/>
+          </p:cNvSpPr>
+          <p:nvPr/>
+        </p:nvSpPr>
+        <p:spPr>
+          <a:xfrm>
+            <a:off x="228600" y="19050"/>
+            <a:ext cx="2857500" cy="257175"/>
+          </a:xfrm>
+          <a:prstGeom prst="rect">
+            <a:avLst/>
+          </a:prstGeom>
+          <a:noFill/>
+          <a:ln w="0">
+            <a:noFill/>
+          </a:ln>
+        </p:spPr>
+        <p:txBody>
+          <a:bodyPr>
+            <a:noAutofit/>
+          </a:bodyPr>
+          <a:lstStyle/>
+          <a:p>
+            <a:pPr>
+              <a:defRPr sz="1600" b="1">
+                <a:solidFill>
+                  <a:srgbClr val="FFFFFF"/>
+                </a:solidFill>
+                <a:latin typeface="Arial"/>
+                <a:ea typeface="Arial"/>
+                <a:cs typeface="Arial"/>
+              </a:defRPr>
+            </a:pPr>
+            <a:r>
+              <a:rPr sz="1600" b="1">
+                <a:solidFill>
+                  <a:srgbClr val="FFFFFF"/>
+                </a:solidFill>
+                <a:latin typeface="Arial"/>
+                <a:ea typeface="Arial"/>
+                <a:cs typeface="Arial"/>
+              </a:rPr>
+              <a:t>WVU DSPIRA</a:t>
+            </a:r>
+          </a:p>
+        </p:txBody>
+      </p:sp>
+      <p:sp>
+        <p:nvSpPr>
+          <p:cNvPr id="21" name="WVU DSPIRA university"/>
+          <p:cNvSpPr>
+            <a:spLocks noGrp="1"/>
+          </p:cNvSpPr>
+          <p:nvPr/>
+        </p:nvSpPr>
+        <p:spPr>
+          <a:xfrm>
+            <a:off x="9334500" y="114300"/>
+            <a:ext cx="2628900" cy="171450"/>
+          </a:xfrm>
+          <a:prstGeom prst="rect">
+            <a:avLst/>
+          </a:prstGeom>
+          <a:noFill/>
+          <a:ln w="0">
+            <a:noFill/>
+          </a:ln>
+        </p:spPr>
+        <p:txBody>
+          <a:bodyPr>
+            <a:noAutofit/>
+          </a:bodyPr>
+          <a:lstStyle/>
+          <a:p>
+            <a:pPr algn="r">
+              <a:defRPr sz="900">
+                <a:solidFill>
+                  <a:srgbClr val="FFFFFF"/>
+                </a:solidFill>
+                <a:latin typeface="Arial"/>
+                <a:ea typeface="Arial"/>
+                <a:cs typeface="Arial"/>
+              </a:defRPr>
+            </a:pPr>
+            <a:r>
+              <a:rPr sz="900">
+                <a:solidFill>
+                  <a:srgbClr val="FFFFFF"/>
+                </a:solidFill>
+                <a:latin typeface="Arial"/>
+                <a:ea typeface="Arial"/>
+                <a:cs typeface="Arial"/>
+              </a:rPr>
+              <a:t>WEST VIRGINIA UNIVERSITY</a:t>
             </a:r>
           </a:p>
         </p:txBody>
@@ -10030,30 +10480,6 @@
       </p:sp>
       <p:sp>
         <p:nvSpPr>
-          <p:cNvPr id="10" name="DSPIRA 1"/>
-          <p:cNvSpPr>
-            <a:spLocks noGrp="1"/>
-          </p:cNvSpPr>
-          <p:nvPr/>
-        </p:nvSpPr>
-        <p:spPr>
-          <a:xfrm>
-            <a:off x="0" y="0"/>
-            <a:ext cx="12192000" cy="342900"/>
-          </a:xfrm>
-          <a:prstGeom prst="rect">
-            <a:avLst/>
-          </a:prstGeom>
-          <a:solidFill>
-            <a:srgbClr val="FFFFFF"/>
-          </a:solidFill>
-          <a:ln w="0">
-            <a:noFill/>
-          </a:ln>
-        </p:spPr>
-      </p:sp>
-      <p:sp>
-        <p:nvSpPr>
           <p:cNvPr id="11" name="DSPIRA 2"/>
           <p:cNvSpPr>
             <a:spLocks noGrp="1"/>
@@ -10075,57 +10501,6 @@
             <a:noFill/>
           </a:ln>
         </p:spPr>
-      </p:sp>
-      <p:sp>
-        <p:nvSpPr>
-          <p:cNvPr id="12" name="DSPIRA 3"/>
-          <p:cNvSpPr>
-            <a:spLocks noGrp="1"/>
-          </p:cNvSpPr>
-          <p:nvPr/>
-        </p:nvSpPr>
-        <p:spPr>
-          <a:xfrm>
-            <a:off x="228600" y="76200"/>
-            <a:ext cx="4762500" cy="228600"/>
-          </a:xfrm>
-          <a:prstGeom prst="rect">
-            <a:avLst/>
-          </a:prstGeom>
-          <a:noFill/>
-          <a:ln w="0">
-            <a:noFill/>
-          </a:ln>
-        </p:spPr>
-        <p:txBody>
-          <a:bodyPr>
-            <a:noAutofit/>
-          </a:bodyPr>
-          <a:lstStyle/>
-          <a:p>
-            <a:pPr>
-              <a:defRPr sz="1200" b="1">
-                <a:solidFill>
-                  <a:srgbClr val="002855"/>
-                </a:solidFill>
-                <a:latin typeface="Arial"/>
-                <a:ea typeface="Arial"/>
-                <a:cs typeface="Arial"/>
-              </a:defRPr>
-            </a:pPr>
-            <a:r>
-              <a:rPr sz="1200" b="1">
-                <a:solidFill>
-                  <a:srgbClr val="002855"/>
-                </a:solidFill>
-                <a:latin typeface="Arial"/>
-                <a:ea typeface="Arial"/>
-                <a:cs typeface="Arial"/>
-              </a:rPr>
-              <a:t>WVU DSPIRA</a:t>
-            </a:r>
-          </a:p>
-        </p:txBody>
       </p:sp>
       <p:sp>
         <p:nvSpPr>
@@ -10225,6 +10600,156 @@
                 <a:cs typeface="Arial"/>
               </a:rPr>
               <a:t>7 of 7</a:t>
+            </a:r>
+          </a:p>
+        </p:txBody>
+      </p:sp>
+      <p:sp>
+        <p:nvSpPr>
+          <p:cNvPr id="15" name="WVU DSPIRA navy band"/>
+          <p:cNvSpPr>
+            <a:spLocks noGrp="1"/>
+          </p:cNvSpPr>
+          <p:nvPr/>
+        </p:nvSpPr>
+        <p:spPr>
+          <a:xfrm>
+            <a:off x="0" y="0"/>
+            <a:ext cx="12192000" cy="323850"/>
+          </a:xfrm>
+          <a:prstGeom prst="rect">
+            <a:avLst/>
+          </a:prstGeom>
+          <a:solidFill>
+            <a:srgbClr val="002855"/>
+          </a:solidFill>
+          <a:ln w="0">
+            <a:noFill/>
+          </a:ln>
+        </p:spPr>
+      </p:sp>
+      <p:sp>
+        <p:nvSpPr>
+          <p:cNvPr id="16" name="WVU DSPIRA gold rule"/>
+          <p:cNvSpPr>
+            <a:spLocks noGrp="1"/>
+          </p:cNvSpPr>
+          <p:nvPr/>
+        </p:nvSpPr>
+        <p:spPr>
+          <a:xfrm>
+            <a:off x="0" y="323850"/>
+            <a:ext cx="12192000" cy="19050"/>
+          </a:xfrm>
+          <a:prstGeom prst="rect">
+            <a:avLst/>
+          </a:prstGeom>
+          <a:solidFill>
+            <a:srgbClr val="EEAA00"/>
+          </a:solidFill>
+          <a:ln w="0">
+            <a:noFill/>
+          </a:ln>
+        </p:spPr>
+      </p:sp>
+      <p:sp>
+        <p:nvSpPr>
+          <p:cNvPr id="17" name="WVU DSPIRA name"/>
+          <p:cNvSpPr>
+            <a:spLocks noGrp="1"/>
+          </p:cNvSpPr>
+          <p:nvPr/>
+        </p:nvSpPr>
+        <p:spPr>
+          <a:xfrm>
+            <a:off x="228600" y="19050"/>
+            <a:ext cx="2857500" cy="257175"/>
+          </a:xfrm>
+          <a:prstGeom prst="rect">
+            <a:avLst/>
+          </a:prstGeom>
+          <a:noFill/>
+          <a:ln w="0">
+            <a:noFill/>
+          </a:ln>
+        </p:spPr>
+        <p:txBody>
+          <a:bodyPr>
+            <a:noAutofit/>
+          </a:bodyPr>
+          <a:lstStyle/>
+          <a:p>
+            <a:pPr>
+              <a:defRPr sz="1600" b="1">
+                <a:solidFill>
+                  <a:srgbClr val="FFFFFF"/>
+                </a:solidFill>
+                <a:latin typeface="Arial"/>
+                <a:ea typeface="Arial"/>
+                <a:cs typeface="Arial"/>
+              </a:defRPr>
+            </a:pPr>
+            <a:r>
+              <a:rPr sz="1600" b="1">
+                <a:solidFill>
+                  <a:srgbClr val="FFFFFF"/>
+                </a:solidFill>
+                <a:latin typeface="Arial"/>
+                <a:ea typeface="Arial"/>
+                <a:cs typeface="Arial"/>
+              </a:rPr>
+              <a:t>WVU DSPIRA</a:t>
+            </a:r>
+          </a:p>
+        </p:txBody>
+      </p:sp>
+      <p:sp>
+        <p:nvSpPr>
+          <p:cNvPr id="18" name="WVU DSPIRA university"/>
+          <p:cNvSpPr>
+            <a:spLocks noGrp="1"/>
+          </p:cNvSpPr>
+          <p:nvPr/>
+        </p:nvSpPr>
+        <p:spPr>
+          <a:xfrm>
+            <a:off x="9334500" y="114300"/>
+            <a:ext cx="2628900" cy="171450"/>
+          </a:xfrm>
+          <a:prstGeom prst="rect">
+            <a:avLst/>
+          </a:prstGeom>
+          <a:noFill/>
+          <a:ln w="0">
+            <a:noFill/>
+          </a:ln>
+        </p:spPr>
+        <p:txBody>
+          <a:bodyPr>
+            <a:noAutofit/>
+          </a:bodyPr>
+          <a:lstStyle/>
+          <a:p>
+            <a:pPr algn="r">
+              <a:defRPr sz="900">
+                <a:solidFill>
+                  <a:srgbClr val="FFFFFF"/>
+                </a:solidFill>
+                <a:latin typeface="Arial"/>
+                <a:ea typeface="Arial"/>
+                <a:cs typeface="Arial"/>
+              </a:defRPr>
+            </a:pPr>
+            <a:r>
+              <a:rPr sz="900">
+                <a:solidFill>
+                  <a:srgbClr val="FFFFFF"/>
+                </a:solidFill>
+                <a:latin typeface="Arial"/>
+                <a:ea typeface="Arial"/>
+                <a:cs typeface="Arial"/>
+              </a:rPr>
+              <a:t>WEST VIRGINIA UNIVERSITY</a:t>
             </a:r>
           </a:p>
         </p:txBody>

--- a/assets/lessons/lectures/digital-signal-processing/fourier-series-2018.pptx
+++ b/assets/lessons/lectures/digital-signal-processing/fourier-series-2018.pptx
@@ -3825,7 +3825,7 @@
                 <a:ea typeface="Arial"/>
                 <a:cs typeface="Arial"/>
               </a:rPr>
-              <a:t>wvurail.org/dspira</a:t>
+              <a:t>rail.wvu.edu/dspira</a:t>
             </a:r>
           </a:p>
         </p:txBody>
